--- a/docs/prajna-deck/prajna-deck.pptx
+++ b/docs/prajna-deck/prajna-deck.pptx
@@ -1684,8 +1684,8 @@
         </p:nvSpPr>
         <p:spPr>
           <a:xfrm>
-            <a:off x="-731520" y="-548640"/>
-            <a:ext cx="5029200" cy="5029200"/>
+            <a:off x="-1097280" y="-731520"/>
+            <a:ext cx="4572000" cy="4572000"/>
           </a:xfrm>
           <a:prstGeom prst="ellipse">
             <a:avLst/>
@@ -1711,8 +1711,8 @@
         </p:nvSpPr>
         <p:spPr>
           <a:xfrm>
-            <a:off x="6583680" y="1097280"/>
-            <a:ext cx="4114800" cy="4114800"/>
+            <a:off x="7132320" y="1828800"/>
+            <a:ext cx="3200400" cy="3200400"/>
           </a:xfrm>
           <a:prstGeom prst="ellipse">
             <a:avLst/>
@@ -1738,7 +1738,7 @@
         </p:nvSpPr>
         <p:spPr>
           <a:xfrm>
-            <a:off x="502920" y="1234440"/>
+            <a:off x="548640" y="1234440"/>
             <a:ext cx="64008" cy="2560320"/>
           </a:xfrm>
           <a:prstGeom prst="rect">
@@ -1763,8 +1763,8 @@
         </p:nvSpPr>
         <p:spPr>
           <a:xfrm>
-            <a:off x="731520" y="1143000"/>
-            <a:ext cx="7772400" cy="1234440"/>
+            <a:off x="777240" y="1143000"/>
+            <a:ext cx="7315200" cy="1234440"/>
           </a:xfrm>
           <a:prstGeom prst="rect">
             <a:avLst/>
@@ -1802,8 +1802,8 @@
         </p:nvSpPr>
         <p:spPr>
           <a:xfrm>
-            <a:off x="731520" y="2423160"/>
-            <a:ext cx="6858000" cy="438912"/>
+            <a:off x="777240" y="2423160"/>
+            <a:ext cx="6583680" cy="457200"/>
           </a:xfrm>
           <a:prstGeom prst="rect">
             <a:avLst/>
@@ -1819,7 +1819,7 @@
               <a:buNone/>
             </a:pPr>
             <a:r>
-              <a:rPr lang="en-US" sz="1450" i="1" dirty="0">
+              <a:rPr lang="en-US" sz="1400" i="1" dirty="0">
                 <a:solidFill>
                   <a:srgbClr val="06B6D4"/>
                 </a:solidFill>
@@ -1829,7 +1829,7 @@
               </a:rPr>
               <a:t>Personalized Revision &amp; Academic Journey Navigation Assistant</a:t>
             </a:r>
-            <a:endParaRPr lang="en-US" sz="1450" dirty="0"/>
+            <a:endParaRPr lang="en-US" sz="1400" dirty="0"/>
           </a:p>
         </p:txBody>
       </p:sp>
@@ -1841,8 +1841,8 @@
         </p:nvSpPr>
         <p:spPr>
           <a:xfrm>
-            <a:off x="731520" y="2926080"/>
-            <a:ext cx="6858000" cy="365760"/>
+            <a:off x="777240" y="2944368"/>
+            <a:ext cx="6583680" cy="347472"/>
           </a:xfrm>
           <a:prstGeom prst="rect">
             <a:avLst/>
@@ -1858,7 +1858,7 @@
               <a:buNone/>
             </a:pPr>
             <a:r>
-              <a:rPr lang="en-US" sz="1350" dirty="0">
+              <a:rPr lang="en-US" sz="1300" dirty="0">
                 <a:solidFill>
                   <a:srgbClr val="94A3B8"/>
                 </a:solidFill>
@@ -1868,7 +1868,7 @@
               </a:rPr>
               <a:t>AI-Powered Exam Intelligence for NEET · JEE Main · JEE Advanced</a:t>
             </a:r>
-            <a:endParaRPr lang="en-US" sz="1350" dirty="0"/>
+            <a:endParaRPr lang="en-US" sz="1300" dirty="0"/>
           </a:p>
         </p:txBody>
       </p:sp>
@@ -1880,8 +1880,8 @@
         </p:nvSpPr>
         <p:spPr>
           <a:xfrm>
-            <a:off x="731520" y="3493008"/>
-            <a:ext cx="2468880" cy="347472"/>
+            <a:off x="777240" y="3456432"/>
+            <a:ext cx="2331720" cy="329184"/>
           </a:xfrm>
           <a:prstGeom prst="rect">
             <a:avLst/>
@@ -1905,8 +1905,8 @@
         </p:nvSpPr>
         <p:spPr>
           <a:xfrm>
-            <a:off x="731520" y="3493008"/>
-            <a:ext cx="2468880" cy="347472"/>
+            <a:off x="777240" y="3456432"/>
+            <a:ext cx="2331720" cy="329184"/>
           </a:xfrm>
           <a:prstGeom prst="rect">
             <a:avLst/>
@@ -1944,8 +1944,8 @@
         </p:nvSpPr>
         <p:spPr>
           <a:xfrm>
-            <a:off x="3474720" y="3493008"/>
-            <a:ext cx="2468880" cy="347472"/>
+            <a:off x="3291840" y="3456432"/>
+            <a:ext cx="2331720" cy="329184"/>
           </a:xfrm>
           <a:prstGeom prst="rect">
             <a:avLst/>
@@ -1969,8 +1969,8 @@
         </p:nvSpPr>
         <p:spPr>
           <a:xfrm>
-            <a:off x="3474720" y="3493008"/>
-            <a:ext cx="2468880" cy="347472"/>
+            <a:off x="3291840" y="3456432"/>
+            <a:ext cx="2331720" cy="329184"/>
           </a:xfrm>
           <a:prstGeom prst="rect">
             <a:avLst/>
@@ -1994,7 +1994,7 @@
                 <a:ea typeface="Calibri" pitchFamily="34" charset="-122"/>
                 <a:cs typeface="Calibri" pitchFamily="34" charset="-120"/>
               </a:rPr>
-              <a:t>8,000+ Questions Indexed</a:t>
+              <a:t>8,000+ Questions</a:t>
             </a:r>
             <a:endParaRPr lang="en-US" sz="1050" dirty="0"/>
           </a:p>
@@ -2008,8 +2008,8 @@
         </p:nvSpPr>
         <p:spPr>
           <a:xfrm>
-            <a:off x="6217920" y="3493008"/>
-            <a:ext cx="2468880" cy="347472"/>
+            <a:off x="5806440" y="3456432"/>
+            <a:ext cx="2331720" cy="329184"/>
           </a:xfrm>
           <a:prstGeom prst="rect">
             <a:avLst/>
@@ -2033,8 +2033,8 @@
         </p:nvSpPr>
         <p:spPr>
           <a:xfrm>
-            <a:off x="6217920" y="3493008"/>
-            <a:ext cx="2468880" cy="347472"/>
+            <a:off x="5806440" y="3456432"/>
+            <a:ext cx="2331720" cy="329184"/>
           </a:xfrm>
           <a:prstGeom prst="rect">
             <a:avLst/>
@@ -2072,8 +2072,8 @@
         </p:nvSpPr>
         <p:spPr>
           <a:xfrm>
-            <a:off x="0" y="4754880"/>
-            <a:ext cx="9144000" cy="388620"/>
+            <a:off x="0" y="4773168"/>
+            <a:ext cx="9144000" cy="370332"/>
           </a:xfrm>
           <a:prstGeom prst="rect">
             <a:avLst/>
@@ -2099,8 +2099,8 @@
         </p:nvSpPr>
         <p:spPr>
           <a:xfrm>
-            <a:off x="0" y="4754880"/>
-            <a:ext cx="9144000" cy="388620"/>
+            <a:off x="0" y="4773168"/>
+            <a:ext cx="9144000" cy="370332"/>
           </a:xfrm>
           <a:prstGeom prst="rect">
             <a:avLst/>
@@ -2124,7 +2124,7 @@
                 <a:ea typeface="Calibri" pitchFamily="34" charset="-122"/>
                 <a:cs typeface="Calibri" pitchFamily="34" charset="-120"/>
               </a:rPr>
-              <a:t>v2.0  ·  2026  ·  Built on open-weight models  ·  Zero ongoing API cost</a:t>
+              <a:t>v2.0  ·  2026  ·  Open-weight models  ·  Zero ongoing API cost</a:t>
             </a:r>
             <a:endParaRPr lang="en-US" sz="1000" dirty="0"/>
           </a:p>
@@ -2164,34 +2164,7 @@
       </p:grpSpPr>
       <p:sp>
         <p:nvSpPr>
-          <p:cNvPr id="2" name="Shape 0"/>
-          <p:cNvSpPr/>
-          <p:nvPr/>
-        </p:nvSpPr>
-        <p:spPr>
-          <a:xfrm>
-            <a:off x="6858000" y="-457200"/>
-            <a:ext cx="4114800" cy="4114800"/>
-          </a:xfrm>
-          <a:prstGeom prst="ellipse">
-            <a:avLst/>
-          </a:prstGeom>
-          <a:solidFill>
-            <a:srgbClr val="7C3AED">
-              <a:alpha val="12000"/>
-            </a:srgbClr>
-          </a:solidFill>
-          <a:ln w="12700">
-            <a:solidFill>
-              <a:srgbClr val="7C3AED"/>
-            </a:solidFill>
-            <a:prstDash val="solid"/>
-          </a:ln>
-        </p:spPr>
-      </p:sp>
-      <p:sp>
-        <p:nvSpPr>
-          <p:cNvPr id="3" name="Text 1"/>
+          <p:cNvPr id="2" name="Text 0"/>
           <p:cNvSpPr/>
           <p:nvPr/>
         </p:nvSpPr>
@@ -2230,7 +2203,7 @@
       </p:sp>
       <p:sp>
         <p:nvSpPr>
-          <p:cNvPr id="4" name="Shape 2"/>
+          <p:cNvPr id="3" name="Shape 1"/>
           <p:cNvSpPr/>
           <p:nvPr/>
         </p:nvSpPr>
@@ -2255,7 +2228,7 @@
       </p:sp>
       <p:sp>
         <p:nvSpPr>
-          <p:cNvPr id="5" name="Text 3"/>
+          <p:cNvPr id="4" name="Text 2"/>
           <p:cNvSpPr/>
           <p:nvPr/>
         </p:nvSpPr>
@@ -2294,7 +2267,7 @@
       </p:sp>
       <p:sp>
         <p:nvSpPr>
-          <p:cNvPr id="6" name="Shape 4"/>
+          <p:cNvPr id="5" name="Shape 3"/>
           <p:cNvSpPr/>
           <p:nvPr/>
         </p:nvSpPr>
@@ -2319,7 +2292,7 @@
       </p:sp>
       <p:sp>
         <p:nvSpPr>
-          <p:cNvPr id="7" name="Text 5"/>
+          <p:cNvPr id="6" name="Text 4"/>
           <p:cNvSpPr/>
           <p:nvPr/>
         </p:nvSpPr>
@@ -2358,14 +2331,14 @@
       </p:sp>
       <p:sp>
         <p:nvSpPr>
-          <p:cNvPr id="8" name="Shape 6"/>
+          <p:cNvPr id="7" name="Shape 5"/>
           <p:cNvSpPr/>
           <p:nvPr/>
         </p:nvSpPr>
         <p:spPr>
           <a:xfrm>
             <a:off x="5742432" y="868680"/>
-            <a:ext cx="1197864" cy="365760"/>
+            <a:ext cx="1225296" cy="365760"/>
           </a:xfrm>
           <a:prstGeom prst="rect">
             <a:avLst/>
@@ -2383,14 +2356,14 @@
       </p:sp>
       <p:sp>
         <p:nvSpPr>
-          <p:cNvPr id="9" name="Text 7"/>
+          <p:cNvPr id="8" name="Text 6"/>
           <p:cNvSpPr/>
           <p:nvPr/>
         </p:nvSpPr>
         <p:spPr>
           <a:xfrm>
             <a:off x="5833872" y="868680"/>
-            <a:ext cx="1106424" cy="365760"/>
+            <a:ext cx="1133856" cy="365760"/>
           </a:xfrm>
           <a:prstGeom prst="rect">
             <a:avLst/>
@@ -2422,14 +2395,39 @@
       </p:sp>
       <p:sp>
         <p:nvSpPr>
+          <p:cNvPr id="9" name="Shape 7"/>
+          <p:cNvSpPr/>
+          <p:nvPr/>
+        </p:nvSpPr>
+        <p:spPr>
+          <a:xfrm>
+            <a:off x="384048" y="1261872"/>
+            <a:ext cx="2478024" cy="292608"/>
+          </a:xfrm>
+          <a:prstGeom prst="rect">
+            <a:avLst/>
+          </a:prstGeom>
+          <a:solidFill>
+            <a:srgbClr val="161628"/>
+          </a:solidFill>
+          <a:ln w="6350">
+            <a:solidFill>
+              <a:srgbClr val="2A2A48"/>
+            </a:solidFill>
+            <a:prstDash val="solid"/>
+          </a:ln>
+        </p:spPr>
+      </p:sp>
+      <p:sp>
+        <p:nvSpPr>
           <p:cNvPr id="10" name="Shape 8"/>
           <p:cNvSpPr/>
           <p:nvPr/>
         </p:nvSpPr>
         <p:spPr>
           <a:xfrm>
-            <a:off x="384048" y="1261872"/>
-            <a:ext cx="2478024" cy="301752"/>
+            <a:off x="3063240" y="1261872"/>
+            <a:ext cx="2478024" cy="292608"/>
           </a:xfrm>
           <a:prstGeom prst="rect">
             <a:avLst/>
@@ -2453,8 +2451,8 @@
         </p:nvSpPr>
         <p:spPr>
           <a:xfrm>
-            <a:off x="3063240" y="1261872"/>
-            <a:ext cx="2478024" cy="301752"/>
+            <a:off x="5742432" y="1261872"/>
+            <a:ext cx="1225296" cy="292608"/>
           </a:xfrm>
           <a:prstGeom prst="rect">
             <a:avLst/>
@@ -2472,14 +2470,323 @@
       </p:sp>
       <p:sp>
         <p:nvSpPr>
-          <p:cNvPr id="12" name="Shape 10"/>
-          <p:cNvSpPr/>
-          <p:nvPr/>
-        </p:nvSpPr>
-        <p:spPr>
-          <a:xfrm>
-            <a:off x="5742432" y="1261872"/>
-            <a:ext cx="1197864" cy="301752"/>
+          <p:cNvPr id="12" name="Text 10"/>
+          <p:cNvSpPr/>
+          <p:nvPr/>
+        </p:nvSpPr>
+        <p:spPr>
+          <a:xfrm>
+            <a:off x="475488" y="1261872"/>
+            <a:ext cx="2386584" cy="292608"/>
+          </a:xfrm>
+          <a:prstGeom prst="rect">
+            <a:avLst/>
+          </a:prstGeom>
+          <a:noFill/>
+          <a:ln/>
+        </p:spPr>
+        <p:txBody>
+          <a:bodyPr wrap="square" lIns="0" tIns="0" rIns="0" bIns="0" rtlCol="0" anchor="ctr"/>
+          <a:lstStyle/>
+          <a:p>
+            <a:pPr algn="l" indent="0" marL="0">
+              <a:buNone/>
+            </a:pPr>
+            <a:r>
+              <a:rPr lang="en-US" sz="1050" dirty="0">
+                <a:solidFill>
+                  <a:srgbClr val="E2E8F0"/>
+                </a:solidFill>
+                <a:latin typeface="Calibri" pitchFamily="34" charset="0"/>
+                <a:ea typeface="Calibri" pitchFamily="34" charset="-122"/>
+                <a:cs typeface="Calibri" pitchFamily="34" charset="-120"/>
+              </a:rPr>
+              <a:t>Data Extraction</a:t>
+            </a:r>
+            <a:endParaRPr lang="en-US" sz="1050" dirty="0"/>
+          </a:p>
+        </p:txBody>
+      </p:sp>
+      <p:sp>
+        <p:nvSpPr>
+          <p:cNvPr id="13" name="Text 11"/>
+          <p:cNvSpPr/>
+          <p:nvPr/>
+        </p:nvSpPr>
+        <p:spPr>
+          <a:xfrm>
+            <a:off x="3154680" y="1261872"/>
+            <a:ext cx="2386584" cy="292608"/>
+          </a:xfrm>
+          <a:prstGeom prst="rect">
+            <a:avLst/>
+          </a:prstGeom>
+          <a:noFill/>
+          <a:ln/>
+        </p:spPr>
+        <p:txBody>
+          <a:bodyPr wrap="square" lIns="0" tIns="0" rIns="0" bIns="0" rtlCol="0" anchor="ctr"/>
+          <a:lstStyle/>
+          <a:p>
+            <a:pPr algn="l" indent="0" marL="0">
+              <a:buNone/>
+            </a:pPr>
+            <a:r>
+              <a:rPr lang="en-US" sz="1050" dirty="0">
+                <a:solidFill>
+                  <a:srgbClr val="A855F7"/>
+                </a:solidFill>
+                <a:latin typeface="Calibri" pitchFamily="34" charset="0"/>
+                <a:ea typeface="Calibri" pitchFamily="34" charset="-122"/>
+                <a:cs typeface="Calibri" pitchFamily="34" charset="-120"/>
+              </a:rPr>
+              <a:t>Claude AI (one-time)</a:t>
+            </a:r>
+            <a:endParaRPr lang="en-US" sz="1050" dirty="0"/>
+          </a:p>
+        </p:txBody>
+      </p:sp>
+      <p:sp>
+        <p:nvSpPr>
+          <p:cNvPr id="14" name="Text 12"/>
+          <p:cNvSpPr/>
+          <p:nvPr/>
+        </p:nvSpPr>
+        <p:spPr>
+          <a:xfrm>
+            <a:off x="5833872" y="1261872"/>
+            <a:ext cx="1133856" cy="292608"/>
+          </a:xfrm>
+          <a:prstGeom prst="rect">
+            <a:avLst/>
+          </a:prstGeom>
+          <a:noFill/>
+          <a:ln/>
+        </p:spPr>
+        <p:txBody>
+          <a:bodyPr wrap="square" lIns="0" tIns="0" rIns="0" bIns="0" rtlCol="0" anchor="ctr"/>
+          <a:lstStyle/>
+          <a:p>
+            <a:pPr algn="l" indent="0" marL="0">
+              <a:buNone/>
+            </a:pPr>
+            <a:r>
+              <a:rPr lang="en-US" sz="1050" dirty="0">
+                <a:solidFill>
+                  <a:srgbClr val="22C55E"/>
+                </a:solidFill>
+                <a:latin typeface="Calibri" pitchFamily="34" charset="0"/>
+                <a:ea typeface="Calibri" pitchFamily="34" charset="-122"/>
+                <a:cs typeface="Calibri" pitchFamily="34" charset="-120"/>
+              </a:rPr>
+              <a:t>Free tier</a:t>
+            </a:r>
+            <a:endParaRPr lang="en-US" sz="1050" dirty="0"/>
+          </a:p>
+        </p:txBody>
+      </p:sp>
+      <p:sp>
+        <p:nvSpPr>
+          <p:cNvPr id="15" name="Shape 13"/>
+          <p:cNvSpPr/>
+          <p:nvPr/>
+        </p:nvSpPr>
+        <p:spPr>
+          <a:xfrm>
+            <a:off x="384048" y="1580083"/>
+            <a:ext cx="2478024" cy="292608"/>
+          </a:xfrm>
+          <a:prstGeom prst="rect">
+            <a:avLst/>
+          </a:prstGeom>
+          <a:solidFill>
+            <a:srgbClr val="1E1E35"/>
+          </a:solidFill>
+          <a:ln w="6350">
+            <a:solidFill>
+              <a:srgbClr val="2A2A48"/>
+            </a:solidFill>
+            <a:prstDash val="solid"/>
+          </a:ln>
+        </p:spPr>
+      </p:sp>
+      <p:sp>
+        <p:nvSpPr>
+          <p:cNvPr id="16" name="Shape 14"/>
+          <p:cNvSpPr/>
+          <p:nvPr/>
+        </p:nvSpPr>
+        <p:spPr>
+          <a:xfrm>
+            <a:off x="3063240" y="1580083"/>
+            <a:ext cx="2478024" cy="292608"/>
+          </a:xfrm>
+          <a:prstGeom prst="rect">
+            <a:avLst/>
+          </a:prstGeom>
+          <a:solidFill>
+            <a:srgbClr val="1E1E35"/>
+          </a:solidFill>
+          <a:ln w="6350">
+            <a:solidFill>
+              <a:srgbClr val="2A2A48"/>
+            </a:solidFill>
+            <a:prstDash val="solid"/>
+          </a:ln>
+        </p:spPr>
+      </p:sp>
+      <p:sp>
+        <p:nvSpPr>
+          <p:cNvPr id="17" name="Shape 15"/>
+          <p:cNvSpPr/>
+          <p:nvPr/>
+        </p:nvSpPr>
+        <p:spPr>
+          <a:xfrm>
+            <a:off x="5742432" y="1580083"/>
+            <a:ext cx="1225296" cy="292608"/>
+          </a:xfrm>
+          <a:prstGeom prst="rect">
+            <a:avLst/>
+          </a:prstGeom>
+          <a:solidFill>
+            <a:srgbClr val="1E1E35"/>
+          </a:solidFill>
+          <a:ln w="6350">
+            <a:solidFill>
+              <a:srgbClr val="2A2A48"/>
+            </a:solidFill>
+            <a:prstDash val="solid"/>
+          </a:ln>
+        </p:spPr>
+      </p:sp>
+      <p:sp>
+        <p:nvSpPr>
+          <p:cNvPr id="18" name="Text 16"/>
+          <p:cNvSpPr/>
+          <p:nvPr/>
+        </p:nvSpPr>
+        <p:spPr>
+          <a:xfrm>
+            <a:off x="475488" y="1580083"/>
+            <a:ext cx="2386584" cy="292608"/>
+          </a:xfrm>
+          <a:prstGeom prst="rect">
+            <a:avLst/>
+          </a:prstGeom>
+          <a:noFill/>
+          <a:ln/>
+        </p:spPr>
+        <p:txBody>
+          <a:bodyPr wrap="square" lIns="0" tIns="0" rIns="0" bIns="0" rtlCol="0" anchor="ctr"/>
+          <a:lstStyle/>
+          <a:p>
+            <a:pPr algn="l" indent="0" marL="0">
+              <a:buNone/>
+            </a:pPr>
+            <a:r>
+              <a:rPr lang="en-US" sz="1050" dirty="0">
+                <a:solidFill>
+                  <a:srgbClr val="E2E8F0"/>
+                </a:solidFill>
+                <a:latin typeface="Calibri" pitchFamily="34" charset="0"/>
+                <a:ea typeface="Calibri" pitchFamily="34" charset="-122"/>
+                <a:cs typeface="Calibri" pitchFamily="34" charset="-120"/>
+              </a:rPr>
+              <a:t>Database</a:t>
+            </a:r>
+            <a:endParaRPr lang="en-US" sz="1050" dirty="0"/>
+          </a:p>
+        </p:txBody>
+      </p:sp>
+      <p:sp>
+        <p:nvSpPr>
+          <p:cNvPr id="19" name="Text 17"/>
+          <p:cNvSpPr/>
+          <p:nvPr/>
+        </p:nvSpPr>
+        <p:spPr>
+          <a:xfrm>
+            <a:off x="3154680" y="1580083"/>
+            <a:ext cx="2386584" cy="292608"/>
+          </a:xfrm>
+          <a:prstGeom prst="rect">
+            <a:avLst/>
+          </a:prstGeom>
+          <a:noFill/>
+          <a:ln/>
+        </p:spPr>
+        <p:txBody>
+          <a:bodyPr wrap="square" lIns="0" tIns="0" rIns="0" bIns="0" rtlCol="0" anchor="ctr"/>
+          <a:lstStyle/>
+          <a:p>
+            <a:pPr algn="l" indent="0" marL="0">
+              <a:buNone/>
+            </a:pPr>
+            <a:r>
+              <a:rPr lang="en-US" sz="1050" dirty="0">
+                <a:solidFill>
+                  <a:srgbClr val="A855F7"/>
+                </a:solidFill>
+                <a:latin typeface="Calibri" pitchFamily="34" charset="0"/>
+                <a:ea typeface="Calibri" pitchFamily="34" charset="-122"/>
+                <a:cs typeface="Calibri" pitchFamily="34" charset="-120"/>
+              </a:rPr>
+              <a:t>SQLite</a:t>
+            </a:r>
+            <a:endParaRPr lang="en-US" sz="1050" dirty="0"/>
+          </a:p>
+        </p:txBody>
+      </p:sp>
+      <p:sp>
+        <p:nvSpPr>
+          <p:cNvPr id="20" name="Text 18"/>
+          <p:cNvSpPr/>
+          <p:nvPr/>
+        </p:nvSpPr>
+        <p:spPr>
+          <a:xfrm>
+            <a:off x="5833872" y="1580083"/>
+            <a:ext cx="1133856" cy="292608"/>
+          </a:xfrm>
+          <a:prstGeom prst="rect">
+            <a:avLst/>
+          </a:prstGeom>
+          <a:noFill/>
+          <a:ln/>
+        </p:spPr>
+        <p:txBody>
+          <a:bodyPr wrap="square" lIns="0" tIns="0" rIns="0" bIns="0" rtlCol="0" anchor="ctr"/>
+          <a:lstStyle/>
+          <a:p>
+            <a:pPr algn="l" indent="0" marL="0">
+              <a:buNone/>
+            </a:pPr>
+            <a:r>
+              <a:rPr lang="en-US" sz="1050" dirty="0">
+                <a:solidFill>
+                  <a:srgbClr val="22C55E"/>
+                </a:solidFill>
+                <a:latin typeface="Calibri" pitchFamily="34" charset="0"/>
+                <a:ea typeface="Calibri" pitchFamily="34" charset="-122"/>
+                <a:cs typeface="Calibri" pitchFamily="34" charset="-120"/>
+              </a:rPr>
+              <a:t>Free</a:t>
+            </a:r>
+            <a:endParaRPr lang="en-US" sz="1050" dirty="0"/>
+          </a:p>
+        </p:txBody>
+      </p:sp>
+      <p:sp>
+        <p:nvSpPr>
+          <p:cNvPr id="21" name="Shape 19"/>
+          <p:cNvSpPr/>
+          <p:nvPr/>
+        </p:nvSpPr>
+        <p:spPr>
+          <a:xfrm>
+            <a:off x="384048" y="1898294"/>
+            <a:ext cx="2478024" cy="292608"/>
           </a:xfrm>
           <a:prstGeom prst="rect">
             <a:avLst/>
@@ -2497,14 +2804,64 @@
       </p:sp>
       <p:sp>
         <p:nvSpPr>
-          <p:cNvPr id="13" name="Text 11"/>
-          <p:cNvSpPr/>
-          <p:nvPr/>
-        </p:nvSpPr>
-        <p:spPr>
-          <a:xfrm>
-            <a:off x="475488" y="1261872"/>
-            <a:ext cx="2386584" cy="301752"/>
+          <p:cNvPr id="22" name="Shape 20"/>
+          <p:cNvSpPr/>
+          <p:nvPr/>
+        </p:nvSpPr>
+        <p:spPr>
+          <a:xfrm>
+            <a:off x="3063240" y="1898294"/>
+            <a:ext cx="2478024" cy="292608"/>
+          </a:xfrm>
+          <a:prstGeom prst="rect">
+            <a:avLst/>
+          </a:prstGeom>
+          <a:solidFill>
+            <a:srgbClr val="161628"/>
+          </a:solidFill>
+          <a:ln w="6350">
+            <a:solidFill>
+              <a:srgbClr val="2A2A48"/>
+            </a:solidFill>
+            <a:prstDash val="solid"/>
+          </a:ln>
+        </p:spPr>
+      </p:sp>
+      <p:sp>
+        <p:nvSpPr>
+          <p:cNvPr id="23" name="Shape 21"/>
+          <p:cNvSpPr/>
+          <p:nvPr/>
+        </p:nvSpPr>
+        <p:spPr>
+          <a:xfrm>
+            <a:off x="5742432" y="1898294"/>
+            <a:ext cx="1225296" cy="292608"/>
+          </a:xfrm>
+          <a:prstGeom prst="rect">
+            <a:avLst/>
+          </a:prstGeom>
+          <a:solidFill>
+            <a:srgbClr val="161628"/>
+          </a:solidFill>
+          <a:ln w="6350">
+            <a:solidFill>
+              <a:srgbClr val="2A2A48"/>
+            </a:solidFill>
+            <a:prstDash val="solid"/>
+          </a:ln>
+        </p:spPr>
+      </p:sp>
+      <p:sp>
+        <p:nvSpPr>
+          <p:cNvPr id="24" name="Text 22"/>
+          <p:cNvSpPr/>
+          <p:nvPr/>
+        </p:nvSpPr>
+        <p:spPr>
+          <a:xfrm>
+            <a:off x="475488" y="1898294"/>
+            <a:ext cx="2386584" cy="292608"/>
           </a:xfrm>
           <a:prstGeom prst="rect">
             <a:avLst/>
@@ -2528,7 +2885,7 @@
                 <a:ea typeface="Calibri" pitchFamily="34" charset="-122"/>
                 <a:cs typeface="Calibri" pitchFamily="34" charset="-120"/>
               </a:rPr>
-              <a:t>Data Extraction</a:t>
+              <a:t>ML Classifier</a:t>
             </a:r>
             <a:endParaRPr lang="en-US" sz="1050" dirty="0"/>
           </a:p>
@@ -2536,14 +2893,14 @@
       </p:sp>
       <p:sp>
         <p:nvSpPr>
-          <p:cNvPr id="14" name="Text 12"/>
-          <p:cNvSpPr/>
-          <p:nvPr/>
-        </p:nvSpPr>
-        <p:spPr>
-          <a:xfrm>
-            <a:off x="3154680" y="1261872"/>
-            <a:ext cx="2386584" cy="301752"/>
+          <p:cNvPr id="25" name="Text 23"/>
+          <p:cNvSpPr/>
+          <p:nvPr/>
+        </p:nvSpPr>
+        <p:spPr>
+          <a:xfrm>
+            <a:off x="3154680" y="1898294"/>
+            <a:ext cx="2386584" cy="292608"/>
           </a:xfrm>
           <a:prstGeom prst="rect">
             <a:avLst/>
@@ -2567,7 +2924,7 @@
                 <a:ea typeface="Calibri" pitchFamily="34" charset="-122"/>
                 <a:cs typeface="Calibri" pitchFamily="34" charset="-120"/>
               </a:rPr>
-              <a:t>Claude AI (one-time)</a:t>
+              <a:t>Scikit-learn + PyTorch</a:t>
             </a:r>
             <a:endParaRPr lang="en-US" sz="1050" dirty="0"/>
           </a:p>
@@ -2575,14 +2932,14 @@
       </p:sp>
       <p:sp>
         <p:nvSpPr>
-          <p:cNvPr id="15" name="Text 13"/>
-          <p:cNvSpPr/>
-          <p:nvPr/>
-        </p:nvSpPr>
-        <p:spPr>
-          <a:xfrm>
-            <a:off x="5833872" y="1261872"/>
-            <a:ext cx="1106424" cy="301752"/>
+          <p:cNvPr id="26" name="Text 24"/>
+          <p:cNvSpPr/>
+          <p:nvPr/>
+        </p:nvSpPr>
+        <p:spPr>
+          <a:xfrm>
+            <a:off x="5833872" y="1898294"/>
+            <a:ext cx="1133856" cy="292608"/>
           </a:xfrm>
           <a:prstGeom prst="rect">
             <a:avLst/>
@@ -2606,7 +2963,7 @@
                 <a:ea typeface="Calibri" pitchFamily="34" charset="-122"/>
                 <a:cs typeface="Calibri" pitchFamily="34" charset="-120"/>
               </a:rPr>
-              <a:t>Free tier</a:t>
+              <a:t>Free</a:t>
             </a:r>
             <a:endParaRPr lang="en-US" sz="1050" dirty="0"/>
           </a:p>
@@ -2614,14 +2971,14 @@
       </p:sp>
       <p:sp>
         <p:nvSpPr>
-          <p:cNvPr id="16" name="Shape 14"/>
-          <p:cNvSpPr/>
-          <p:nvPr/>
-        </p:nvSpPr>
-        <p:spPr>
-          <a:xfrm>
-            <a:off x="384048" y="1586484"/>
-            <a:ext cx="2478024" cy="301752"/>
+          <p:cNvPr id="27" name="Shape 25"/>
+          <p:cNvSpPr/>
+          <p:nvPr/>
+        </p:nvSpPr>
+        <p:spPr>
+          <a:xfrm>
+            <a:off x="384048" y="2216506"/>
+            <a:ext cx="2478024" cy="292608"/>
           </a:xfrm>
           <a:prstGeom prst="rect">
             <a:avLst/>
@@ -2639,14 +2996,14 @@
       </p:sp>
       <p:sp>
         <p:nvSpPr>
-          <p:cNvPr id="17" name="Shape 15"/>
-          <p:cNvSpPr/>
-          <p:nvPr/>
-        </p:nvSpPr>
-        <p:spPr>
-          <a:xfrm>
-            <a:off x="3063240" y="1586484"/>
-            <a:ext cx="2478024" cy="301752"/>
+          <p:cNvPr id="28" name="Shape 26"/>
+          <p:cNvSpPr/>
+          <p:nvPr/>
+        </p:nvSpPr>
+        <p:spPr>
+          <a:xfrm>
+            <a:off x="3063240" y="2216506"/>
+            <a:ext cx="2478024" cy="292608"/>
           </a:xfrm>
           <a:prstGeom prst="rect">
             <a:avLst/>
@@ -2664,14 +3021,14 @@
       </p:sp>
       <p:sp>
         <p:nvSpPr>
-          <p:cNvPr id="18" name="Shape 16"/>
-          <p:cNvSpPr/>
-          <p:nvPr/>
-        </p:nvSpPr>
-        <p:spPr>
-          <a:xfrm>
-            <a:off x="5742432" y="1586484"/>
-            <a:ext cx="1197864" cy="301752"/>
+          <p:cNvPr id="29" name="Shape 27"/>
+          <p:cNvSpPr/>
+          <p:nvPr/>
+        </p:nvSpPr>
+        <p:spPr>
+          <a:xfrm>
+            <a:off x="5742432" y="2216506"/>
+            <a:ext cx="1225296" cy="292608"/>
           </a:xfrm>
           <a:prstGeom prst="rect">
             <a:avLst/>
@@ -2689,14 +3046,14 @@
       </p:sp>
       <p:sp>
         <p:nvSpPr>
-          <p:cNvPr id="19" name="Text 17"/>
-          <p:cNvSpPr/>
-          <p:nvPr/>
-        </p:nvSpPr>
-        <p:spPr>
-          <a:xfrm>
-            <a:off x="475488" y="1586484"/>
-            <a:ext cx="2386584" cy="301752"/>
+          <p:cNvPr id="30" name="Text 28"/>
+          <p:cNvSpPr/>
+          <p:nvPr/>
+        </p:nvSpPr>
+        <p:spPr>
+          <a:xfrm>
+            <a:off x="475488" y="2216506"/>
+            <a:ext cx="2386584" cy="292608"/>
           </a:xfrm>
           <a:prstGeom prst="rect">
             <a:avLst/>
@@ -2720,7 +3077,7 @@
                 <a:ea typeface="Calibri" pitchFamily="34" charset="-122"/>
                 <a:cs typeface="Calibri" pitchFamily="34" charset="-120"/>
               </a:rPr>
-              <a:t>Database</a:t>
+              <a:t>Embeddings</a:t>
             </a:r>
             <a:endParaRPr lang="en-US" sz="1050" dirty="0"/>
           </a:p>
@@ -2728,14 +3085,14 @@
       </p:sp>
       <p:sp>
         <p:nvSpPr>
-          <p:cNvPr id="20" name="Text 18"/>
-          <p:cNvSpPr/>
-          <p:nvPr/>
-        </p:nvSpPr>
-        <p:spPr>
-          <a:xfrm>
-            <a:off x="3154680" y="1586484"/>
-            <a:ext cx="2386584" cy="301752"/>
+          <p:cNvPr id="31" name="Text 29"/>
+          <p:cNvSpPr/>
+          <p:nvPr/>
+        </p:nvSpPr>
+        <p:spPr>
+          <a:xfrm>
+            <a:off x="3154680" y="2216506"/>
+            <a:ext cx="2386584" cy="292608"/>
           </a:xfrm>
           <a:prstGeom prst="rect">
             <a:avLst/>
@@ -2759,7 +3116,7 @@
                 <a:ea typeface="Calibri" pitchFamily="34" charset="-122"/>
                 <a:cs typeface="Calibri" pitchFamily="34" charset="-120"/>
               </a:rPr>
-              <a:t>SQLite</a:t>
+              <a:t>Sentence Transformers</a:t>
             </a:r>
             <a:endParaRPr lang="en-US" sz="1050" dirty="0"/>
           </a:p>
@@ -2767,14 +3124,14 @@
       </p:sp>
       <p:sp>
         <p:nvSpPr>
-          <p:cNvPr id="21" name="Text 19"/>
-          <p:cNvSpPr/>
-          <p:nvPr/>
-        </p:nvSpPr>
-        <p:spPr>
-          <a:xfrm>
-            <a:off x="5833872" y="1586484"/>
-            <a:ext cx="1106424" cy="301752"/>
+          <p:cNvPr id="32" name="Text 30"/>
+          <p:cNvSpPr/>
+          <p:nvPr/>
+        </p:nvSpPr>
+        <p:spPr>
+          <a:xfrm>
+            <a:off x="5833872" y="2216506"/>
+            <a:ext cx="1133856" cy="292608"/>
           </a:xfrm>
           <a:prstGeom prst="rect">
             <a:avLst/>
@@ -2806,14 +3163,14 @@
       </p:sp>
       <p:sp>
         <p:nvSpPr>
-          <p:cNvPr id="22" name="Shape 20"/>
-          <p:cNvSpPr/>
-          <p:nvPr/>
-        </p:nvSpPr>
-        <p:spPr>
-          <a:xfrm>
-            <a:off x="384048" y="1911096"/>
-            <a:ext cx="2478024" cy="301752"/>
+          <p:cNvPr id="33" name="Shape 31"/>
+          <p:cNvSpPr/>
+          <p:nvPr/>
+        </p:nvSpPr>
+        <p:spPr>
+          <a:xfrm>
+            <a:off x="384048" y="2534717"/>
+            <a:ext cx="2478024" cy="292608"/>
           </a:xfrm>
           <a:prstGeom prst="rect">
             <a:avLst/>
@@ -2831,14 +3188,14 @@
       </p:sp>
       <p:sp>
         <p:nvSpPr>
-          <p:cNvPr id="23" name="Shape 21"/>
-          <p:cNvSpPr/>
-          <p:nvPr/>
-        </p:nvSpPr>
-        <p:spPr>
-          <a:xfrm>
-            <a:off x="3063240" y="1911096"/>
-            <a:ext cx="2478024" cy="301752"/>
+          <p:cNvPr id="34" name="Shape 32"/>
+          <p:cNvSpPr/>
+          <p:nvPr/>
+        </p:nvSpPr>
+        <p:spPr>
+          <a:xfrm>
+            <a:off x="3063240" y="2534717"/>
+            <a:ext cx="2478024" cy="292608"/>
           </a:xfrm>
           <a:prstGeom prst="rect">
             <a:avLst/>
@@ -2856,14 +3213,14 @@
       </p:sp>
       <p:sp>
         <p:nvSpPr>
-          <p:cNvPr id="24" name="Shape 22"/>
-          <p:cNvSpPr/>
-          <p:nvPr/>
-        </p:nvSpPr>
-        <p:spPr>
-          <a:xfrm>
-            <a:off x="5742432" y="1911096"/>
-            <a:ext cx="1197864" cy="301752"/>
+          <p:cNvPr id="35" name="Shape 33"/>
+          <p:cNvSpPr/>
+          <p:nvPr/>
+        </p:nvSpPr>
+        <p:spPr>
+          <a:xfrm>
+            <a:off x="5742432" y="2534717"/>
+            <a:ext cx="1225296" cy="292608"/>
           </a:xfrm>
           <a:prstGeom prst="rect">
             <a:avLst/>
@@ -2881,14 +3238,14 @@
       </p:sp>
       <p:sp>
         <p:nvSpPr>
-          <p:cNvPr id="25" name="Text 23"/>
-          <p:cNvSpPr/>
-          <p:nvPr/>
-        </p:nvSpPr>
-        <p:spPr>
-          <a:xfrm>
-            <a:off x="475488" y="1911096"/>
-            <a:ext cx="2386584" cy="301752"/>
+          <p:cNvPr id="36" name="Text 34"/>
+          <p:cNvSpPr/>
+          <p:nvPr/>
+        </p:nvSpPr>
+        <p:spPr>
+          <a:xfrm>
+            <a:off x="475488" y="2534717"/>
+            <a:ext cx="2386584" cy="292608"/>
           </a:xfrm>
           <a:prstGeom prst="rect">
             <a:avLst/>
@@ -2912,7 +3269,7 @@
                 <a:ea typeface="Calibri" pitchFamily="34" charset="-122"/>
                 <a:cs typeface="Calibri" pitchFamily="34" charset="-120"/>
               </a:rPr>
-              <a:t>ML Classifier</a:t>
+              <a:t>SLM Inference</a:t>
             </a:r>
             <a:endParaRPr lang="en-US" sz="1050" dirty="0"/>
           </a:p>
@@ -2920,14 +3277,14 @@
       </p:sp>
       <p:sp>
         <p:nvSpPr>
-          <p:cNvPr id="26" name="Text 24"/>
-          <p:cNvSpPr/>
-          <p:nvPr/>
-        </p:nvSpPr>
-        <p:spPr>
-          <a:xfrm>
-            <a:off x="3154680" y="1911096"/>
-            <a:ext cx="2386584" cy="301752"/>
+          <p:cNvPr id="37" name="Text 35"/>
+          <p:cNvSpPr/>
+          <p:nvPr/>
+        </p:nvSpPr>
+        <p:spPr>
+          <a:xfrm>
+            <a:off x="3154680" y="2534717"/>
+            <a:ext cx="2386584" cy="292608"/>
           </a:xfrm>
           <a:prstGeom prst="rect">
             <a:avLst/>
@@ -2951,7 +3308,7 @@
                 <a:ea typeface="Calibri" pitchFamily="34" charset="-122"/>
                 <a:cs typeface="Calibri" pitchFamily="34" charset="-120"/>
               </a:rPr>
-              <a:t>Scikit-learn + PyTorch</a:t>
+              <a:t>Ollama (Mistral 7B, Phi-3)</a:t>
             </a:r>
             <a:endParaRPr lang="en-US" sz="1050" dirty="0"/>
           </a:p>
@@ -2959,14 +3316,14 @@
       </p:sp>
       <p:sp>
         <p:nvSpPr>
-          <p:cNvPr id="27" name="Text 25"/>
-          <p:cNvSpPr/>
-          <p:nvPr/>
-        </p:nvSpPr>
-        <p:spPr>
-          <a:xfrm>
-            <a:off x="5833872" y="1911096"/>
-            <a:ext cx="1106424" cy="301752"/>
+          <p:cNvPr id="38" name="Text 36"/>
+          <p:cNvSpPr/>
+          <p:nvPr/>
+        </p:nvSpPr>
+        <p:spPr>
+          <a:xfrm>
+            <a:off x="5833872" y="2534717"/>
+            <a:ext cx="1133856" cy="292608"/>
           </a:xfrm>
           <a:prstGeom prst="rect">
             <a:avLst/>
@@ -2990,6 +3347,198 @@
                 <a:ea typeface="Calibri" pitchFamily="34" charset="-122"/>
                 <a:cs typeface="Calibri" pitchFamily="34" charset="-120"/>
               </a:rPr>
+              <a:t>Free (local)</a:t>
+            </a:r>
+            <a:endParaRPr lang="en-US" sz="1050" dirty="0"/>
+          </a:p>
+        </p:txBody>
+      </p:sp>
+      <p:sp>
+        <p:nvSpPr>
+          <p:cNvPr id="39" name="Shape 37"/>
+          <p:cNvSpPr/>
+          <p:nvPr/>
+        </p:nvSpPr>
+        <p:spPr>
+          <a:xfrm>
+            <a:off x="384048" y="2852928"/>
+            <a:ext cx="2478024" cy="292608"/>
+          </a:xfrm>
+          <a:prstGeom prst="rect">
+            <a:avLst/>
+          </a:prstGeom>
+          <a:solidFill>
+            <a:srgbClr val="1E1E35"/>
+          </a:solidFill>
+          <a:ln w="6350">
+            <a:solidFill>
+              <a:srgbClr val="2A2A48"/>
+            </a:solidFill>
+            <a:prstDash val="solid"/>
+          </a:ln>
+        </p:spPr>
+      </p:sp>
+      <p:sp>
+        <p:nvSpPr>
+          <p:cNvPr id="40" name="Shape 38"/>
+          <p:cNvSpPr/>
+          <p:nvPr/>
+        </p:nvSpPr>
+        <p:spPr>
+          <a:xfrm>
+            <a:off x="3063240" y="2852928"/>
+            <a:ext cx="2478024" cy="292608"/>
+          </a:xfrm>
+          <a:prstGeom prst="rect">
+            <a:avLst/>
+          </a:prstGeom>
+          <a:solidFill>
+            <a:srgbClr val="1E1E35"/>
+          </a:solidFill>
+          <a:ln w="6350">
+            <a:solidFill>
+              <a:srgbClr val="2A2A48"/>
+            </a:solidFill>
+            <a:prstDash val="solid"/>
+          </a:ln>
+        </p:spPr>
+      </p:sp>
+      <p:sp>
+        <p:nvSpPr>
+          <p:cNvPr id="41" name="Shape 39"/>
+          <p:cNvSpPr/>
+          <p:nvPr/>
+        </p:nvSpPr>
+        <p:spPr>
+          <a:xfrm>
+            <a:off x="5742432" y="2852928"/>
+            <a:ext cx="1225296" cy="292608"/>
+          </a:xfrm>
+          <a:prstGeom prst="rect">
+            <a:avLst/>
+          </a:prstGeom>
+          <a:solidFill>
+            <a:srgbClr val="1E1E35"/>
+          </a:solidFill>
+          <a:ln w="6350">
+            <a:solidFill>
+              <a:srgbClr val="2A2A48"/>
+            </a:solidFill>
+            <a:prstDash val="solid"/>
+          </a:ln>
+        </p:spPr>
+      </p:sp>
+      <p:sp>
+        <p:nvSpPr>
+          <p:cNvPr id="42" name="Text 40"/>
+          <p:cNvSpPr/>
+          <p:nvPr/>
+        </p:nvSpPr>
+        <p:spPr>
+          <a:xfrm>
+            <a:off x="475488" y="2852928"/>
+            <a:ext cx="2386584" cy="292608"/>
+          </a:xfrm>
+          <a:prstGeom prst="rect">
+            <a:avLst/>
+          </a:prstGeom>
+          <a:noFill/>
+          <a:ln/>
+        </p:spPr>
+        <p:txBody>
+          <a:bodyPr wrap="square" lIns="0" tIns="0" rIns="0" bIns="0" rtlCol="0" anchor="ctr"/>
+          <a:lstStyle/>
+          <a:p>
+            <a:pPr algn="l" indent="0" marL="0">
+              <a:buNone/>
+            </a:pPr>
+            <a:r>
+              <a:rPr lang="en-US" sz="1050" dirty="0">
+                <a:solidFill>
+                  <a:srgbClr val="E2E8F0"/>
+                </a:solidFill>
+                <a:latin typeface="Calibri" pitchFamily="34" charset="0"/>
+                <a:ea typeface="Calibri" pitchFamily="34" charset="-122"/>
+                <a:cs typeface="Calibri" pitchFamily="34" charset="-120"/>
+              </a:rPr>
+              <a:t>Vector Store</a:t>
+            </a:r>
+            <a:endParaRPr lang="en-US" sz="1050" dirty="0"/>
+          </a:p>
+        </p:txBody>
+      </p:sp>
+      <p:sp>
+        <p:nvSpPr>
+          <p:cNvPr id="43" name="Text 41"/>
+          <p:cNvSpPr/>
+          <p:nvPr/>
+        </p:nvSpPr>
+        <p:spPr>
+          <a:xfrm>
+            <a:off x="3154680" y="2852928"/>
+            <a:ext cx="2386584" cy="292608"/>
+          </a:xfrm>
+          <a:prstGeom prst="rect">
+            <a:avLst/>
+          </a:prstGeom>
+          <a:noFill/>
+          <a:ln/>
+        </p:spPr>
+        <p:txBody>
+          <a:bodyPr wrap="square" lIns="0" tIns="0" rIns="0" bIns="0" rtlCol="0" anchor="ctr"/>
+          <a:lstStyle/>
+          <a:p>
+            <a:pPr algn="l" indent="0" marL="0">
+              <a:buNone/>
+            </a:pPr>
+            <a:r>
+              <a:rPr lang="en-US" sz="1050" dirty="0">
+                <a:solidFill>
+                  <a:srgbClr val="A855F7"/>
+                </a:solidFill>
+                <a:latin typeface="Calibri" pitchFamily="34" charset="0"/>
+                <a:ea typeface="Calibri" pitchFamily="34" charset="-122"/>
+                <a:cs typeface="Calibri" pitchFamily="34" charset="-120"/>
+              </a:rPr>
+              <a:t>ChromaDB</a:t>
+            </a:r>
+            <a:endParaRPr lang="en-US" sz="1050" dirty="0"/>
+          </a:p>
+        </p:txBody>
+      </p:sp>
+      <p:sp>
+        <p:nvSpPr>
+          <p:cNvPr id="44" name="Text 42"/>
+          <p:cNvSpPr/>
+          <p:nvPr/>
+        </p:nvSpPr>
+        <p:spPr>
+          <a:xfrm>
+            <a:off x="5833872" y="2852928"/>
+            <a:ext cx="1133856" cy="292608"/>
+          </a:xfrm>
+          <a:prstGeom prst="rect">
+            <a:avLst/>
+          </a:prstGeom>
+          <a:noFill/>
+          <a:ln/>
+        </p:spPr>
+        <p:txBody>
+          <a:bodyPr wrap="square" lIns="0" tIns="0" rIns="0" bIns="0" rtlCol="0" anchor="ctr"/>
+          <a:lstStyle/>
+          <a:p>
+            <a:pPr algn="l" indent="0" marL="0">
+              <a:buNone/>
+            </a:pPr>
+            <a:r>
+              <a:rPr lang="en-US" sz="1050" dirty="0">
+                <a:solidFill>
+                  <a:srgbClr val="22C55E"/>
+                </a:solidFill>
+                <a:latin typeface="Calibri" pitchFamily="34" charset="0"/>
+                <a:ea typeface="Calibri" pitchFamily="34" charset="-122"/>
+                <a:cs typeface="Calibri" pitchFamily="34" charset="-120"/>
+              </a:rPr>
               <a:t>Free</a:t>
             </a:r>
             <a:endParaRPr lang="en-US" sz="1050" dirty="0"/>
@@ -2998,14 +3547,206 @@
       </p:sp>
       <p:sp>
         <p:nvSpPr>
-          <p:cNvPr id="28" name="Shape 26"/>
-          <p:cNvSpPr/>
-          <p:nvPr/>
-        </p:nvSpPr>
-        <p:spPr>
-          <a:xfrm>
-            <a:off x="384048" y="2235708"/>
-            <a:ext cx="2478024" cy="301752"/>
+          <p:cNvPr id="45" name="Shape 43"/>
+          <p:cNvSpPr/>
+          <p:nvPr/>
+        </p:nvSpPr>
+        <p:spPr>
+          <a:xfrm>
+            <a:off x="384048" y="3171139"/>
+            <a:ext cx="2478024" cy="292608"/>
+          </a:xfrm>
+          <a:prstGeom prst="rect">
+            <a:avLst/>
+          </a:prstGeom>
+          <a:solidFill>
+            <a:srgbClr val="161628"/>
+          </a:solidFill>
+          <a:ln w="6350">
+            <a:solidFill>
+              <a:srgbClr val="2A2A48"/>
+            </a:solidFill>
+            <a:prstDash val="solid"/>
+          </a:ln>
+        </p:spPr>
+      </p:sp>
+      <p:sp>
+        <p:nvSpPr>
+          <p:cNvPr id="46" name="Shape 44"/>
+          <p:cNvSpPr/>
+          <p:nvPr/>
+        </p:nvSpPr>
+        <p:spPr>
+          <a:xfrm>
+            <a:off x="3063240" y="3171139"/>
+            <a:ext cx="2478024" cy="292608"/>
+          </a:xfrm>
+          <a:prstGeom prst="rect">
+            <a:avLst/>
+          </a:prstGeom>
+          <a:solidFill>
+            <a:srgbClr val="161628"/>
+          </a:solidFill>
+          <a:ln w="6350">
+            <a:solidFill>
+              <a:srgbClr val="2A2A48"/>
+            </a:solidFill>
+            <a:prstDash val="solid"/>
+          </a:ln>
+        </p:spPr>
+      </p:sp>
+      <p:sp>
+        <p:nvSpPr>
+          <p:cNvPr id="47" name="Shape 45"/>
+          <p:cNvSpPr/>
+          <p:nvPr/>
+        </p:nvSpPr>
+        <p:spPr>
+          <a:xfrm>
+            <a:off x="5742432" y="3171139"/>
+            <a:ext cx="1225296" cy="292608"/>
+          </a:xfrm>
+          <a:prstGeom prst="rect">
+            <a:avLst/>
+          </a:prstGeom>
+          <a:solidFill>
+            <a:srgbClr val="161628"/>
+          </a:solidFill>
+          <a:ln w="6350">
+            <a:solidFill>
+              <a:srgbClr val="2A2A48"/>
+            </a:solidFill>
+            <a:prstDash val="solid"/>
+          </a:ln>
+        </p:spPr>
+      </p:sp>
+      <p:sp>
+        <p:nvSpPr>
+          <p:cNvPr id="48" name="Text 46"/>
+          <p:cNvSpPr/>
+          <p:nvPr/>
+        </p:nvSpPr>
+        <p:spPr>
+          <a:xfrm>
+            <a:off x="475488" y="3171139"/>
+            <a:ext cx="2386584" cy="292608"/>
+          </a:xfrm>
+          <a:prstGeom prst="rect">
+            <a:avLst/>
+          </a:prstGeom>
+          <a:noFill/>
+          <a:ln/>
+        </p:spPr>
+        <p:txBody>
+          <a:bodyPr wrap="square" lIns="0" tIns="0" rIns="0" bIns="0" rtlCol="0" anchor="ctr"/>
+          <a:lstStyle/>
+          <a:p>
+            <a:pPr algn="l" indent="0" marL="0">
+              <a:buNone/>
+            </a:pPr>
+            <a:r>
+              <a:rPr lang="en-US" sz="1050" dirty="0">
+                <a:solidFill>
+                  <a:srgbClr val="E2E8F0"/>
+                </a:solidFill>
+                <a:latin typeface="Calibri" pitchFamily="34" charset="0"/>
+                <a:ea typeface="Calibri" pitchFamily="34" charset="-122"/>
+                <a:cs typeface="Calibri" pitchFamily="34" charset="-120"/>
+              </a:rPr>
+              <a:t>API Server</a:t>
+            </a:r>
+            <a:endParaRPr lang="en-US" sz="1050" dirty="0"/>
+          </a:p>
+        </p:txBody>
+      </p:sp>
+      <p:sp>
+        <p:nvSpPr>
+          <p:cNvPr id="49" name="Text 47"/>
+          <p:cNvSpPr/>
+          <p:nvPr/>
+        </p:nvSpPr>
+        <p:spPr>
+          <a:xfrm>
+            <a:off x="3154680" y="3171139"/>
+            <a:ext cx="2386584" cy="292608"/>
+          </a:xfrm>
+          <a:prstGeom prst="rect">
+            <a:avLst/>
+          </a:prstGeom>
+          <a:noFill/>
+          <a:ln/>
+        </p:spPr>
+        <p:txBody>
+          <a:bodyPr wrap="square" lIns="0" tIns="0" rIns="0" bIns="0" rtlCol="0" anchor="ctr"/>
+          <a:lstStyle/>
+          <a:p>
+            <a:pPr algn="l" indent="0" marL="0">
+              <a:buNone/>
+            </a:pPr>
+            <a:r>
+              <a:rPr lang="en-US" sz="1050" dirty="0">
+                <a:solidFill>
+                  <a:srgbClr val="A855F7"/>
+                </a:solidFill>
+                <a:latin typeface="Calibri" pitchFamily="34" charset="0"/>
+                <a:ea typeface="Calibri" pitchFamily="34" charset="-122"/>
+                <a:cs typeface="Calibri" pitchFamily="34" charset="-120"/>
+              </a:rPr>
+              <a:t>FastAPI + Uvicorn</a:t>
+            </a:r>
+            <a:endParaRPr lang="en-US" sz="1050" dirty="0"/>
+          </a:p>
+        </p:txBody>
+      </p:sp>
+      <p:sp>
+        <p:nvSpPr>
+          <p:cNvPr id="50" name="Text 48"/>
+          <p:cNvSpPr/>
+          <p:nvPr/>
+        </p:nvSpPr>
+        <p:spPr>
+          <a:xfrm>
+            <a:off x="5833872" y="3171139"/>
+            <a:ext cx="1133856" cy="292608"/>
+          </a:xfrm>
+          <a:prstGeom prst="rect">
+            <a:avLst/>
+          </a:prstGeom>
+          <a:noFill/>
+          <a:ln/>
+        </p:spPr>
+        <p:txBody>
+          <a:bodyPr wrap="square" lIns="0" tIns="0" rIns="0" bIns="0" rtlCol="0" anchor="ctr"/>
+          <a:lstStyle/>
+          <a:p>
+            <a:pPr algn="l" indent="0" marL="0">
+              <a:buNone/>
+            </a:pPr>
+            <a:r>
+              <a:rPr lang="en-US" sz="1050" dirty="0">
+                <a:solidFill>
+                  <a:srgbClr val="22C55E"/>
+                </a:solidFill>
+                <a:latin typeface="Calibri" pitchFamily="34" charset="0"/>
+                <a:ea typeface="Calibri" pitchFamily="34" charset="-122"/>
+                <a:cs typeface="Calibri" pitchFamily="34" charset="-120"/>
+              </a:rPr>
+              <a:t>Free</a:t>
+            </a:r>
+            <a:endParaRPr lang="en-US" sz="1050" dirty="0"/>
+          </a:p>
+        </p:txBody>
+      </p:sp>
+      <p:sp>
+        <p:nvSpPr>
+          <p:cNvPr id="51" name="Shape 49"/>
+          <p:cNvSpPr/>
+          <p:nvPr/>
+        </p:nvSpPr>
+        <p:spPr>
+          <a:xfrm>
+            <a:off x="384048" y="3489350"/>
+            <a:ext cx="2478024" cy="292608"/>
           </a:xfrm>
           <a:prstGeom prst="rect">
             <a:avLst/>
@@ -3023,14 +3764,14 @@
       </p:sp>
       <p:sp>
         <p:nvSpPr>
-          <p:cNvPr id="29" name="Shape 27"/>
-          <p:cNvSpPr/>
-          <p:nvPr/>
-        </p:nvSpPr>
-        <p:spPr>
-          <a:xfrm>
-            <a:off x="3063240" y="2235708"/>
-            <a:ext cx="2478024" cy="301752"/>
+          <p:cNvPr id="52" name="Shape 50"/>
+          <p:cNvSpPr/>
+          <p:nvPr/>
+        </p:nvSpPr>
+        <p:spPr>
+          <a:xfrm>
+            <a:off x="3063240" y="3489350"/>
+            <a:ext cx="2478024" cy="292608"/>
           </a:xfrm>
           <a:prstGeom prst="rect">
             <a:avLst/>
@@ -3048,14 +3789,14 @@
       </p:sp>
       <p:sp>
         <p:nvSpPr>
-          <p:cNvPr id="30" name="Shape 28"/>
-          <p:cNvSpPr/>
-          <p:nvPr/>
-        </p:nvSpPr>
-        <p:spPr>
-          <a:xfrm>
-            <a:off x="5742432" y="2235708"/>
-            <a:ext cx="1197864" cy="301752"/>
+          <p:cNvPr id="53" name="Shape 51"/>
+          <p:cNvSpPr/>
+          <p:nvPr/>
+        </p:nvSpPr>
+        <p:spPr>
+          <a:xfrm>
+            <a:off x="5742432" y="3489350"/>
+            <a:ext cx="1225296" cy="292608"/>
           </a:xfrm>
           <a:prstGeom prst="rect">
             <a:avLst/>
@@ -3073,14 +3814,14 @@
       </p:sp>
       <p:sp>
         <p:nvSpPr>
-          <p:cNvPr id="31" name="Text 29"/>
-          <p:cNvSpPr/>
-          <p:nvPr/>
-        </p:nvSpPr>
-        <p:spPr>
-          <a:xfrm>
-            <a:off x="475488" y="2235708"/>
-            <a:ext cx="2386584" cy="301752"/>
+          <p:cNvPr id="54" name="Text 52"/>
+          <p:cNvSpPr/>
+          <p:nvPr/>
+        </p:nvSpPr>
+        <p:spPr>
+          <a:xfrm>
+            <a:off x="475488" y="3489350"/>
+            <a:ext cx="2386584" cy="292608"/>
           </a:xfrm>
           <a:prstGeom prst="rect">
             <a:avLst/>
@@ -3104,7 +3845,7 @@
                 <a:ea typeface="Calibri" pitchFamily="34" charset="-122"/>
                 <a:cs typeface="Calibri" pitchFamily="34" charset="-120"/>
               </a:rPr>
-              <a:t>Embeddings</a:t>
+              <a:t>Dashboards</a:t>
             </a:r>
             <a:endParaRPr lang="en-US" sz="1050" dirty="0"/>
           </a:p>
@@ -3112,14 +3853,14 @@
       </p:sp>
       <p:sp>
         <p:nvSpPr>
-          <p:cNvPr id="32" name="Text 30"/>
-          <p:cNvSpPr/>
-          <p:nvPr/>
-        </p:nvSpPr>
-        <p:spPr>
-          <a:xfrm>
-            <a:off x="3154680" y="2235708"/>
-            <a:ext cx="2386584" cy="301752"/>
+          <p:cNvPr id="55" name="Text 53"/>
+          <p:cNvSpPr/>
+          <p:nvPr/>
+        </p:nvSpPr>
+        <p:spPr>
+          <a:xfrm>
+            <a:off x="3154680" y="3489350"/>
+            <a:ext cx="2386584" cy="292608"/>
           </a:xfrm>
           <a:prstGeom prst="rect">
             <a:avLst/>
@@ -3143,7 +3884,7 @@
                 <a:ea typeface="Calibri" pitchFamily="34" charset="-122"/>
                 <a:cs typeface="Calibri" pitchFamily="34" charset="-120"/>
               </a:rPr>
-              <a:t>Sentence Transformers</a:t>
+              <a:t>Streamlit + HTML / JS</a:t>
             </a:r>
             <a:endParaRPr lang="en-US" sz="1050" dirty="0"/>
           </a:p>
@@ -3151,14 +3892,14 @@
       </p:sp>
       <p:sp>
         <p:nvSpPr>
-          <p:cNvPr id="33" name="Text 31"/>
-          <p:cNvSpPr/>
-          <p:nvPr/>
-        </p:nvSpPr>
-        <p:spPr>
-          <a:xfrm>
-            <a:off x="5833872" y="2235708"/>
-            <a:ext cx="1106424" cy="301752"/>
+          <p:cNvPr id="56" name="Text 54"/>
+          <p:cNvSpPr/>
+          <p:nvPr/>
+        </p:nvSpPr>
+        <p:spPr>
+          <a:xfrm>
+            <a:off x="5833872" y="3489350"/>
+            <a:ext cx="1133856" cy="292608"/>
           </a:xfrm>
           <a:prstGeom prst="rect">
             <a:avLst/>
@@ -3190,782 +3931,14 @@
       </p:sp>
       <p:sp>
         <p:nvSpPr>
-          <p:cNvPr id="34" name="Shape 32"/>
-          <p:cNvSpPr/>
-          <p:nvPr/>
-        </p:nvSpPr>
-        <p:spPr>
-          <a:xfrm>
-            <a:off x="384048" y="2560320"/>
-            <a:ext cx="2478024" cy="301752"/>
-          </a:xfrm>
-          <a:prstGeom prst="rect">
-            <a:avLst/>
-          </a:prstGeom>
-          <a:solidFill>
-            <a:srgbClr val="161628"/>
-          </a:solidFill>
-          <a:ln w="6350">
-            <a:solidFill>
-              <a:srgbClr val="2A2A48"/>
-            </a:solidFill>
-            <a:prstDash val="solid"/>
-          </a:ln>
-        </p:spPr>
-      </p:sp>
-      <p:sp>
-        <p:nvSpPr>
-          <p:cNvPr id="35" name="Shape 33"/>
-          <p:cNvSpPr/>
-          <p:nvPr/>
-        </p:nvSpPr>
-        <p:spPr>
-          <a:xfrm>
-            <a:off x="3063240" y="2560320"/>
-            <a:ext cx="2478024" cy="301752"/>
-          </a:xfrm>
-          <a:prstGeom prst="rect">
-            <a:avLst/>
-          </a:prstGeom>
-          <a:solidFill>
-            <a:srgbClr val="161628"/>
-          </a:solidFill>
-          <a:ln w="6350">
-            <a:solidFill>
-              <a:srgbClr val="2A2A48"/>
-            </a:solidFill>
-            <a:prstDash val="solid"/>
-          </a:ln>
-        </p:spPr>
-      </p:sp>
-      <p:sp>
-        <p:nvSpPr>
-          <p:cNvPr id="36" name="Shape 34"/>
-          <p:cNvSpPr/>
-          <p:nvPr/>
-        </p:nvSpPr>
-        <p:spPr>
-          <a:xfrm>
-            <a:off x="5742432" y="2560320"/>
-            <a:ext cx="1197864" cy="301752"/>
-          </a:xfrm>
-          <a:prstGeom prst="rect">
-            <a:avLst/>
-          </a:prstGeom>
-          <a:solidFill>
-            <a:srgbClr val="161628"/>
-          </a:solidFill>
-          <a:ln w="6350">
-            <a:solidFill>
-              <a:srgbClr val="2A2A48"/>
-            </a:solidFill>
-            <a:prstDash val="solid"/>
-          </a:ln>
-        </p:spPr>
-      </p:sp>
-      <p:sp>
-        <p:nvSpPr>
-          <p:cNvPr id="37" name="Text 35"/>
-          <p:cNvSpPr/>
-          <p:nvPr/>
-        </p:nvSpPr>
-        <p:spPr>
-          <a:xfrm>
-            <a:off x="475488" y="2560320"/>
-            <a:ext cx="2386584" cy="301752"/>
-          </a:xfrm>
-          <a:prstGeom prst="rect">
-            <a:avLst/>
-          </a:prstGeom>
-          <a:noFill/>
-          <a:ln/>
-        </p:spPr>
-        <p:txBody>
-          <a:bodyPr wrap="square" lIns="0" tIns="0" rIns="0" bIns="0" rtlCol="0" anchor="ctr"/>
-          <a:lstStyle/>
-          <a:p>
-            <a:pPr algn="l" indent="0" marL="0">
-              <a:buNone/>
-            </a:pPr>
-            <a:r>
-              <a:rPr lang="en-US" sz="1050" dirty="0">
-                <a:solidFill>
-                  <a:srgbClr val="E2E8F0"/>
-                </a:solidFill>
-                <a:latin typeface="Calibri" pitchFamily="34" charset="0"/>
-                <a:ea typeface="Calibri" pitchFamily="34" charset="-122"/>
-                <a:cs typeface="Calibri" pitchFamily="34" charset="-120"/>
-              </a:rPr>
-              <a:t>SLM Inference</a:t>
-            </a:r>
-            <a:endParaRPr lang="en-US" sz="1050" dirty="0"/>
-          </a:p>
-        </p:txBody>
-      </p:sp>
-      <p:sp>
-        <p:nvSpPr>
-          <p:cNvPr id="38" name="Text 36"/>
-          <p:cNvSpPr/>
-          <p:nvPr/>
-        </p:nvSpPr>
-        <p:spPr>
-          <a:xfrm>
-            <a:off x="3154680" y="2560320"/>
-            <a:ext cx="2386584" cy="301752"/>
-          </a:xfrm>
-          <a:prstGeom prst="rect">
-            <a:avLst/>
-          </a:prstGeom>
-          <a:noFill/>
-          <a:ln/>
-        </p:spPr>
-        <p:txBody>
-          <a:bodyPr wrap="square" lIns="0" tIns="0" rIns="0" bIns="0" rtlCol="0" anchor="ctr"/>
-          <a:lstStyle/>
-          <a:p>
-            <a:pPr algn="l" indent="0" marL="0">
-              <a:buNone/>
-            </a:pPr>
-            <a:r>
-              <a:rPr lang="en-US" sz="1050" dirty="0">
-                <a:solidFill>
-                  <a:srgbClr val="A855F7"/>
-                </a:solidFill>
-                <a:latin typeface="Calibri" pitchFamily="34" charset="0"/>
-                <a:ea typeface="Calibri" pitchFamily="34" charset="-122"/>
-                <a:cs typeface="Calibri" pitchFamily="34" charset="-120"/>
-              </a:rPr>
-              <a:t>Ollama (Mistral 7B, Phi-3)</a:t>
-            </a:r>
-            <a:endParaRPr lang="en-US" sz="1050" dirty="0"/>
-          </a:p>
-        </p:txBody>
-      </p:sp>
-      <p:sp>
-        <p:nvSpPr>
-          <p:cNvPr id="39" name="Text 37"/>
-          <p:cNvSpPr/>
-          <p:nvPr/>
-        </p:nvSpPr>
-        <p:spPr>
-          <a:xfrm>
-            <a:off x="5833872" y="2560320"/>
-            <a:ext cx="1106424" cy="301752"/>
-          </a:xfrm>
-          <a:prstGeom prst="rect">
-            <a:avLst/>
-          </a:prstGeom>
-          <a:noFill/>
-          <a:ln/>
-        </p:spPr>
-        <p:txBody>
-          <a:bodyPr wrap="square" lIns="0" tIns="0" rIns="0" bIns="0" rtlCol="0" anchor="ctr"/>
-          <a:lstStyle/>
-          <a:p>
-            <a:pPr algn="l" indent="0" marL="0">
-              <a:buNone/>
-            </a:pPr>
-            <a:r>
-              <a:rPr lang="en-US" sz="1050" dirty="0">
-                <a:solidFill>
-                  <a:srgbClr val="22C55E"/>
-                </a:solidFill>
-                <a:latin typeface="Calibri" pitchFamily="34" charset="0"/>
-                <a:ea typeface="Calibri" pitchFamily="34" charset="-122"/>
-                <a:cs typeface="Calibri" pitchFamily="34" charset="-120"/>
-              </a:rPr>
-              <a:t>Free (local)</a:t>
-            </a:r>
-            <a:endParaRPr lang="en-US" sz="1050" dirty="0"/>
-          </a:p>
-        </p:txBody>
-      </p:sp>
-      <p:sp>
-        <p:nvSpPr>
-          <p:cNvPr id="40" name="Shape 38"/>
-          <p:cNvSpPr/>
-          <p:nvPr/>
-        </p:nvSpPr>
-        <p:spPr>
-          <a:xfrm>
-            <a:off x="384048" y="2884932"/>
-            <a:ext cx="2478024" cy="301752"/>
-          </a:xfrm>
-          <a:prstGeom prst="rect">
-            <a:avLst/>
-          </a:prstGeom>
-          <a:solidFill>
-            <a:srgbClr val="1E1E35"/>
-          </a:solidFill>
-          <a:ln w="6350">
-            <a:solidFill>
-              <a:srgbClr val="2A2A48"/>
-            </a:solidFill>
-            <a:prstDash val="solid"/>
-          </a:ln>
-        </p:spPr>
-      </p:sp>
-      <p:sp>
-        <p:nvSpPr>
-          <p:cNvPr id="41" name="Shape 39"/>
-          <p:cNvSpPr/>
-          <p:nvPr/>
-        </p:nvSpPr>
-        <p:spPr>
-          <a:xfrm>
-            <a:off x="3063240" y="2884932"/>
-            <a:ext cx="2478024" cy="301752"/>
-          </a:xfrm>
-          <a:prstGeom prst="rect">
-            <a:avLst/>
-          </a:prstGeom>
-          <a:solidFill>
-            <a:srgbClr val="1E1E35"/>
-          </a:solidFill>
-          <a:ln w="6350">
-            <a:solidFill>
-              <a:srgbClr val="2A2A48"/>
-            </a:solidFill>
-            <a:prstDash val="solid"/>
-          </a:ln>
-        </p:spPr>
-      </p:sp>
-      <p:sp>
-        <p:nvSpPr>
-          <p:cNvPr id="42" name="Shape 40"/>
-          <p:cNvSpPr/>
-          <p:nvPr/>
-        </p:nvSpPr>
-        <p:spPr>
-          <a:xfrm>
-            <a:off x="5742432" y="2884932"/>
-            <a:ext cx="1197864" cy="301752"/>
-          </a:xfrm>
-          <a:prstGeom prst="rect">
-            <a:avLst/>
-          </a:prstGeom>
-          <a:solidFill>
-            <a:srgbClr val="1E1E35"/>
-          </a:solidFill>
-          <a:ln w="6350">
-            <a:solidFill>
-              <a:srgbClr val="2A2A48"/>
-            </a:solidFill>
-            <a:prstDash val="solid"/>
-          </a:ln>
-        </p:spPr>
-      </p:sp>
-      <p:sp>
-        <p:nvSpPr>
-          <p:cNvPr id="43" name="Text 41"/>
-          <p:cNvSpPr/>
-          <p:nvPr/>
-        </p:nvSpPr>
-        <p:spPr>
-          <a:xfrm>
-            <a:off x="475488" y="2884932"/>
-            <a:ext cx="2386584" cy="301752"/>
-          </a:xfrm>
-          <a:prstGeom prst="rect">
-            <a:avLst/>
-          </a:prstGeom>
-          <a:noFill/>
-          <a:ln/>
-        </p:spPr>
-        <p:txBody>
-          <a:bodyPr wrap="square" lIns="0" tIns="0" rIns="0" bIns="0" rtlCol="0" anchor="ctr"/>
-          <a:lstStyle/>
-          <a:p>
-            <a:pPr algn="l" indent="0" marL="0">
-              <a:buNone/>
-            </a:pPr>
-            <a:r>
-              <a:rPr lang="en-US" sz="1050" dirty="0">
-                <a:solidFill>
-                  <a:srgbClr val="E2E8F0"/>
-                </a:solidFill>
-                <a:latin typeface="Calibri" pitchFamily="34" charset="0"/>
-                <a:ea typeface="Calibri" pitchFamily="34" charset="-122"/>
-                <a:cs typeface="Calibri" pitchFamily="34" charset="-120"/>
-              </a:rPr>
-              <a:t>Vector Store</a:t>
-            </a:r>
-            <a:endParaRPr lang="en-US" sz="1050" dirty="0"/>
-          </a:p>
-        </p:txBody>
-      </p:sp>
-      <p:sp>
-        <p:nvSpPr>
-          <p:cNvPr id="44" name="Text 42"/>
-          <p:cNvSpPr/>
-          <p:nvPr/>
-        </p:nvSpPr>
-        <p:spPr>
-          <a:xfrm>
-            <a:off x="3154680" y="2884932"/>
-            <a:ext cx="2386584" cy="301752"/>
-          </a:xfrm>
-          <a:prstGeom prst="rect">
-            <a:avLst/>
-          </a:prstGeom>
-          <a:noFill/>
-          <a:ln/>
-        </p:spPr>
-        <p:txBody>
-          <a:bodyPr wrap="square" lIns="0" tIns="0" rIns="0" bIns="0" rtlCol="0" anchor="ctr"/>
-          <a:lstStyle/>
-          <a:p>
-            <a:pPr algn="l" indent="0" marL="0">
-              <a:buNone/>
-            </a:pPr>
-            <a:r>
-              <a:rPr lang="en-US" sz="1050" dirty="0">
-                <a:solidFill>
-                  <a:srgbClr val="A855F7"/>
-                </a:solidFill>
-                <a:latin typeface="Calibri" pitchFamily="34" charset="0"/>
-                <a:ea typeface="Calibri" pitchFamily="34" charset="-122"/>
-                <a:cs typeface="Calibri" pitchFamily="34" charset="-120"/>
-              </a:rPr>
-              <a:t>ChromaDB</a:t>
-            </a:r>
-            <a:endParaRPr lang="en-US" sz="1050" dirty="0"/>
-          </a:p>
-        </p:txBody>
-      </p:sp>
-      <p:sp>
-        <p:nvSpPr>
-          <p:cNvPr id="45" name="Text 43"/>
-          <p:cNvSpPr/>
-          <p:nvPr/>
-        </p:nvSpPr>
-        <p:spPr>
-          <a:xfrm>
-            <a:off x="5833872" y="2884932"/>
-            <a:ext cx="1106424" cy="301752"/>
-          </a:xfrm>
-          <a:prstGeom prst="rect">
-            <a:avLst/>
-          </a:prstGeom>
-          <a:noFill/>
-          <a:ln/>
-        </p:spPr>
-        <p:txBody>
-          <a:bodyPr wrap="square" lIns="0" tIns="0" rIns="0" bIns="0" rtlCol="0" anchor="ctr"/>
-          <a:lstStyle/>
-          <a:p>
-            <a:pPr algn="l" indent="0" marL="0">
-              <a:buNone/>
-            </a:pPr>
-            <a:r>
-              <a:rPr lang="en-US" sz="1050" dirty="0">
-                <a:solidFill>
-                  <a:srgbClr val="22C55E"/>
-                </a:solidFill>
-                <a:latin typeface="Calibri" pitchFamily="34" charset="0"/>
-                <a:ea typeface="Calibri" pitchFamily="34" charset="-122"/>
-                <a:cs typeface="Calibri" pitchFamily="34" charset="-120"/>
-              </a:rPr>
-              <a:t>Free</a:t>
-            </a:r>
-            <a:endParaRPr lang="en-US" sz="1050" dirty="0"/>
-          </a:p>
-        </p:txBody>
-      </p:sp>
-      <p:sp>
-        <p:nvSpPr>
-          <p:cNvPr id="46" name="Shape 44"/>
-          <p:cNvSpPr/>
-          <p:nvPr/>
-        </p:nvSpPr>
-        <p:spPr>
-          <a:xfrm>
-            <a:off x="384048" y="3209544"/>
-            <a:ext cx="2478024" cy="301752"/>
-          </a:xfrm>
-          <a:prstGeom prst="rect">
-            <a:avLst/>
-          </a:prstGeom>
-          <a:solidFill>
-            <a:srgbClr val="161628"/>
-          </a:solidFill>
-          <a:ln w="6350">
-            <a:solidFill>
-              <a:srgbClr val="2A2A48"/>
-            </a:solidFill>
-            <a:prstDash val="solid"/>
-          </a:ln>
-        </p:spPr>
-      </p:sp>
-      <p:sp>
-        <p:nvSpPr>
-          <p:cNvPr id="47" name="Shape 45"/>
-          <p:cNvSpPr/>
-          <p:nvPr/>
-        </p:nvSpPr>
-        <p:spPr>
-          <a:xfrm>
-            <a:off x="3063240" y="3209544"/>
-            <a:ext cx="2478024" cy="301752"/>
-          </a:xfrm>
-          <a:prstGeom prst="rect">
-            <a:avLst/>
-          </a:prstGeom>
-          <a:solidFill>
-            <a:srgbClr val="161628"/>
-          </a:solidFill>
-          <a:ln w="6350">
-            <a:solidFill>
-              <a:srgbClr val="2A2A48"/>
-            </a:solidFill>
-            <a:prstDash val="solid"/>
-          </a:ln>
-        </p:spPr>
-      </p:sp>
-      <p:sp>
-        <p:nvSpPr>
-          <p:cNvPr id="48" name="Shape 46"/>
-          <p:cNvSpPr/>
-          <p:nvPr/>
-        </p:nvSpPr>
-        <p:spPr>
-          <a:xfrm>
-            <a:off x="5742432" y="3209544"/>
-            <a:ext cx="1197864" cy="301752"/>
-          </a:xfrm>
-          <a:prstGeom prst="rect">
-            <a:avLst/>
-          </a:prstGeom>
-          <a:solidFill>
-            <a:srgbClr val="161628"/>
-          </a:solidFill>
-          <a:ln w="6350">
-            <a:solidFill>
-              <a:srgbClr val="2A2A48"/>
-            </a:solidFill>
-            <a:prstDash val="solid"/>
-          </a:ln>
-        </p:spPr>
-      </p:sp>
-      <p:sp>
-        <p:nvSpPr>
-          <p:cNvPr id="49" name="Text 47"/>
-          <p:cNvSpPr/>
-          <p:nvPr/>
-        </p:nvSpPr>
-        <p:spPr>
-          <a:xfrm>
-            <a:off x="475488" y="3209544"/>
-            <a:ext cx="2386584" cy="301752"/>
-          </a:xfrm>
-          <a:prstGeom prst="rect">
-            <a:avLst/>
-          </a:prstGeom>
-          <a:noFill/>
-          <a:ln/>
-        </p:spPr>
-        <p:txBody>
-          <a:bodyPr wrap="square" lIns="0" tIns="0" rIns="0" bIns="0" rtlCol="0" anchor="ctr"/>
-          <a:lstStyle/>
-          <a:p>
-            <a:pPr algn="l" indent="0" marL="0">
-              <a:buNone/>
-            </a:pPr>
-            <a:r>
-              <a:rPr lang="en-US" sz="1050" dirty="0">
-                <a:solidFill>
-                  <a:srgbClr val="E2E8F0"/>
-                </a:solidFill>
-                <a:latin typeface="Calibri" pitchFamily="34" charset="0"/>
-                <a:ea typeface="Calibri" pitchFamily="34" charset="-122"/>
-                <a:cs typeface="Calibri" pitchFamily="34" charset="-120"/>
-              </a:rPr>
-              <a:t>API Server</a:t>
-            </a:r>
-            <a:endParaRPr lang="en-US" sz="1050" dirty="0"/>
-          </a:p>
-        </p:txBody>
-      </p:sp>
-      <p:sp>
-        <p:nvSpPr>
-          <p:cNvPr id="50" name="Text 48"/>
-          <p:cNvSpPr/>
-          <p:nvPr/>
-        </p:nvSpPr>
-        <p:spPr>
-          <a:xfrm>
-            <a:off x="3154680" y="3209544"/>
-            <a:ext cx="2386584" cy="301752"/>
-          </a:xfrm>
-          <a:prstGeom prst="rect">
-            <a:avLst/>
-          </a:prstGeom>
-          <a:noFill/>
-          <a:ln/>
-        </p:spPr>
-        <p:txBody>
-          <a:bodyPr wrap="square" lIns="0" tIns="0" rIns="0" bIns="0" rtlCol="0" anchor="ctr"/>
-          <a:lstStyle/>
-          <a:p>
-            <a:pPr algn="l" indent="0" marL="0">
-              <a:buNone/>
-            </a:pPr>
-            <a:r>
-              <a:rPr lang="en-US" sz="1050" dirty="0">
-                <a:solidFill>
-                  <a:srgbClr val="A855F7"/>
-                </a:solidFill>
-                <a:latin typeface="Calibri" pitchFamily="34" charset="0"/>
-                <a:ea typeface="Calibri" pitchFamily="34" charset="-122"/>
-                <a:cs typeface="Calibri" pitchFamily="34" charset="-120"/>
-              </a:rPr>
-              <a:t>FastAPI + Uvicorn</a:t>
-            </a:r>
-            <a:endParaRPr lang="en-US" sz="1050" dirty="0"/>
-          </a:p>
-        </p:txBody>
-      </p:sp>
-      <p:sp>
-        <p:nvSpPr>
-          <p:cNvPr id="51" name="Text 49"/>
-          <p:cNvSpPr/>
-          <p:nvPr/>
-        </p:nvSpPr>
-        <p:spPr>
-          <a:xfrm>
-            <a:off x="5833872" y="3209544"/>
-            <a:ext cx="1106424" cy="301752"/>
-          </a:xfrm>
-          <a:prstGeom prst="rect">
-            <a:avLst/>
-          </a:prstGeom>
-          <a:noFill/>
-          <a:ln/>
-        </p:spPr>
-        <p:txBody>
-          <a:bodyPr wrap="square" lIns="0" tIns="0" rIns="0" bIns="0" rtlCol="0" anchor="ctr"/>
-          <a:lstStyle/>
-          <a:p>
-            <a:pPr algn="l" indent="0" marL="0">
-              <a:buNone/>
-            </a:pPr>
-            <a:r>
-              <a:rPr lang="en-US" sz="1050" dirty="0">
-                <a:solidFill>
-                  <a:srgbClr val="22C55E"/>
-                </a:solidFill>
-                <a:latin typeface="Calibri" pitchFamily="34" charset="0"/>
-                <a:ea typeface="Calibri" pitchFamily="34" charset="-122"/>
-                <a:cs typeface="Calibri" pitchFamily="34" charset="-120"/>
-              </a:rPr>
-              <a:t>Free</a:t>
-            </a:r>
-            <a:endParaRPr lang="en-US" sz="1050" dirty="0"/>
-          </a:p>
-        </p:txBody>
-      </p:sp>
-      <p:sp>
-        <p:nvSpPr>
-          <p:cNvPr id="52" name="Shape 50"/>
-          <p:cNvSpPr/>
-          <p:nvPr/>
-        </p:nvSpPr>
-        <p:spPr>
-          <a:xfrm>
-            <a:off x="384048" y="3534156"/>
-            <a:ext cx="2478024" cy="301752"/>
-          </a:xfrm>
-          <a:prstGeom prst="rect">
-            <a:avLst/>
-          </a:prstGeom>
-          <a:solidFill>
-            <a:srgbClr val="1E1E35"/>
-          </a:solidFill>
-          <a:ln w="6350">
-            <a:solidFill>
-              <a:srgbClr val="2A2A48"/>
-            </a:solidFill>
-            <a:prstDash val="solid"/>
-          </a:ln>
-        </p:spPr>
-      </p:sp>
-      <p:sp>
-        <p:nvSpPr>
-          <p:cNvPr id="53" name="Shape 51"/>
-          <p:cNvSpPr/>
-          <p:nvPr/>
-        </p:nvSpPr>
-        <p:spPr>
-          <a:xfrm>
-            <a:off x="3063240" y="3534156"/>
-            <a:ext cx="2478024" cy="301752"/>
-          </a:xfrm>
-          <a:prstGeom prst="rect">
-            <a:avLst/>
-          </a:prstGeom>
-          <a:solidFill>
-            <a:srgbClr val="1E1E35"/>
-          </a:solidFill>
-          <a:ln w="6350">
-            <a:solidFill>
-              <a:srgbClr val="2A2A48"/>
-            </a:solidFill>
-            <a:prstDash val="solid"/>
-          </a:ln>
-        </p:spPr>
-      </p:sp>
-      <p:sp>
-        <p:nvSpPr>
-          <p:cNvPr id="54" name="Shape 52"/>
-          <p:cNvSpPr/>
-          <p:nvPr/>
-        </p:nvSpPr>
-        <p:spPr>
-          <a:xfrm>
-            <a:off x="5742432" y="3534156"/>
-            <a:ext cx="1197864" cy="301752"/>
-          </a:xfrm>
-          <a:prstGeom prst="rect">
-            <a:avLst/>
-          </a:prstGeom>
-          <a:solidFill>
-            <a:srgbClr val="1E1E35"/>
-          </a:solidFill>
-          <a:ln w="6350">
-            <a:solidFill>
-              <a:srgbClr val="2A2A48"/>
-            </a:solidFill>
-            <a:prstDash val="solid"/>
-          </a:ln>
-        </p:spPr>
-      </p:sp>
-      <p:sp>
-        <p:nvSpPr>
-          <p:cNvPr id="55" name="Text 53"/>
-          <p:cNvSpPr/>
-          <p:nvPr/>
-        </p:nvSpPr>
-        <p:spPr>
-          <a:xfrm>
-            <a:off x="475488" y="3534156"/>
-            <a:ext cx="2386584" cy="301752"/>
-          </a:xfrm>
-          <a:prstGeom prst="rect">
-            <a:avLst/>
-          </a:prstGeom>
-          <a:noFill/>
-          <a:ln/>
-        </p:spPr>
-        <p:txBody>
-          <a:bodyPr wrap="square" lIns="0" tIns="0" rIns="0" bIns="0" rtlCol="0" anchor="ctr"/>
-          <a:lstStyle/>
-          <a:p>
-            <a:pPr algn="l" indent="0" marL="0">
-              <a:buNone/>
-            </a:pPr>
-            <a:r>
-              <a:rPr lang="en-US" sz="1050" dirty="0">
-                <a:solidFill>
-                  <a:srgbClr val="E2E8F0"/>
-                </a:solidFill>
-                <a:latin typeface="Calibri" pitchFamily="34" charset="0"/>
-                <a:ea typeface="Calibri" pitchFamily="34" charset="-122"/>
-                <a:cs typeface="Calibri" pitchFamily="34" charset="-120"/>
-              </a:rPr>
-              <a:t>Dashboards</a:t>
-            </a:r>
-            <a:endParaRPr lang="en-US" sz="1050" dirty="0"/>
-          </a:p>
-        </p:txBody>
-      </p:sp>
-      <p:sp>
-        <p:nvSpPr>
-          <p:cNvPr id="56" name="Text 54"/>
-          <p:cNvSpPr/>
-          <p:nvPr/>
-        </p:nvSpPr>
-        <p:spPr>
-          <a:xfrm>
-            <a:off x="3154680" y="3534156"/>
-            <a:ext cx="2386584" cy="301752"/>
-          </a:xfrm>
-          <a:prstGeom prst="rect">
-            <a:avLst/>
-          </a:prstGeom>
-          <a:noFill/>
-          <a:ln/>
-        </p:spPr>
-        <p:txBody>
-          <a:bodyPr wrap="square" lIns="0" tIns="0" rIns="0" bIns="0" rtlCol="0" anchor="ctr"/>
-          <a:lstStyle/>
-          <a:p>
-            <a:pPr algn="l" indent="0" marL="0">
-              <a:buNone/>
-            </a:pPr>
-            <a:r>
-              <a:rPr lang="en-US" sz="1050" dirty="0">
-                <a:solidFill>
-                  <a:srgbClr val="A855F7"/>
-                </a:solidFill>
-                <a:latin typeface="Calibri" pitchFamily="34" charset="0"/>
-                <a:ea typeface="Calibri" pitchFamily="34" charset="-122"/>
-                <a:cs typeface="Calibri" pitchFamily="34" charset="-120"/>
-              </a:rPr>
-              <a:t>Streamlit + HTML / JS</a:t>
-            </a:r>
-            <a:endParaRPr lang="en-US" sz="1050" dirty="0"/>
-          </a:p>
-        </p:txBody>
-      </p:sp>
-      <p:sp>
-        <p:nvSpPr>
-          <p:cNvPr id="57" name="Text 55"/>
-          <p:cNvSpPr/>
-          <p:nvPr/>
-        </p:nvSpPr>
-        <p:spPr>
-          <a:xfrm>
-            <a:off x="5833872" y="3534156"/>
-            <a:ext cx="1106424" cy="301752"/>
-          </a:xfrm>
-          <a:prstGeom prst="rect">
-            <a:avLst/>
-          </a:prstGeom>
-          <a:noFill/>
-          <a:ln/>
-        </p:spPr>
-        <p:txBody>
-          <a:bodyPr wrap="square" lIns="0" tIns="0" rIns="0" bIns="0" rtlCol="0" anchor="ctr"/>
-          <a:lstStyle/>
-          <a:p>
-            <a:pPr algn="l" indent="0" marL="0">
-              <a:buNone/>
-            </a:pPr>
-            <a:r>
-              <a:rPr lang="en-US" sz="1050" dirty="0">
-                <a:solidFill>
-                  <a:srgbClr val="22C55E"/>
-                </a:solidFill>
-                <a:latin typeface="Calibri" pitchFamily="34" charset="0"/>
-                <a:ea typeface="Calibri" pitchFamily="34" charset="-122"/>
-                <a:cs typeface="Calibri" pitchFamily="34" charset="-120"/>
-              </a:rPr>
-              <a:t>Free</a:t>
-            </a:r>
-            <a:endParaRPr lang="en-US" sz="1050" dirty="0"/>
-          </a:p>
-        </p:txBody>
-      </p:sp>
-      <p:sp>
-        <p:nvSpPr>
-          <p:cNvPr id="58" name="Shape 56"/>
-          <p:cNvSpPr/>
-          <p:nvPr/>
-        </p:nvSpPr>
-        <p:spPr>
-          <a:xfrm>
-            <a:off x="384048" y="3977640"/>
-            <a:ext cx="8375904" cy="932688"/>
+          <p:cNvPr id="57" name="Shape 55"/>
+          <p:cNvSpPr/>
+          <p:nvPr/>
+        </p:nvSpPr>
+        <p:spPr>
+          <a:xfrm>
+            <a:off x="384048" y="4041648"/>
+            <a:ext cx="8375904" cy="868680"/>
           </a:xfrm>
           <a:prstGeom prst="rect">
             <a:avLst/>
@@ -3990,14 +3963,14 @@
       </p:sp>
       <p:sp>
         <p:nvSpPr>
-          <p:cNvPr id="59" name="Shape 57"/>
-          <p:cNvSpPr/>
-          <p:nvPr/>
-        </p:nvSpPr>
-        <p:spPr>
-          <a:xfrm>
-            <a:off x="384048" y="3977640"/>
-            <a:ext cx="54864" cy="932688"/>
+          <p:cNvPr id="58" name="Shape 56"/>
+          <p:cNvSpPr/>
+          <p:nvPr/>
+        </p:nvSpPr>
+        <p:spPr>
+          <a:xfrm>
+            <a:off x="384048" y="4041648"/>
+            <a:ext cx="54864" cy="868680"/>
           </a:xfrm>
           <a:prstGeom prst="rect">
             <a:avLst/>
@@ -4015,14 +3988,14 @@
       </p:sp>
       <p:sp>
         <p:nvSpPr>
-          <p:cNvPr id="60" name="Text 58"/>
-          <p:cNvSpPr/>
-          <p:nvPr/>
-        </p:nvSpPr>
-        <p:spPr>
-          <a:xfrm>
-            <a:off x="566928" y="4041648"/>
-            <a:ext cx="8046720" cy="804672"/>
+          <p:cNvPr id="59" name="Text 57"/>
+          <p:cNvSpPr/>
+          <p:nvPr/>
+        </p:nvSpPr>
+        <p:spPr>
+          <a:xfrm>
+            <a:off x="566928" y="4096512"/>
+            <a:ext cx="8065008" cy="749808"/>
           </a:xfrm>
           <a:prstGeom prst="rect">
             <a:avLst/>
@@ -4131,8 +4104,8 @@
         </p:nvSpPr>
         <p:spPr>
           <a:xfrm>
-            <a:off x="411480" y="868680"/>
-            <a:ext cx="2697480" cy="1554480"/>
+            <a:off x="438912" y="877824"/>
+            <a:ext cx="2578608" cy="1554480"/>
           </a:xfrm>
           <a:prstGeom prst="rect">
             <a:avLst/>
@@ -4163,8 +4136,8 @@
         </p:nvSpPr>
         <p:spPr>
           <a:xfrm>
-            <a:off x="411480" y="868680"/>
-            <a:ext cx="2697480" cy="64008"/>
+            <a:off x="438912" y="877824"/>
+            <a:ext cx="2578608" cy="64008"/>
           </a:xfrm>
           <a:prstGeom prst="rect">
             <a:avLst/>
@@ -4188,8 +4161,8 @@
         </p:nvSpPr>
         <p:spPr>
           <a:xfrm>
-            <a:off x="411480" y="987552"/>
-            <a:ext cx="2697480" cy="841248"/>
+            <a:off x="438912" y="987552"/>
+            <a:ext cx="2578608" cy="822960"/>
           </a:xfrm>
           <a:prstGeom prst="rect">
             <a:avLst/>
@@ -4205,7 +4178,7 @@
               <a:buNone/>
             </a:pPr>
             <a:r>
-              <a:rPr lang="en-US" sz="4800" b="1" dirty="0">
+              <a:rPr lang="en-US" sz="4600" b="1" dirty="0">
                 <a:solidFill>
                   <a:srgbClr val="EF4444"/>
                 </a:solidFill>
@@ -4215,7 +4188,7 @@
               </a:rPr>
               <a:t>18M+</a:t>
             </a:r>
-            <a:endParaRPr lang="en-US" sz="4800" dirty="0"/>
+            <a:endParaRPr lang="en-US" sz="4600" dirty="0"/>
           </a:p>
         </p:txBody>
       </p:sp>
@@ -4227,8 +4200,8 @@
         </p:nvSpPr>
         <p:spPr>
           <a:xfrm>
-            <a:off x="411480" y="1828800"/>
-            <a:ext cx="2697480" cy="502920"/>
+            <a:off x="438912" y="1828800"/>
+            <a:ext cx="2578608" cy="530352"/>
           </a:xfrm>
           <a:prstGeom prst="rect">
             <a:avLst/>
@@ -4252,7 +4225,7 @@
                 <a:ea typeface="Calibri" pitchFamily="34" charset="-122"/>
                 <a:cs typeface="Calibri" pitchFamily="34" charset="-120"/>
               </a:rPr>
-              <a:t>Students compete annually</a:t>
+              <a:t>Students appear annually</a:t>
             </a:r>
             <a:endParaRPr lang="en-US" sz="1100" dirty="0"/>
           </a:p>
@@ -4283,8 +4256,8 @@
         </p:nvSpPr>
         <p:spPr>
           <a:xfrm>
-            <a:off x="3319272" y="868680"/>
-            <a:ext cx="2697480" cy="1554480"/>
+            <a:off x="3227832" y="877824"/>
+            <a:ext cx="2578608" cy="1554480"/>
           </a:xfrm>
           <a:prstGeom prst="rect">
             <a:avLst/>
@@ -4315,8 +4288,8 @@
         </p:nvSpPr>
         <p:spPr>
           <a:xfrm>
-            <a:off x="3319272" y="868680"/>
-            <a:ext cx="2697480" cy="64008"/>
+            <a:off x="3227832" y="877824"/>
+            <a:ext cx="2578608" cy="64008"/>
           </a:xfrm>
           <a:prstGeom prst="rect">
             <a:avLst/>
@@ -4340,8 +4313,8 @@
         </p:nvSpPr>
         <p:spPr>
           <a:xfrm>
-            <a:off x="3319272" y="987552"/>
-            <a:ext cx="2697480" cy="841248"/>
+            <a:off x="3227832" y="987552"/>
+            <a:ext cx="2578608" cy="822960"/>
           </a:xfrm>
           <a:prstGeom prst="rect">
             <a:avLst/>
@@ -4357,7 +4330,7 @@
               <a:buNone/>
             </a:pPr>
             <a:r>
-              <a:rPr lang="en-US" sz="4800" b="1" dirty="0">
+              <a:rPr lang="en-US" sz="4600" b="1" dirty="0">
                 <a:solidFill>
                   <a:srgbClr val="F59E0B"/>
                 </a:solidFill>
@@ -4367,7 +4340,7 @@
               </a:rPr>
               <a:t>40 yrs</a:t>
             </a:r>
-            <a:endParaRPr lang="en-US" sz="4800" dirty="0"/>
+            <a:endParaRPr lang="en-US" sz="4600" dirty="0"/>
           </a:p>
         </p:txBody>
       </p:sp>
@@ -4379,8 +4352,8 @@
         </p:nvSpPr>
         <p:spPr>
           <a:xfrm>
-            <a:off x="3319272" y="1828800"/>
-            <a:ext cx="2697480" cy="502920"/>
+            <a:off x="3227832" y="1828800"/>
+            <a:ext cx="2578608" cy="530352"/>
           </a:xfrm>
           <a:prstGeom prst="rect">
             <a:avLst/>
@@ -4435,8 +4408,8 @@
         </p:nvSpPr>
         <p:spPr>
           <a:xfrm>
-            <a:off x="6227064" y="868680"/>
-            <a:ext cx="2697480" cy="1554480"/>
+            <a:off x="6016752" y="877824"/>
+            <a:ext cx="2578608" cy="1554480"/>
           </a:xfrm>
           <a:prstGeom prst="rect">
             <a:avLst/>
@@ -4446,7 +4419,7 @@
           </a:solidFill>
           <a:ln w="25400">
             <a:solidFill>
-              <a:srgbClr val="7C3AED"/>
+              <a:srgbClr val="A855F7"/>
             </a:solidFill>
             <a:prstDash val="solid"/>
           </a:ln>
@@ -4467,18 +4440,18 @@
         </p:nvSpPr>
         <p:spPr>
           <a:xfrm>
-            <a:off x="6227064" y="868680"/>
-            <a:ext cx="2697480" cy="64008"/>
-          </a:xfrm>
-          <a:prstGeom prst="rect">
-            <a:avLst/>
-          </a:prstGeom>
-          <a:solidFill>
-            <a:srgbClr val="7C3AED"/>
+            <a:off x="6016752" y="877824"/>
+            <a:ext cx="2578608" cy="64008"/>
+          </a:xfrm>
+          <a:prstGeom prst="rect">
+            <a:avLst/>
+          </a:prstGeom>
+          <a:solidFill>
+            <a:srgbClr val="A855F7"/>
           </a:solidFill>
           <a:ln w="12700">
             <a:solidFill>
-              <a:srgbClr val="7C3AED"/>
+              <a:srgbClr val="A855F7"/>
             </a:solidFill>
             <a:prstDash val="solid"/>
           </a:ln>
@@ -4492,8 +4465,8 @@
         </p:nvSpPr>
         <p:spPr>
           <a:xfrm>
-            <a:off x="6227064" y="987552"/>
-            <a:ext cx="2697480" cy="841248"/>
+            <a:off x="6016752" y="987552"/>
+            <a:ext cx="2578608" cy="822960"/>
           </a:xfrm>
           <a:prstGeom prst="rect">
             <a:avLst/>
@@ -4509,9 +4482,9 @@
               <a:buNone/>
             </a:pPr>
             <a:r>
-              <a:rPr lang="en-US" sz="4800" b="1" dirty="0">
-                <a:solidFill>
-                  <a:srgbClr val="7C3AED"/>
+              <a:rPr lang="en-US" sz="4600" b="1" dirty="0">
+                <a:solidFill>
+                  <a:srgbClr val="A855F7"/>
                 </a:solidFill>
                 <a:latin typeface="Arial Black" pitchFamily="34" charset="0"/>
                 <a:ea typeface="Arial Black" pitchFamily="34" charset="-122"/>
@@ -4519,7 +4492,7 @@
               </a:rPr>
               <a:t>59+</a:t>
             </a:r>
-            <a:endParaRPr lang="en-US" sz="4800" dirty="0"/>
+            <a:endParaRPr lang="en-US" sz="4600" dirty="0"/>
           </a:p>
         </p:txBody>
       </p:sp>
@@ -4531,8 +4504,8 @@
         </p:nvSpPr>
         <p:spPr>
           <a:xfrm>
-            <a:off x="6227064" y="1828800"/>
-            <a:ext cx="2697480" cy="502920"/>
+            <a:off x="6016752" y="1828800"/>
+            <a:ext cx="2578608" cy="530352"/>
           </a:xfrm>
           <a:prstGeom prst="rect">
             <a:avLst/>
@@ -4573,7 +4546,7 @@
                 <a:ea typeface="Calibri" pitchFamily="34" charset="-122"/>
                 <a:cs typeface="Calibri" pitchFamily="34" charset="-120"/>
               </a:rPr>
-              <a:t>No clear priority framework</a:t>
+              <a:t>no clear priority framework</a:t>
             </a:r>
             <a:endParaRPr lang="en-US" sz="1100" dirty="0"/>
           </a:p>
@@ -4587,8 +4560,8 @@
         </p:nvSpPr>
         <p:spPr>
           <a:xfrm>
-            <a:off x="411480" y="2606040"/>
-            <a:ext cx="8321040" cy="2331720"/>
+            <a:off x="438912" y="2633472"/>
+            <a:ext cx="8266176" cy="1993392"/>
           </a:xfrm>
           <a:prstGeom prst="rect">
             <a:avLst/>
@@ -4619,8 +4592,8 @@
         </p:nvSpPr>
         <p:spPr>
           <a:xfrm>
-            <a:off x="411480" y="2606040"/>
-            <a:ext cx="54864" cy="2331720"/>
+            <a:off x="438912" y="2633472"/>
+            <a:ext cx="54864" cy="1993392"/>
           </a:xfrm>
           <a:prstGeom prst="rect">
             <a:avLst/>
@@ -4644,8 +4617,8 @@
         </p:nvSpPr>
         <p:spPr>
           <a:xfrm>
-            <a:off x="594360" y="2697480"/>
-            <a:ext cx="7955280" cy="320040"/>
+            <a:off x="621792" y="2706624"/>
+            <a:ext cx="7955280" cy="310896"/>
           </a:xfrm>
           <a:prstGeom prst="rect">
             <a:avLst/>
@@ -4683,8 +4656,8 @@
         </p:nvSpPr>
         <p:spPr>
           <a:xfrm>
-            <a:off x="640080" y="3063240"/>
-            <a:ext cx="7909560" cy="1737360"/>
+            <a:off x="658368" y="3054096"/>
+            <a:ext cx="7882128" cy="1463040"/>
           </a:xfrm>
           <a:prstGeom prst="rect">
             <a:avLst/>
@@ -4698,7 +4671,7 @@
           <a:p>
             <a:pPr algn="l" marL="342900" indent="-342900">
               <a:spcAft>
-                <a:spcPts val="500"/>
+                <a:spcPts val="300"/>
               </a:spcAft>
               <a:buSzPct val="100000"/>
               <a:buChar char="•"/>
@@ -4719,7 +4692,7 @@
           <a:p>
             <a:pPr algn="l" marL="342900" indent="-342900">
               <a:spcAft>
-                <a:spcPts val="500"/>
+                <a:spcPts val="300"/>
               </a:spcAft>
               <a:buSzPct val="100000"/>
               <a:buChar char="•"/>
@@ -4733,14 +4706,14 @@
                 <a:ea typeface="Calibri" pitchFamily="34" charset="-122"/>
                 <a:cs typeface="Calibri" pitchFamily="34" charset="-120"/>
               </a:rPr>
-              <a:t>No visibility into which chapters need 6h of focus vs. 30-min quick revision</a:t>
+              <a:t>No visibility into which chapters need 6h of focus vs. 30 min quick revision</a:t>
             </a:r>
             <a:endParaRPr lang="en-US" sz="1250" dirty="0"/>
           </a:p>
           <a:p>
             <a:pPr algn="l" marL="342900" indent="-342900">
               <a:spcAft>
-                <a:spcPts val="500"/>
+                <a:spcPts val="300"/>
               </a:spcAft>
               <a:buSzPct val="100000"/>
               <a:buChar char="•"/>
@@ -4754,14 +4727,14 @@
                 <a:ea typeface="Calibri" pitchFamily="34" charset="-122"/>
                 <a:cs typeface="Calibri" pitchFamily="34" charset="-120"/>
               </a:rPr>
-              <a:t>40 years of PYQs contain clear, learnable patterns — but they're locked in scanned PDFs</a:t>
+              <a:t>40 years of PYQs contain clear patterns — but they're locked in scanned PDFs</a:t>
             </a:r>
             <a:endParaRPr lang="en-US" sz="1250" dirty="0"/>
           </a:p>
           <a:p>
             <a:pPr algn="l" marL="342900" indent="-342900">
               <a:spcAft>
-                <a:spcPts val="500"/>
+                <a:spcPts val="300"/>
               </a:spcAft>
               <a:buSzPct val="100000"/>
               <a:buChar char="•"/>
@@ -4775,7 +4748,7 @@
                 <a:ea typeface="Calibri" pitchFamily="34" charset="-122"/>
                 <a:cs typeface="Calibri" pitchFamily="34" charset="-120"/>
               </a:rPr>
-              <a:t>Teachers cannot deliver personalised study guidance across hundreds of students at once</a:t>
+              <a:t>Teachers cannot deliver personalised guidance across hundreds of students simultaneously</a:t>
             </a:r>
             <a:endParaRPr lang="en-US" sz="1250" dirty="0"/>
           </a:p>
@@ -4860,8 +4833,8 @@
         </p:nvSpPr>
         <p:spPr>
           <a:xfrm>
-            <a:off x="274320" y="1051560"/>
-            <a:ext cx="1536192" cy="1417320"/>
+            <a:off x="301752" y="1024128"/>
+            <a:ext cx="1426464" cy="1371600"/>
           </a:xfrm>
           <a:prstGeom prst="rect">
             <a:avLst/>
@@ -4892,8 +4865,8 @@
         </p:nvSpPr>
         <p:spPr>
           <a:xfrm>
-            <a:off x="274320" y="1051560"/>
-            <a:ext cx="1536192" cy="64008"/>
+            <a:off x="301752" y="1024128"/>
+            <a:ext cx="1426464" cy="64008"/>
           </a:xfrm>
           <a:prstGeom prst="rect">
             <a:avLst/>
@@ -4917,8 +4890,8 @@
         </p:nvSpPr>
         <p:spPr>
           <a:xfrm>
-            <a:off x="274320" y="1161288"/>
-            <a:ext cx="1536192" cy="640080"/>
+            <a:off x="301752" y="1133856"/>
+            <a:ext cx="1426464" cy="640080"/>
           </a:xfrm>
           <a:prstGeom prst="rect">
             <a:avLst/>
@@ -4934,7 +4907,7 @@
               <a:buNone/>
             </a:pPr>
             <a:r>
-              <a:rPr lang="en-US" sz="1150" b="1" dirty="0">
+              <a:rPr lang="en-US" sz="1100" b="1" dirty="0">
                 <a:solidFill>
                   <a:srgbClr val="F59E0B"/>
                 </a:solidFill>
@@ -4944,14 +4917,14 @@
               </a:rPr>
               <a:t>PDF</a:t>
             </a:r>
-            <a:endParaRPr lang="en-US" sz="1150" dirty="0"/>
+            <a:endParaRPr lang="en-US" sz="1100" dirty="0"/>
           </a:p>
           <a:p>
             <a:pPr algn="ctr" indent="0" marL="0">
               <a:buNone/>
             </a:pPr>
             <a:r>
-              <a:rPr lang="en-US" sz="1150" b="1" dirty="0">
+              <a:rPr lang="en-US" sz="1100" b="1" dirty="0">
                 <a:solidFill>
                   <a:srgbClr val="F59E0B"/>
                 </a:solidFill>
@@ -4961,7 +4934,7 @@
               </a:rPr>
               <a:t>Papers</a:t>
             </a:r>
-            <a:endParaRPr lang="en-US" sz="1150" dirty="0"/>
+            <a:endParaRPr lang="en-US" sz="1100" dirty="0"/>
           </a:p>
         </p:txBody>
       </p:sp>
@@ -4973,8 +4946,8 @@
         </p:nvSpPr>
         <p:spPr>
           <a:xfrm>
-            <a:off x="274320" y="1828800"/>
-            <a:ext cx="1536192" cy="566928"/>
+            <a:off x="301752" y="1810512"/>
+            <a:ext cx="1426464" cy="512064"/>
           </a:xfrm>
           <a:prstGeom prst="rect">
             <a:avLst/>
@@ -5012,8 +4985,8 @@
         </p:nvSpPr>
         <p:spPr>
           <a:xfrm>
-            <a:off x="1847088" y="1760220"/>
-            <a:ext cx="274320" cy="0"/>
+            <a:off x="1764792" y="1709928"/>
+            <a:ext cx="201168" cy="0"/>
           </a:xfrm>
           <a:prstGeom prst="line">
             <a:avLst/>
@@ -5035,8 +5008,8 @@
         </p:nvSpPr>
         <p:spPr>
           <a:xfrm>
-            <a:off x="1993392" y="1577340"/>
-            <a:ext cx="182880" cy="365760"/>
+            <a:off x="1819656" y="1508760"/>
+            <a:ext cx="201168" cy="402336"/>
           </a:xfrm>
           <a:prstGeom prst="rect">
             <a:avLst/>
@@ -5071,8 +5044,8 @@
         </p:nvSpPr>
         <p:spPr>
           <a:xfrm>
-            <a:off x="2157984" y="1051560"/>
-            <a:ext cx="1536192" cy="1417320"/>
+            <a:off x="2002536" y="1024128"/>
+            <a:ext cx="1426464" cy="1371600"/>
           </a:xfrm>
           <a:prstGeom prst="rect">
             <a:avLst/>
@@ -5103,8 +5076,8 @@
         </p:nvSpPr>
         <p:spPr>
           <a:xfrm>
-            <a:off x="2157984" y="1051560"/>
-            <a:ext cx="1536192" cy="64008"/>
+            <a:off x="2002536" y="1024128"/>
+            <a:ext cx="1426464" cy="64008"/>
           </a:xfrm>
           <a:prstGeom prst="rect">
             <a:avLst/>
@@ -5128,8 +5101,8 @@
         </p:nvSpPr>
         <p:spPr>
           <a:xfrm>
-            <a:off x="2157984" y="1161288"/>
-            <a:ext cx="1536192" cy="640080"/>
+            <a:off x="2002536" y="1133856"/>
+            <a:ext cx="1426464" cy="640080"/>
           </a:xfrm>
           <a:prstGeom prst="rect">
             <a:avLst/>
@@ -5145,7 +5118,7 @@
               <a:buNone/>
             </a:pPr>
             <a:r>
-              <a:rPr lang="en-US" sz="1150" b="1" dirty="0">
+              <a:rPr lang="en-US" sz="1100" b="1" dirty="0">
                 <a:solidFill>
                   <a:srgbClr val="7C3AED"/>
                 </a:solidFill>
@@ -5155,14 +5128,14 @@
               </a:rPr>
               <a:t>Claude AI</a:t>
             </a:r>
-            <a:endParaRPr lang="en-US" sz="1150" dirty="0"/>
+            <a:endParaRPr lang="en-US" sz="1100" dirty="0"/>
           </a:p>
           <a:p>
             <a:pPr algn="ctr" indent="0" marL="0">
               <a:buNone/>
             </a:pPr>
             <a:r>
-              <a:rPr lang="en-US" sz="1150" b="1" dirty="0">
+              <a:rPr lang="en-US" sz="1100" b="1" dirty="0">
                 <a:solidFill>
                   <a:srgbClr val="7C3AED"/>
                 </a:solidFill>
@@ -5172,7 +5145,7 @@
               </a:rPr>
               <a:t>Extract</a:t>
             </a:r>
-            <a:endParaRPr lang="en-US" sz="1150" dirty="0"/>
+            <a:endParaRPr lang="en-US" sz="1100" dirty="0"/>
           </a:p>
         </p:txBody>
       </p:sp>
@@ -5184,8 +5157,8 @@
         </p:nvSpPr>
         <p:spPr>
           <a:xfrm>
-            <a:off x="2157984" y="1828800"/>
-            <a:ext cx="1536192" cy="566928"/>
+            <a:off x="2002536" y="1810512"/>
+            <a:ext cx="1426464" cy="512064"/>
           </a:xfrm>
           <a:prstGeom prst="rect">
             <a:avLst/>
@@ -5240,8 +5213,8 @@
         </p:nvSpPr>
         <p:spPr>
           <a:xfrm>
-            <a:off x="3730752" y="1760220"/>
-            <a:ext cx="274320" cy="0"/>
+            <a:off x="3465576" y="1709928"/>
+            <a:ext cx="201168" cy="0"/>
           </a:xfrm>
           <a:prstGeom prst="line">
             <a:avLst/>
@@ -5263,8 +5236,8 @@
         </p:nvSpPr>
         <p:spPr>
           <a:xfrm>
-            <a:off x="3877056" y="1577340"/>
-            <a:ext cx="182880" cy="365760"/>
+            <a:off x="3520440" y="1508760"/>
+            <a:ext cx="201168" cy="402336"/>
           </a:xfrm>
           <a:prstGeom prst="rect">
             <a:avLst/>
@@ -5299,8 +5272,8 @@
         </p:nvSpPr>
         <p:spPr>
           <a:xfrm>
-            <a:off x="4041648" y="1051560"/>
-            <a:ext cx="1536192" cy="1417320"/>
+            <a:off x="3703320" y="1024128"/>
+            <a:ext cx="1426464" cy="1371600"/>
           </a:xfrm>
           <a:prstGeom prst="rect">
             <a:avLst/>
@@ -5331,8 +5304,8 @@
         </p:nvSpPr>
         <p:spPr>
           <a:xfrm>
-            <a:off x="4041648" y="1051560"/>
-            <a:ext cx="1536192" cy="64008"/>
+            <a:off x="3703320" y="1024128"/>
+            <a:ext cx="1426464" cy="64008"/>
           </a:xfrm>
           <a:prstGeom prst="rect">
             <a:avLst/>
@@ -5356,8 +5329,8 @@
         </p:nvSpPr>
         <p:spPr>
           <a:xfrm>
-            <a:off x="4041648" y="1161288"/>
-            <a:ext cx="1536192" cy="640080"/>
+            <a:off x="3703320" y="1133856"/>
+            <a:ext cx="1426464" cy="640080"/>
           </a:xfrm>
           <a:prstGeom prst="rect">
             <a:avLst/>
@@ -5373,7 +5346,7 @@
               <a:buNone/>
             </a:pPr>
             <a:r>
-              <a:rPr lang="en-US" sz="1150" b="1" dirty="0">
+              <a:rPr lang="en-US" sz="1100" b="1" dirty="0">
                 <a:solidFill>
                   <a:srgbClr val="06B6D4"/>
                 </a:solidFill>
@@ -5383,14 +5356,14 @@
               </a:rPr>
               <a:t>SQLite</a:t>
             </a:r>
-            <a:endParaRPr lang="en-US" sz="1150" dirty="0"/>
+            <a:endParaRPr lang="en-US" sz="1100" dirty="0"/>
           </a:p>
           <a:p>
             <a:pPr algn="ctr" indent="0" marL="0">
               <a:buNone/>
             </a:pPr>
             <a:r>
-              <a:rPr lang="en-US" sz="1150" b="1" dirty="0">
+              <a:rPr lang="en-US" sz="1100" b="1" dirty="0">
                 <a:solidFill>
                   <a:srgbClr val="06B6D4"/>
                 </a:solidFill>
@@ -5400,7 +5373,7 @@
               </a:rPr>
               <a:t>Database</a:t>
             </a:r>
-            <a:endParaRPr lang="en-US" sz="1150" dirty="0"/>
+            <a:endParaRPr lang="en-US" sz="1100" dirty="0"/>
           </a:p>
         </p:txBody>
       </p:sp>
@@ -5412,8 +5385,8 @@
         </p:nvSpPr>
         <p:spPr>
           <a:xfrm>
-            <a:off x="4041648" y="1828800"/>
-            <a:ext cx="1536192" cy="566928"/>
+            <a:off x="3703320" y="1810512"/>
+            <a:ext cx="1426464" cy="512064"/>
           </a:xfrm>
           <a:prstGeom prst="rect">
             <a:avLst/>
@@ -5468,8 +5441,8 @@
         </p:nvSpPr>
         <p:spPr>
           <a:xfrm>
-            <a:off x="5614416" y="1760220"/>
-            <a:ext cx="274320" cy="0"/>
+            <a:off x="5166360" y="1709928"/>
+            <a:ext cx="201168" cy="0"/>
           </a:xfrm>
           <a:prstGeom prst="line">
             <a:avLst/>
@@ -5491,8 +5464,8 @@
         </p:nvSpPr>
         <p:spPr>
           <a:xfrm>
-            <a:off x="5760720" y="1577340"/>
-            <a:ext cx="182880" cy="365760"/>
+            <a:off x="5221224" y="1508760"/>
+            <a:ext cx="201168" cy="402336"/>
           </a:xfrm>
           <a:prstGeom prst="rect">
             <a:avLst/>
@@ -5527,8 +5500,8 @@
         </p:nvSpPr>
         <p:spPr>
           <a:xfrm>
-            <a:off x="5925312" y="1051560"/>
-            <a:ext cx="1536192" cy="1417320"/>
+            <a:off x="5404104" y="1024128"/>
+            <a:ext cx="1426464" cy="1371600"/>
           </a:xfrm>
           <a:prstGeom prst="rect">
             <a:avLst/>
@@ -5559,8 +5532,8 @@
         </p:nvSpPr>
         <p:spPr>
           <a:xfrm>
-            <a:off x="5925312" y="1051560"/>
-            <a:ext cx="1536192" cy="64008"/>
+            <a:off x="5404104" y="1024128"/>
+            <a:ext cx="1426464" cy="64008"/>
           </a:xfrm>
           <a:prstGeom prst="rect">
             <a:avLst/>
@@ -5584,8 +5557,8 @@
         </p:nvSpPr>
         <p:spPr>
           <a:xfrm>
-            <a:off x="5925312" y="1161288"/>
-            <a:ext cx="1536192" cy="640080"/>
+            <a:off x="5404104" y="1133856"/>
+            <a:ext cx="1426464" cy="640080"/>
           </a:xfrm>
           <a:prstGeom prst="rect">
             <a:avLst/>
@@ -5601,7 +5574,7 @@
               <a:buNone/>
             </a:pPr>
             <a:r>
-              <a:rPr lang="en-US" sz="1150" b="1" dirty="0">
+              <a:rPr lang="en-US" sz="1100" b="1" dirty="0">
                 <a:solidFill>
                   <a:srgbClr val="A855F7"/>
                 </a:solidFill>
@@ -5611,14 +5584,14 @@
               </a:rPr>
               <a:t>Prajna</a:t>
             </a:r>
-            <a:endParaRPr lang="en-US" sz="1150" dirty="0"/>
+            <a:endParaRPr lang="en-US" sz="1100" dirty="0"/>
           </a:p>
           <a:p>
             <a:pPr algn="ctr" indent="0" marL="0">
               <a:buNone/>
             </a:pPr>
             <a:r>
-              <a:rPr lang="en-US" sz="1150" b="1" dirty="0">
+              <a:rPr lang="en-US" sz="1100" b="1" dirty="0">
                 <a:solidFill>
                   <a:srgbClr val="A855F7"/>
                 </a:solidFill>
@@ -5628,7 +5601,7 @@
               </a:rPr>
               <a:t>Intelligence</a:t>
             </a:r>
-            <a:endParaRPr lang="en-US" sz="1150" dirty="0"/>
+            <a:endParaRPr lang="en-US" sz="1100" dirty="0"/>
           </a:p>
         </p:txBody>
       </p:sp>
@@ -5640,8 +5613,8 @@
         </p:nvSpPr>
         <p:spPr>
           <a:xfrm>
-            <a:off x="5925312" y="1828800"/>
-            <a:ext cx="1536192" cy="566928"/>
+            <a:off x="5404104" y="1810512"/>
+            <a:ext cx="1426464" cy="512064"/>
           </a:xfrm>
           <a:prstGeom prst="rect">
             <a:avLst/>
@@ -5696,8 +5669,8 @@
         </p:nvSpPr>
         <p:spPr>
           <a:xfrm>
-            <a:off x="7498080" y="1760220"/>
-            <a:ext cx="274320" cy="0"/>
+            <a:off x="6867144" y="1709928"/>
+            <a:ext cx="201168" cy="0"/>
           </a:xfrm>
           <a:prstGeom prst="line">
             <a:avLst/>
@@ -5719,8 +5692,8 @@
         </p:nvSpPr>
         <p:spPr>
           <a:xfrm>
-            <a:off x="7644384" y="1577340"/>
-            <a:ext cx="182880" cy="365760"/>
+            <a:off x="6922008" y="1508760"/>
+            <a:ext cx="201168" cy="402336"/>
           </a:xfrm>
           <a:prstGeom prst="rect">
             <a:avLst/>
@@ -5755,8 +5728,8 @@
         </p:nvSpPr>
         <p:spPr>
           <a:xfrm>
-            <a:off x="7808976" y="1051560"/>
-            <a:ext cx="1536192" cy="1417320"/>
+            <a:off x="7104888" y="1024128"/>
+            <a:ext cx="1426464" cy="1371600"/>
           </a:xfrm>
           <a:prstGeom prst="rect">
             <a:avLst/>
@@ -5787,8 +5760,8 @@
         </p:nvSpPr>
         <p:spPr>
           <a:xfrm>
-            <a:off x="7808976" y="1051560"/>
-            <a:ext cx="1536192" cy="64008"/>
+            <a:off x="7104888" y="1024128"/>
+            <a:ext cx="1426464" cy="64008"/>
           </a:xfrm>
           <a:prstGeom prst="rect">
             <a:avLst/>
@@ -5812,8 +5785,8 @@
         </p:nvSpPr>
         <p:spPr>
           <a:xfrm>
-            <a:off x="7808976" y="1161288"/>
-            <a:ext cx="1536192" cy="640080"/>
+            <a:off x="7104888" y="1133856"/>
+            <a:ext cx="1426464" cy="640080"/>
           </a:xfrm>
           <a:prstGeom prst="rect">
             <a:avLst/>
@@ -5829,7 +5802,7 @@
               <a:buNone/>
             </a:pPr>
             <a:r>
-              <a:rPr lang="en-US" sz="1150" b="1" dirty="0">
+              <a:rPr lang="en-US" sz="1100" b="1" dirty="0">
                 <a:solidFill>
                   <a:srgbClr val="22C55E"/>
                 </a:solidFill>
@@ -5839,14 +5812,14 @@
               </a:rPr>
               <a:t>Dashboards</a:t>
             </a:r>
-            <a:endParaRPr lang="en-US" sz="1150" dirty="0"/>
+            <a:endParaRPr lang="en-US" sz="1100" dirty="0"/>
           </a:p>
           <a:p>
             <a:pPr algn="ctr" indent="0" marL="0">
               <a:buNone/>
             </a:pPr>
             <a:r>
-              <a:rPr lang="en-US" sz="1150" b="1" dirty="0">
+              <a:rPr lang="en-US" sz="1100" b="1" dirty="0">
                 <a:solidFill>
                   <a:srgbClr val="22C55E"/>
                 </a:solidFill>
@@ -5856,7 +5829,7 @@
               </a:rPr>
               <a:t>&amp; API</a:t>
             </a:r>
-            <a:endParaRPr lang="en-US" sz="1150" dirty="0"/>
+            <a:endParaRPr lang="en-US" sz="1100" dirty="0"/>
           </a:p>
         </p:txBody>
       </p:sp>
@@ -5868,8 +5841,8 @@
         </p:nvSpPr>
         <p:spPr>
           <a:xfrm>
-            <a:off x="7808976" y="1828800"/>
-            <a:ext cx="1536192" cy="566928"/>
+            <a:off x="7104888" y="1810512"/>
+            <a:ext cx="1426464" cy="512064"/>
           </a:xfrm>
           <a:prstGeom prst="rect">
             <a:avLst/>
@@ -5897,23 +5870,6 @@
             </a:r>
             <a:endParaRPr lang="en-US" sz="900" dirty="0"/>
           </a:p>
-          <a:p>
-            <a:pPr algn="ctr" indent="0" marL="0">
-              <a:buNone/>
-            </a:pPr>
-            <a:r>
-              <a:rPr lang="en-US" sz="900" dirty="0">
-                <a:solidFill>
-                  <a:srgbClr val="94A3B8"/>
-                </a:solidFill>
-                <a:latin typeface="Calibri" pitchFamily="34" charset="0"/>
-                <a:ea typeface="Calibri" pitchFamily="34" charset="-122"/>
-                <a:cs typeface="Calibri" pitchFamily="34" charset="-120"/>
-              </a:rPr>
-              <a:t>Copilot</a:t>
-            </a:r>
-            <a:endParaRPr lang="en-US" sz="900" dirty="0"/>
-          </a:p>
         </p:txBody>
       </p:sp>
       <p:sp>
@@ -5924,8 +5880,8 @@
         </p:nvSpPr>
         <p:spPr>
           <a:xfrm>
-            <a:off x="320040" y="2788920"/>
-            <a:ext cx="2029968" cy="2103120"/>
+            <a:off x="301752" y="2816352"/>
+            <a:ext cx="2029968" cy="1938528"/>
           </a:xfrm>
           <a:prstGeom prst="rect">
             <a:avLst/>
@@ -5956,8 +5912,8 @@
         </p:nvSpPr>
         <p:spPr>
           <a:xfrm>
-            <a:off x="320040" y="2788920"/>
-            <a:ext cx="54864" cy="2103120"/>
+            <a:off x="301752" y="2816352"/>
+            <a:ext cx="54864" cy="1938528"/>
           </a:xfrm>
           <a:prstGeom prst="rect">
             <a:avLst/>
@@ -5981,7 +5937,7 @@
         </p:nvSpPr>
         <p:spPr>
           <a:xfrm>
-            <a:off x="448056" y="2862072"/>
+            <a:off x="429768" y="2889504"/>
             <a:ext cx="1828800" cy="320040"/>
           </a:xfrm>
           <a:prstGeom prst="rect">
@@ -6020,8 +5976,8 @@
         </p:nvSpPr>
         <p:spPr>
           <a:xfrm>
-            <a:off x="448056" y="3218688"/>
-            <a:ext cx="1828800" cy="1554480"/>
+            <a:off x="429768" y="3246120"/>
+            <a:ext cx="1828800" cy="1417320"/>
           </a:xfrm>
           <a:prstGeom prst="rect">
             <a:avLst/>
@@ -6045,7 +6001,7 @@
                 <a:ea typeface="Calibri" pitchFamily="34" charset="-122"/>
                 <a:cs typeface="Calibri" pitchFamily="34" charset="-120"/>
               </a:rPr>
-              <a:t>Claude extracts questions once. All analysis runs fully offline thereafter — no recurring API costs.</a:t>
+              <a:t>Claude extracts questions once. All analysis runs fully offline — no recurring API costs.</a:t>
             </a:r>
             <a:endParaRPr lang="en-US" sz="1100" dirty="0"/>
           </a:p>
@@ -6059,8 +6015,8 @@
         </p:nvSpPr>
         <p:spPr>
           <a:xfrm>
-            <a:off x="2468880" y="2788920"/>
-            <a:ext cx="2029968" cy="2103120"/>
+            <a:off x="2450592" y="2816352"/>
+            <a:ext cx="2029968" cy="1938528"/>
           </a:xfrm>
           <a:prstGeom prst="rect">
             <a:avLst/>
@@ -6091,8 +6047,8 @@
         </p:nvSpPr>
         <p:spPr>
           <a:xfrm>
-            <a:off x="2468880" y="2788920"/>
-            <a:ext cx="54864" cy="2103120"/>
+            <a:off x="2450592" y="2816352"/>
+            <a:ext cx="54864" cy="1938528"/>
           </a:xfrm>
           <a:prstGeom prst="rect">
             <a:avLst/>
@@ -6116,7 +6072,7 @@
         </p:nvSpPr>
         <p:spPr>
           <a:xfrm>
-            <a:off x="2596896" y="2862072"/>
+            <a:off x="2578608" y="2889504"/>
             <a:ext cx="1828800" cy="320040"/>
           </a:xfrm>
           <a:prstGeom prst="rect">
@@ -6155,8 +6111,8 @@
         </p:nvSpPr>
         <p:spPr>
           <a:xfrm>
-            <a:off x="2596896" y="3218688"/>
-            <a:ext cx="1828800" cy="1554480"/>
+            <a:off x="2578608" y="3246120"/>
+            <a:ext cx="1828800" cy="1417320"/>
           </a:xfrm>
           <a:prstGeom prst="rect">
             <a:avLst/>
@@ -6194,8 +6150,8 @@
         </p:nvSpPr>
         <p:spPr>
           <a:xfrm>
-            <a:off x="4617720" y="2788920"/>
-            <a:ext cx="2029968" cy="2103120"/>
+            <a:off x="4599432" y="2816352"/>
+            <a:ext cx="2029968" cy="1938528"/>
           </a:xfrm>
           <a:prstGeom prst="rect">
             <a:avLst/>
@@ -6226,8 +6182,8 @@
         </p:nvSpPr>
         <p:spPr>
           <a:xfrm>
-            <a:off x="4617720" y="2788920"/>
-            <a:ext cx="54864" cy="2103120"/>
+            <a:off x="4599432" y="2816352"/>
+            <a:ext cx="54864" cy="1938528"/>
           </a:xfrm>
           <a:prstGeom prst="rect">
             <a:avLst/>
@@ -6251,7 +6207,7 @@
         </p:nvSpPr>
         <p:spPr>
           <a:xfrm>
-            <a:off x="4745736" y="2862072"/>
+            <a:off x="4727448" y="2889504"/>
             <a:ext cx="1828800" cy="320040"/>
           </a:xfrm>
           <a:prstGeom prst="rect">
@@ -6290,8 +6246,8 @@
         </p:nvSpPr>
         <p:spPr>
           <a:xfrm>
-            <a:off x="4745736" y="3218688"/>
-            <a:ext cx="1828800" cy="1554480"/>
+            <a:off x="4727448" y="3246120"/>
+            <a:ext cx="1828800" cy="1417320"/>
           </a:xfrm>
           <a:prstGeom prst="rect">
             <a:avLst/>
@@ -6329,8 +6285,8 @@
         </p:nvSpPr>
         <p:spPr>
           <a:xfrm>
-            <a:off x="6766560" y="2788920"/>
-            <a:ext cx="2029968" cy="2103120"/>
+            <a:off x="6748272" y="2816352"/>
+            <a:ext cx="2029968" cy="1938528"/>
           </a:xfrm>
           <a:prstGeom prst="rect">
             <a:avLst/>
@@ -6361,8 +6317,8 @@
         </p:nvSpPr>
         <p:spPr>
           <a:xfrm>
-            <a:off x="6766560" y="2788920"/>
-            <a:ext cx="54864" cy="2103120"/>
+            <a:off x="6748272" y="2816352"/>
+            <a:ext cx="54864" cy="1938528"/>
           </a:xfrm>
           <a:prstGeom prst="rect">
             <a:avLst/>
@@ -6386,7 +6342,7 @@
         </p:nvSpPr>
         <p:spPr>
           <a:xfrm>
-            <a:off x="6894576" y="2862072"/>
+            <a:off x="6876288" y="2889504"/>
             <a:ext cx="1828800" cy="320040"/>
           </a:xfrm>
           <a:prstGeom prst="rect">
@@ -6425,8 +6381,8 @@
         </p:nvSpPr>
         <p:spPr>
           <a:xfrm>
-            <a:off x="6894576" y="3218688"/>
-            <a:ext cx="1828800" cy="1554480"/>
+            <a:off x="6876288" y="3246120"/>
+            <a:ext cx="1828800" cy="1417320"/>
           </a:xfrm>
           <a:prstGeom prst="rect">
             <a:avLst/>
@@ -6535,8 +6491,8 @@
         </p:nvSpPr>
         <p:spPr>
           <a:xfrm>
-            <a:off x="365760" y="868680"/>
-            <a:ext cx="2670048" cy="1920240"/>
+            <a:off x="384048" y="877824"/>
+            <a:ext cx="2651760" cy="1920240"/>
           </a:xfrm>
           <a:prstGeom prst="rect">
             <a:avLst/>
@@ -6567,8 +6523,8 @@
         </p:nvSpPr>
         <p:spPr>
           <a:xfrm>
-            <a:off x="365760" y="868680"/>
-            <a:ext cx="2670048" cy="64008"/>
+            <a:off x="384048" y="877824"/>
+            <a:ext cx="2651760" cy="64008"/>
           </a:xfrm>
           <a:prstGeom prst="rect">
             <a:avLst/>
@@ -6592,7 +6548,7 @@
         </p:nvSpPr>
         <p:spPr>
           <a:xfrm>
-            <a:off x="493776" y="987552"/>
+            <a:off x="512064" y="987552"/>
             <a:ext cx="2423160" cy="365760"/>
           </a:xfrm>
           <a:prstGeom prst="rect">
@@ -6631,7 +6587,7 @@
         </p:nvSpPr>
         <p:spPr>
           <a:xfrm>
-            <a:off x="493776" y="1371600"/>
+            <a:off x="512064" y="1371600"/>
             <a:ext cx="2423160" cy="256032"/>
           </a:xfrm>
           <a:prstGeom prst="rect">
@@ -6656,7 +6612,7 @@
                 <a:ea typeface="Calibri" pitchFamily="34" charset="-122"/>
                 <a:cs typeface="Calibri" pitchFamily="34" charset="-120"/>
               </a:rPr>
-              <a:t>1988 – 2025 · 37 years</a:t>
+              <a:t>1988–2025 · 37 years</a:t>
             </a:r>
             <a:endParaRPr lang="en-US" sz="1000" dirty="0"/>
           </a:p>
@@ -6670,7 +6626,7 @@
         </p:nvSpPr>
         <p:spPr>
           <a:xfrm>
-            <a:off x="493776" y="1627632"/>
+            <a:off x="512064" y="1627632"/>
             <a:ext cx="2423160" cy="457200"/>
           </a:xfrm>
           <a:prstGeom prst="rect">
@@ -6709,8 +6665,8 @@
         </p:nvSpPr>
         <p:spPr>
           <a:xfrm>
-            <a:off x="493776" y="2103120"/>
-            <a:ext cx="2423160" cy="566928"/>
+            <a:off x="512064" y="2103120"/>
+            <a:ext cx="2423160" cy="594360"/>
           </a:xfrm>
           <a:prstGeom prst="rect">
             <a:avLst/>
@@ -6748,8 +6704,8 @@
         </p:nvSpPr>
         <p:spPr>
           <a:xfrm>
-            <a:off x="3200400" y="868680"/>
-            <a:ext cx="2670048" cy="1920240"/>
+            <a:off x="3200400" y="877824"/>
+            <a:ext cx="2651760" cy="1920240"/>
           </a:xfrm>
           <a:prstGeom prst="rect">
             <a:avLst/>
@@ -6780,8 +6736,8 @@
         </p:nvSpPr>
         <p:spPr>
           <a:xfrm>
-            <a:off x="3200400" y="868680"/>
-            <a:ext cx="2670048" cy="64008"/>
+            <a:off x="3200400" y="877824"/>
+            <a:ext cx="2651760" cy="64008"/>
           </a:xfrm>
           <a:prstGeom prst="rect">
             <a:avLst/>
@@ -6869,7 +6825,7 @@
                 <a:ea typeface="Calibri" pitchFamily="34" charset="-122"/>
                 <a:cs typeface="Calibri" pitchFamily="34" charset="-120"/>
               </a:rPr>
-              <a:t>2002 – 2025 · 23 years</a:t>
+              <a:t>2002–2025 · 23 years</a:t>
             </a:r>
             <a:endParaRPr lang="en-US" sz="1000" dirty="0"/>
           </a:p>
@@ -6923,7 +6879,7 @@
         <p:spPr>
           <a:xfrm>
             <a:off x="3328416" y="2103120"/>
-            <a:ext cx="2423160" cy="566928"/>
+            <a:ext cx="2423160" cy="594360"/>
           </a:xfrm>
           <a:prstGeom prst="rect">
             <a:avLst/>
@@ -6961,8 +6917,8 @@
         </p:nvSpPr>
         <p:spPr>
           <a:xfrm>
-            <a:off x="6035040" y="868680"/>
-            <a:ext cx="2670048" cy="1920240"/>
+            <a:off x="6016752" y="877824"/>
+            <a:ext cx="2651760" cy="1920240"/>
           </a:xfrm>
           <a:prstGeom prst="rect">
             <a:avLst/>
@@ -6993,8 +6949,8 @@
         </p:nvSpPr>
         <p:spPr>
           <a:xfrm>
-            <a:off x="6035040" y="868680"/>
-            <a:ext cx="2670048" cy="64008"/>
+            <a:off x="6016752" y="877824"/>
+            <a:ext cx="2651760" cy="64008"/>
           </a:xfrm>
           <a:prstGeom prst="rect">
             <a:avLst/>
@@ -7018,7 +6974,7 @@
         </p:nvSpPr>
         <p:spPr>
           <a:xfrm>
-            <a:off x="6163056" y="987552"/>
+            <a:off x="6144768" y="987552"/>
             <a:ext cx="2423160" cy="365760"/>
           </a:xfrm>
           <a:prstGeom prst="rect">
@@ -7057,7 +7013,7 @@
         </p:nvSpPr>
         <p:spPr>
           <a:xfrm>
-            <a:off x="6163056" y="1371600"/>
+            <a:off x="6144768" y="1371600"/>
             <a:ext cx="2423160" cy="256032"/>
           </a:xfrm>
           <a:prstGeom prst="rect">
@@ -7082,7 +7038,7 @@
                 <a:ea typeface="Calibri" pitchFamily="34" charset="-122"/>
                 <a:cs typeface="Calibri" pitchFamily="34" charset="-120"/>
               </a:rPr>
-              <a:t>1985 – 2025 · 40 years</a:t>
+              <a:t>1985–2025 · 40 years</a:t>
             </a:r>
             <a:endParaRPr lang="en-US" sz="1000" dirty="0"/>
           </a:p>
@@ -7096,7 +7052,7 @@
         </p:nvSpPr>
         <p:spPr>
           <a:xfrm>
-            <a:off x="6163056" y="1627632"/>
+            <a:off x="6144768" y="1627632"/>
             <a:ext cx="2423160" cy="457200"/>
           </a:xfrm>
           <a:prstGeom prst="rect">
@@ -7135,8 +7091,8 @@
         </p:nvSpPr>
         <p:spPr>
           <a:xfrm>
-            <a:off x="6163056" y="2103120"/>
-            <a:ext cx="2423160" cy="566928"/>
+            <a:off x="6144768" y="2103120"/>
+            <a:ext cx="2423160" cy="594360"/>
           </a:xfrm>
           <a:prstGeom prst="rect">
             <a:avLst/>
@@ -7174,8 +7130,8 @@
         </p:nvSpPr>
         <p:spPr>
           <a:xfrm>
-            <a:off x="365760" y="2971800"/>
-            <a:ext cx="4160520" cy="1920240"/>
+            <a:off x="384048" y="2944368"/>
+            <a:ext cx="4160520" cy="1783080"/>
           </a:xfrm>
           <a:prstGeom prst="rect">
             <a:avLst/>
@@ -7206,7 +7162,7 @@
         </p:nvSpPr>
         <p:spPr>
           <a:xfrm>
-            <a:off x="502920" y="3044952"/>
+            <a:off x="521208" y="3017520"/>
             <a:ext cx="3886200" cy="256032"/>
           </a:xfrm>
           <a:prstGeom prst="rect">
@@ -7245,8 +7201,8 @@
         </p:nvSpPr>
         <p:spPr>
           <a:xfrm>
-            <a:off x="502920" y="3337560"/>
-            <a:ext cx="3886200" cy="1463040"/>
+            <a:off x="521208" y="3310128"/>
+            <a:ext cx="3886200" cy="1325880"/>
           </a:xfrm>
           <a:prstGeom prst="rect">
             <a:avLst/>
@@ -7338,27 +7294,10 @@
                 <a:ea typeface="Consolas" pitchFamily="34" charset="-122"/>
                 <a:cs typeface="Consolas" pitchFamily="34" charset="-120"/>
               </a:rPr>
-              <a:t>  "difficulty": 3,  "marks": 4,</a:t>
+              <a:t>  "difficulty": 3,  "marks": 4 }</a:t>
             </a:r>
             <a:endParaRPr lang="en-US" sz="950" dirty="0"/>
           </a:p>
-          <a:p>
-            <a:pPr algn="l" indent="0" marL="0">
-              <a:buNone/>
-            </a:pPr>
-            <a:r>
-              <a:rPr lang="en-US" sz="950" dirty="0">
-                <a:solidFill>
-                  <a:srgbClr val="22C55E"/>
-                </a:solidFill>
-                <a:latin typeface="Consolas" pitchFamily="34" charset="0"/>
-                <a:ea typeface="Consolas" pitchFamily="34" charset="-122"/>
-                <a:cs typeface="Consolas" pitchFamily="34" charset="-120"/>
-              </a:rPr>
-              <a:t>  "similar_to": ["NEET2021_Q14"] }</a:t>
-            </a:r>
-            <a:endParaRPr lang="en-US" sz="950" dirty="0"/>
-          </a:p>
         </p:txBody>
       </p:sp>
       <p:sp>
@@ -7369,8 +7308,8 @@
         </p:nvSpPr>
         <p:spPr>
           <a:xfrm>
-            <a:off x="4754880" y="2971800"/>
-            <a:ext cx="4069080" cy="411480"/>
+            <a:off x="4736592" y="2944368"/>
+            <a:ext cx="4023360" cy="365760"/>
           </a:xfrm>
           <a:prstGeom prst="rect">
             <a:avLst/>
@@ -7394,8 +7333,8 @@
         </p:nvSpPr>
         <p:spPr>
           <a:xfrm>
-            <a:off x="4754880" y="2971800"/>
-            <a:ext cx="54864" cy="411480"/>
+            <a:off x="4736592" y="2944368"/>
+            <a:ext cx="54864" cy="365760"/>
           </a:xfrm>
           <a:prstGeom prst="rect">
             <a:avLst/>
@@ -7419,8 +7358,8 @@
         </p:nvSpPr>
         <p:spPr>
           <a:xfrm>
-            <a:off x="4892040" y="2971800"/>
-            <a:ext cx="1371600" cy="411480"/>
+            <a:off x="4864608" y="2944368"/>
+            <a:ext cx="1371600" cy="365760"/>
           </a:xfrm>
           <a:prstGeom prst="rect">
             <a:avLst/>
@@ -7436,7 +7375,7 @@
               <a:buNone/>
             </a:pPr>
             <a:r>
-              <a:rPr lang="en-US" sz="1600" b="1" dirty="0">
+              <a:rPr lang="en-US" sz="1500" b="1" dirty="0">
                 <a:solidFill>
                   <a:srgbClr val="A855F7"/>
                 </a:solidFill>
@@ -7446,7 +7385,7 @@
               </a:rPr>
               <a:t>8,000+</a:t>
             </a:r>
-            <a:endParaRPr lang="en-US" sz="1600" dirty="0"/>
+            <a:endParaRPr lang="en-US" sz="1500" dirty="0"/>
           </a:p>
         </p:txBody>
       </p:sp>
@@ -7458,8 +7397,8 @@
         </p:nvSpPr>
         <p:spPr>
           <a:xfrm>
-            <a:off x="6263640" y="2971800"/>
-            <a:ext cx="2468880" cy="411480"/>
+            <a:off x="6236208" y="2944368"/>
+            <a:ext cx="2423160" cy="365760"/>
           </a:xfrm>
           <a:prstGeom prst="rect">
             <a:avLst/>
@@ -7475,7 +7414,7 @@
               <a:buNone/>
             </a:pPr>
             <a:r>
-              <a:rPr lang="en-US" sz="1100" dirty="0">
+              <a:rPr lang="en-US" sz="1050" dirty="0">
                 <a:solidFill>
                   <a:srgbClr val="94A3B8"/>
                 </a:solidFill>
@@ -7485,7 +7424,7 @@
               </a:rPr>
               <a:t>Total questions indexed</a:t>
             </a:r>
-            <a:endParaRPr lang="en-US" sz="1100" dirty="0"/>
+            <a:endParaRPr lang="en-US" sz="1050" dirty="0"/>
           </a:p>
         </p:txBody>
       </p:sp>
@@ -7497,8 +7436,8 @@
         </p:nvSpPr>
         <p:spPr>
           <a:xfrm>
-            <a:off x="4754880" y="3447288"/>
-            <a:ext cx="4069080" cy="411480"/>
+            <a:off x="4736592" y="3383280"/>
+            <a:ext cx="4023360" cy="365760"/>
           </a:xfrm>
           <a:prstGeom prst="rect">
             <a:avLst/>
@@ -7522,8 +7461,8 @@
         </p:nvSpPr>
         <p:spPr>
           <a:xfrm>
-            <a:off x="4754880" y="3447288"/>
-            <a:ext cx="54864" cy="411480"/>
+            <a:off x="4736592" y="3383280"/>
+            <a:ext cx="54864" cy="365760"/>
           </a:xfrm>
           <a:prstGeom prst="rect">
             <a:avLst/>
@@ -7547,8 +7486,8 @@
         </p:nvSpPr>
         <p:spPr>
           <a:xfrm>
-            <a:off x="4892040" y="3447288"/>
-            <a:ext cx="1371600" cy="411480"/>
+            <a:off x="4864608" y="3383280"/>
+            <a:ext cx="1371600" cy="365760"/>
           </a:xfrm>
           <a:prstGeom prst="rect">
             <a:avLst/>
@@ -7564,7 +7503,7 @@
               <a:buNone/>
             </a:pPr>
             <a:r>
-              <a:rPr lang="en-US" sz="1600" b="1" dirty="0">
+              <a:rPr lang="en-US" sz="1500" b="1" dirty="0">
                 <a:solidFill>
                   <a:srgbClr val="F59E0B"/>
                 </a:solidFill>
@@ -7574,7 +7513,7 @@
               </a:rPr>
               <a:t>4 signals</a:t>
             </a:r>
-            <a:endParaRPr lang="en-US" sz="1600" dirty="0"/>
+            <a:endParaRPr lang="en-US" sz="1500" dirty="0"/>
           </a:p>
         </p:txBody>
       </p:sp>
@@ -7586,8 +7525,8 @@
         </p:nvSpPr>
         <p:spPr>
           <a:xfrm>
-            <a:off x="6263640" y="3447288"/>
-            <a:ext cx="2468880" cy="411480"/>
+            <a:off x="6236208" y="3383280"/>
+            <a:ext cx="2423160" cy="365760"/>
           </a:xfrm>
           <a:prstGeom prst="rect">
             <a:avLst/>
@@ -7603,7 +7542,7 @@
               <a:buNone/>
             </a:pPr>
             <a:r>
-              <a:rPr lang="en-US" sz="1100" dirty="0">
+              <a:rPr lang="en-US" sz="1050" dirty="0">
                 <a:solidFill>
                   <a:srgbClr val="94A3B8"/>
                 </a:solidFill>
@@ -7613,7 +7552,7 @@
               </a:rPr>
               <a:t>Per question for ML difficulty model</a:t>
             </a:r>
-            <a:endParaRPr lang="en-US" sz="1100" dirty="0"/>
+            <a:endParaRPr lang="en-US" sz="1050" dirty="0"/>
           </a:p>
         </p:txBody>
       </p:sp>
@@ -7625,8 +7564,8 @@
         </p:nvSpPr>
         <p:spPr>
           <a:xfrm>
-            <a:off x="4754880" y="3922776"/>
-            <a:ext cx="4069080" cy="411480"/>
+            <a:off x="4736592" y="3822192"/>
+            <a:ext cx="4023360" cy="365760"/>
           </a:xfrm>
           <a:prstGeom prst="rect">
             <a:avLst/>
@@ -7650,8 +7589,8 @@
         </p:nvSpPr>
         <p:spPr>
           <a:xfrm>
-            <a:off x="4754880" y="3922776"/>
-            <a:ext cx="54864" cy="411480"/>
+            <a:off x="4736592" y="3822192"/>
+            <a:ext cx="54864" cy="365760"/>
           </a:xfrm>
           <a:prstGeom prst="rect">
             <a:avLst/>
@@ -7675,8 +7614,8 @@
         </p:nvSpPr>
         <p:spPr>
           <a:xfrm>
-            <a:off x="4892040" y="3922776"/>
-            <a:ext cx="1371600" cy="411480"/>
+            <a:off x="4864608" y="3822192"/>
+            <a:ext cx="1371600" cy="365760"/>
           </a:xfrm>
           <a:prstGeom prst="rect">
             <a:avLst/>
@@ -7692,7 +7631,7 @@
               <a:buNone/>
             </a:pPr>
             <a:r>
-              <a:rPr lang="en-US" sz="1600" b="1" dirty="0">
+              <a:rPr lang="en-US" sz="1500" b="1" dirty="0">
                 <a:solidFill>
                   <a:srgbClr val="22C55E"/>
                 </a:solidFill>
@@ -7702,7 +7641,7 @@
               </a:rPr>
               <a:t>100% offline</a:t>
             </a:r>
-            <a:endParaRPr lang="en-US" sz="1600" dirty="0"/>
+            <a:endParaRPr lang="en-US" sz="1500" dirty="0"/>
           </a:p>
         </p:txBody>
       </p:sp>
@@ -7714,8 +7653,8 @@
         </p:nvSpPr>
         <p:spPr>
           <a:xfrm>
-            <a:off x="6263640" y="3922776"/>
-            <a:ext cx="2468880" cy="411480"/>
+            <a:off x="6236208" y="3822192"/>
+            <a:ext cx="2423160" cy="365760"/>
           </a:xfrm>
           <a:prstGeom prst="rect">
             <a:avLst/>
@@ -7731,7 +7670,7 @@
               <a:buNone/>
             </a:pPr>
             <a:r>
-              <a:rPr lang="en-US" sz="1100" dirty="0">
+              <a:rPr lang="en-US" sz="1050" dirty="0">
                 <a:solidFill>
                   <a:srgbClr val="94A3B8"/>
                 </a:solidFill>
@@ -7741,7 +7680,7 @@
               </a:rPr>
               <a:t>After one-time Claude extraction</a:t>
             </a:r>
-            <a:endParaRPr lang="en-US" sz="1100" dirty="0"/>
+            <a:endParaRPr lang="en-US" sz="1050" dirty="0"/>
           </a:p>
         </p:txBody>
       </p:sp>
@@ -7753,8 +7692,8 @@
         </p:nvSpPr>
         <p:spPr>
           <a:xfrm>
-            <a:off x="4754880" y="4398264"/>
-            <a:ext cx="4069080" cy="411480"/>
+            <a:off x="4736592" y="4261104"/>
+            <a:ext cx="4023360" cy="365760"/>
           </a:xfrm>
           <a:prstGeom prst="rect">
             <a:avLst/>
@@ -7778,8 +7717,8 @@
         </p:nvSpPr>
         <p:spPr>
           <a:xfrm>
-            <a:off x="4754880" y="4398264"/>
-            <a:ext cx="54864" cy="411480"/>
+            <a:off x="4736592" y="4261104"/>
+            <a:ext cx="54864" cy="365760"/>
           </a:xfrm>
           <a:prstGeom prst="rect">
             <a:avLst/>
@@ -7803,8 +7742,8 @@
         </p:nvSpPr>
         <p:spPr>
           <a:xfrm>
-            <a:off x="4892040" y="4398264"/>
-            <a:ext cx="1371600" cy="411480"/>
+            <a:off x="4864608" y="4261104"/>
+            <a:ext cx="1371600" cy="365760"/>
           </a:xfrm>
           <a:prstGeom prst="rect">
             <a:avLst/>
@@ -7820,7 +7759,7 @@
               <a:buNone/>
             </a:pPr>
             <a:r>
-              <a:rPr lang="en-US" sz="1600" b="1" dirty="0">
+              <a:rPr lang="en-US" sz="1500" b="1" dirty="0">
                 <a:solidFill>
                   <a:srgbClr val="06B6D4"/>
                 </a:solidFill>
@@ -7830,7 +7769,7 @@
               </a:rPr>
               <a:t>3 tables</a:t>
             </a:r>
-            <a:endParaRPr lang="en-US" sz="1600" dirty="0"/>
+            <a:endParaRPr lang="en-US" sz="1500" dirty="0"/>
           </a:p>
         </p:txBody>
       </p:sp>
@@ -7842,8 +7781,8 @@
         </p:nvSpPr>
         <p:spPr>
           <a:xfrm>
-            <a:off x="6263640" y="4398264"/>
-            <a:ext cx="2468880" cy="411480"/>
+            <a:off x="6236208" y="4261104"/>
+            <a:ext cx="2423160" cy="365760"/>
           </a:xfrm>
           <a:prstGeom prst="rect">
             <a:avLst/>
@@ -7859,7 +7798,7 @@
               <a:buNone/>
             </a:pPr>
             <a:r>
-              <a:rPr lang="en-US" sz="1100" dirty="0">
+              <a:rPr lang="en-US" sz="1050" dirty="0">
                 <a:solidFill>
                   <a:srgbClr val="94A3B8"/>
                 </a:solidFill>
@@ -7869,7 +7808,7 @@
               </a:rPr>
               <a:t>questions · topics · patterns (SQLite)</a:t>
             </a:r>
-            <a:endParaRPr lang="en-US" sz="1100" dirty="0"/>
+            <a:endParaRPr lang="en-US" sz="1050" dirty="0"/>
           </a:p>
         </p:txBody>
       </p:sp>
@@ -7984,8 +7923,8 @@
         </p:nvSpPr>
         <p:spPr>
           <a:xfrm>
-            <a:off x="548640" y="905256"/>
-            <a:ext cx="8092440" cy="850392"/>
+            <a:off x="566928" y="905256"/>
+            <a:ext cx="8065008" cy="850392"/>
           </a:xfrm>
           <a:prstGeom prst="rect">
             <a:avLst/>
@@ -7997,129 +7936,39 @@
           <a:bodyPr wrap="square" rtlCol="0" anchor="ctr"/>
           <a:lstStyle/>
           <a:p>
-            <a:pPr indent="0" marL="0">
+            <a:pPr algn="l" indent="0" marL="0">
               <a:buNone/>
             </a:pPr>
             <a:r>
               <a:rPr lang="en-US" sz="1300" dirty="0">
                 <a:solidFill>
-                  <a:srgbClr val="94A3B8"/>
+                  <a:srgbClr val="E2E8F0"/>
                 </a:solidFill>
                 <a:latin typeface="Consolas" pitchFamily="34" charset="0"/>
                 <a:ea typeface="Consolas" pitchFamily="34" charset="-122"/>
                 <a:cs typeface="Consolas" pitchFamily="34" charset="-120"/>
               </a:rPr>
-              <a:t>prediction_score  =  </a:t>
-            </a:r>
-            <a:pPr indent="0" marL="0">
+              <a:t>score  =  (w_trend × freq)  +  (w_cycle × cycle_match)</a:t>
+            </a:r>
+            <a:endParaRPr lang="en-US" sz="1300" dirty="0"/>
+          </a:p>
+          <a:p>
+            <a:pPr algn="l" indent="0" marL="0">
               <a:buNone/>
             </a:pPr>
             <a:r>
               <a:rPr lang="en-US" sz="1300" dirty="0">
                 <a:solidFill>
-                  <a:srgbClr val="06B6D4"/>
+                  <a:srgbClr val="E2E8F0"/>
                 </a:solidFill>
                 <a:latin typeface="Consolas" pitchFamily="34" charset="0"/>
                 <a:ea typeface="Consolas" pitchFamily="34" charset="-122"/>
                 <a:cs typeface="Consolas" pitchFamily="34" charset="-120"/>
               </a:rPr>
-              <a:t>(trend_weight × frequency_trend)</a:t>
-            </a:r>
-            <a:pPr indent="0" marL="0">
-              <a:buNone/>
-            </a:pPr>
-            <a:r>
-              <a:rPr lang="en-US" sz="1300" dirty="0">
-                <a:solidFill>
-                  <a:srgbClr val="94A3B8"/>
-                </a:solidFill>
-                <a:latin typeface="Consolas" pitchFamily="34" charset="0"/>
-                <a:ea typeface="Consolas" pitchFamily="34" charset="-122"/>
-                <a:cs typeface="Consolas" pitchFamily="34" charset="-120"/>
-              </a:rPr>
-              <a:t>  +  </a:t>
-            </a:r>
-            <a:pPr indent="0" marL="0">
-              <a:buNone/>
-            </a:pPr>
-            <a:r>
-              <a:rPr lang="en-US" sz="1300" dirty="0">
-                <a:solidFill>
-                  <a:srgbClr val="A855F7"/>
-                </a:solidFill>
-                <a:latin typeface="Consolas" pitchFamily="34" charset="0"/>
-                <a:ea typeface="Consolas" pitchFamily="34" charset="-122"/>
-                <a:cs typeface="Consolas" pitchFamily="34" charset="-120"/>
-              </a:rPr>
-              <a:t>(cycle_weight × cycle_match)</a:t>
-            </a:r>
-            <a:pPr indent="0" marL="0">
-              <a:buNone/>
-            </a:pPr>
+              <a:t>       +  (w_gap × years_since_last)  +  (w_cross × other_exam)</a:t>
+            </a:r>
             <a:endParaRPr lang="en-US" sz="1300" dirty="0"/>
           </a:p>
-          <a:p>
-            <a:pPr indent="0" marL="0">
-              <a:buNone/>
-            </a:pPr>
-            <a:r>
-              <a:rPr lang="en-US" sz="1300" dirty="0">
-                <a:solidFill>
-                  <a:srgbClr val="94A3B8"/>
-                </a:solidFill>
-                <a:latin typeface="Consolas" pitchFamily="34" charset="0"/>
-                <a:ea typeface="Consolas" pitchFamily="34" charset="-122"/>
-                <a:cs typeface="Consolas" pitchFamily="34" charset="-120"/>
-              </a:rPr>
-              <a:t>                                 +  </a:t>
-            </a:r>
-            <a:endParaRPr lang="en-US" sz="1300" dirty="0"/>
-          </a:p>
-          <a:p>
-            <a:pPr indent="0" marL="0">
-              <a:buNone/>
-            </a:pPr>
-            <a:r>
-              <a:rPr lang="en-US" sz="1300" dirty="0">
-                <a:solidFill>
-                  <a:srgbClr val="F59E0B"/>
-                </a:solidFill>
-                <a:latin typeface="Consolas" pitchFamily="34" charset="0"/>
-                <a:ea typeface="Consolas" pitchFamily="34" charset="-122"/>
-                <a:cs typeface="Consolas" pitchFamily="34" charset="-120"/>
-              </a:rPr>
-              <a:t>(gap_weight × years_since_last)</a:t>
-            </a:r>
-            <a:pPr indent="0" marL="0">
-              <a:buNone/>
-            </a:pPr>
-            <a:r>
-              <a:rPr lang="en-US" sz="1300" dirty="0">
-                <a:solidFill>
-                  <a:srgbClr val="94A3B8"/>
-                </a:solidFill>
-                <a:latin typeface="Consolas" pitchFamily="34" charset="0"/>
-                <a:ea typeface="Consolas" pitchFamily="34" charset="-122"/>
-                <a:cs typeface="Consolas" pitchFamily="34" charset="-120"/>
-              </a:rPr>
-              <a:t>  +  </a:t>
-            </a:r>
-            <a:pPr indent="0" marL="0">
-              <a:buNone/>
-            </a:pPr>
-            <a:r>
-              <a:rPr lang="en-US" sz="1300" dirty="0">
-                <a:solidFill>
-                  <a:srgbClr val="22C55E"/>
-                </a:solidFill>
-                <a:latin typeface="Consolas" pitchFamily="34" charset="0"/>
-                <a:ea typeface="Consolas" pitchFamily="34" charset="-122"/>
-                <a:cs typeface="Consolas" pitchFamily="34" charset="-120"/>
-              </a:rPr>
-              <a:t>(cross_exam_weight × other_exam)</a:t>
-            </a:r>
-            <a:endParaRPr lang="en-US" sz="1300" dirty="0"/>
-          </a:p>
         </p:txBody>
       </p:sp>
       <p:sp>
@@ -8131,7 +7980,7 @@
         <p:spPr>
           <a:xfrm>
             <a:off x="365760" y="1920240"/>
-            <a:ext cx="2011680" cy="1874520"/>
+            <a:ext cx="2011680" cy="1810512"/>
           </a:xfrm>
           <a:prstGeom prst="rect">
             <a:avLst/>
@@ -8227,7 +8076,7 @@
         <p:spPr>
           <a:xfrm>
             <a:off x="457200" y="2423160"/>
-            <a:ext cx="1847088" cy="1261872"/>
+            <a:ext cx="1847088" cy="1234440"/>
           </a:xfrm>
           <a:prstGeom prst="rect">
             <a:avLst/>
@@ -8251,7 +8100,7 @@
                 <a:ea typeface="Calibri" pitchFamily="34" charset="-122"/>
                 <a:cs typeface="Calibri" pitchFamily="34" charset="-120"/>
               </a:rPr>
-              <a:t>Topic frequency over time. Autocorrelation to detect repeating cycles. Hot/cold identification.</a:t>
+              <a:t>Topic frequency over time. Autocorrelation detects repeating cycles. Hot/cold identification.</a:t>
             </a:r>
             <a:endParaRPr lang="en-US" sz="1100" dirty="0"/>
           </a:p>
@@ -8266,7 +8115,7 @@
         <p:spPr>
           <a:xfrm>
             <a:off x="2505456" y="1920240"/>
-            <a:ext cx="2011680" cy="1874520"/>
+            <a:ext cx="2011680" cy="1810512"/>
           </a:xfrm>
           <a:prstGeom prst="rect">
             <a:avLst/>
@@ -8362,7 +8211,7 @@
         <p:spPr>
           <a:xfrm>
             <a:off x="2596896" y="2423160"/>
-            <a:ext cx="1847088" cy="1261872"/>
+            <a:ext cx="1847088" cy="1234440"/>
           </a:xfrm>
           <a:prstGeom prst="rect">
             <a:avLst/>
@@ -8386,7 +8235,7 @@
                 <a:ea typeface="Calibri" pitchFamily="34" charset="-122"/>
                 <a:cs typeface="Calibri" pitchFamily="34" charset="-120"/>
               </a:rPr>
-              <a:t>Topics that recur every 3–5 years flagged with high cycle weight. Time-series autocorrelation.</a:t>
+              <a:t>Topics recurring every 3–5 years flagged with high cycle weight via time-series analysis.</a:t>
             </a:r>
             <a:endParaRPr lang="en-US" sz="1100" dirty="0"/>
           </a:p>
@@ -8401,7 +8250,7 @@
         <p:spPr>
           <a:xfrm>
             <a:off x="4645152" y="1920240"/>
-            <a:ext cx="2011680" cy="1874520"/>
+            <a:ext cx="2011680" cy="1810512"/>
           </a:xfrm>
           <a:prstGeom prst="rect">
             <a:avLst/>
@@ -8497,7 +8346,7 @@
         <p:spPr>
           <a:xfrm>
             <a:off x="4736592" y="2423160"/>
-            <a:ext cx="1847088" cy="1261872"/>
+            <a:ext cx="1847088" cy="1234440"/>
           </a:xfrm>
           <a:prstGeom prst="rect">
             <a:avLst/>
@@ -8521,7 +8370,7 @@
                 <a:ea typeface="Calibri" pitchFamily="34" charset="-122"/>
                 <a:cs typeface="Calibri" pitchFamily="34" charset="-120"/>
               </a:rPr>
-              <a:t>Topics absent for many years gain weight. 'Due to appear' heuristic from historical absence.</a:t>
+              <a:t>Topics absent many years gain weight. 'Due to appear' heuristic from historical absence data.</a:t>
             </a:r>
             <a:endParaRPr lang="en-US" sz="1100" dirty="0"/>
           </a:p>
@@ -8536,7 +8385,7 @@
         <p:spPr>
           <a:xfrm>
             <a:off x="6784848" y="1920240"/>
-            <a:ext cx="2011680" cy="1874520"/>
+            <a:ext cx="2011680" cy="1810512"/>
           </a:xfrm>
           <a:prstGeom prst="rect">
             <a:avLst/>
@@ -8632,7 +8481,7 @@
         <p:spPr>
           <a:xfrm>
             <a:off x="6876288" y="2423160"/>
-            <a:ext cx="1847088" cy="1261872"/>
+            <a:ext cx="1847088" cy="1234440"/>
           </a:xfrm>
           <a:prstGeom prst="rect">
             <a:avLst/>
@@ -8670,8 +8519,8 @@
         </p:nvSpPr>
         <p:spPr>
           <a:xfrm>
-            <a:off x="365760" y="3977640"/>
-            <a:ext cx="4709160" cy="914400"/>
+            <a:off x="365760" y="3886200"/>
+            <a:ext cx="4407408" cy="987552"/>
           </a:xfrm>
           <a:prstGeom prst="rect">
             <a:avLst/>
@@ -8695,8 +8544,8 @@
         </p:nvSpPr>
         <p:spPr>
           <a:xfrm>
-            <a:off x="365760" y="3977640"/>
-            <a:ext cx="54864" cy="914400"/>
+            <a:off x="365760" y="3886200"/>
+            <a:ext cx="54864" cy="987552"/>
           </a:xfrm>
           <a:prstGeom prst="rect">
             <a:avLst/>
@@ -8720,8 +8569,8 @@
         </p:nvSpPr>
         <p:spPr>
           <a:xfrm>
-            <a:off x="512064" y="4050792"/>
-            <a:ext cx="4389120" cy="256032"/>
+            <a:off x="512064" y="3959352"/>
+            <a:ext cx="4206240" cy="256032"/>
           </a:xfrm>
           <a:prstGeom prst="rect">
             <a:avLst/>
@@ -8759,8 +8608,8 @@
         </p:nvSpPr>
         <p:spPr>
           <a:xfrm>
-            <a:off x="512064" y="4315968"/>
-            <a:ext cx="4389120" cy="475488"/>
+            <a:off x="512064" y="4224528"/>
+            <a:ext cx="4206240" cy="548640"/>
           </a:xfrm>
           <a:prstGeom prst="rect">
             <a:avLst/>
@@ -8776,7 +8625,7 @@
               <a:buNone/>
             </a:pPr>
             <a:r>
-              <a:rPr lang="en-US" sz="1250" dirty="0">
+              <a:rPr lang="en-US" sz="1200" dirty="0">
                 <a:solidFill>
                   <a:srgbClr val="A855F7"/>
                 </a:solidFill>
@@ -8786,7 +8635,7 @@
               </a:rPr>
               <a:t>priority  =  (100 − accuracy)  ×  (slm_importance ÷ 100)</a:t>
             </a:r>
-            <a:endParaRPr lang="en-US" sz="1250" dirty="0"/>
+            <a:endParaRPr lang="en-US" sz="1200" dirty="0"/>
           </a:p>
         </p:txBody>
       </p:sp>
@@ -8798,8 +8647,8 @@
         </p:nvSpPr>
         <p:spPr>
           <a:xfrm>
-            <a:off x="5257800" y="3977640"/>
-            <a:ext cx="896112" cy="914400"/>
+            <a:off x="5074920" y="3886200"/>
+            <a:ext cx="896112" cy="987552"/>
           </a:xfrm>
           <a:prstGeom prst="rect">
             <a:avLst/>
@@ -8823,8 +8672,8 @@
         </p:nvSpPr>
         <p:spPr>
           <a:xfrm>
-            <a:off x="5257800" y="3977640"/>
-            <a:ext cx="896112" cy="914400"/>
+            <a:off x="5074920" y="3886200"/>
+            <a:ext cx="896112" cy="987552"/>
           </a:xfrm>
           <a:prstGeom prst="rect">
             <a:avLst/>
@@ -8862,8 +8711,8 @@
         </p:nvSpPr>
         <p:spPr>
           <a:xfrm>
-            <a:off x="6227064" y="3977640"/>
-            <a:ext cx="896112" cy="914400"/>
+            <a:off x="6044184" y="3886200"/>
+            <a:ext cx="896112" cy="987552"/>
           </a:xfrm>
           <a:prstGeom prst="rect">
             <a:avLst/>
@@ -8887,8 +8736,8 @@
         </p:nvSpPr>
         <p:spPr>
           <a:xfrm>
-            <a:off x="6227064" y="3977640"/>
-            <a:ext cx="896112" cy="914400"/>
+            <a:off x="6044184" y="3886200"/>
+            <a:ext cx="896112" cy="987552"/>
           </a:xfrm>
           <a:prstGeom prst="rect">
             <a:avLst/>
@@ -8926,8 +8775,8 @@
         </p:nvSpPr>
         <p:spPr>
           <a:xfrm>
-            <a:off x="7196328" y="3977640"/>
-            <a:ext cx="896112" cy="914400"/>
+            <a:off x="7013448" y="3886200"/>
+            <a:ext cx="896112" cy="987552"/>
           </a:xfrm>
           <a:prstGeom prst="rect">
             <a:avLst/>
@@ -8951,8 +8800,8 @@
         </p:nvSpPr>
         <p:spPr>
           <a:xfrm>
-            <a:off x="7196328" y="3977640"/>
-            <a:ext cx="896112" cy="914400"/>
+            <a:off x="7013448" y="3886200"/>
+            <a:ext cx="896112" cy="987552"/>
           </a:xfrm>
           <a:prstGeom prst="rect">
             <a:avLst/>
@@ -8990,8 +8839,8 @@
         </p:nvSpPr>
         <p:spPr>
           <a:xfrm>
-            <a:off x="8165592" y="3977640"/>
-            <a:ext cx="896112" cy="914400"/>
+            <a:off x="7982712" y="3886200"/>
+            <a:ext cx="896112" cy="987552"/>
           </a:xfrm>
           <a:prstGeom prst="rect">
             <a:avLst/>
@@ -9015,8 +8864,8 @@
         </p:nvSpPr>
         <p:spPr>
           <a:xfrm>
-            <a:off x="8165592" y="3977640"/>
-            <a:ext cx="896112" cy="914400"/>
+            <a:off x="7982712" y="3886200"/>
+            <a:ext cx="896112" cy="987552"/>
           </a:xfrm>
           <a:prstGeom prst="rect">
             <a:avLst/>
@@ -9125,8 +8974,8 @@
         </p:nvSpPr>
         <p:spPr>
           <a:xfrm>
-            <a:off x="365760" y="841248"/>
-            <a:ext cx="4160520" cy="1234440"/>
+            <a:off x="365760" y="822960"/>
+            <a:ext cx="4160520" cy="1216152"/>
           </a:xfrm>
           <a:prstGeom prst="rect">
             <a:avLst/>
@@ -9157,8 +9006,8 @@
         </p:nvSpPr>
         <p:spPr>
           <a:xfrm>
-            <a:off x="365760" y="841248"/>
-            <a:ext cx="54864" cy="1234440"/>
+            <a:off x="365760" y="822960"/>
+            <a:ext cx="54864" cy="1216152"/>
           </a:xfrm>
           <a:prstGeom prst="rect">
             <a:avLst/>
@@ -9182,8 +9031,8 @@
         </p:nvSpPr>
         <p:spPr>
           <a:xfrm>
-            <a:off x="548640" y="932688"/>
-            <a:ext cx="3840480" cy="347472"/>
+            <a:off x="548640" y="914400"/>
+            <a:ext cx="3858768" cy="329184"/>
           </a:xfrm>
           <a:prstGeom prst="rect">
             <a:avLst/>
@@ -9221,8 +9070,8 @@
         </p:nvSpPr>
         <p:spPr>
           <a:xfrm>
-            <a:off x="548640" y="1252728"/>
-            <a:ext cx="3840480" cy="228600"/>
+            <a:off x="548640" y="1216152"/>
+            <a:ext cx="3858768" cy="219456"/>
           </a:xfrm>
           <a:prstGeom prst="rect">
             <a:avLst/>
@@ -9260,8 +9109,8 @@
         </p:nvSpPr>
         <p:spPr>
           <a:xfrm>
-            <a:off x="566928" y="1499616"/>
-            <a:ext cx="3840480" cy="521208"/>
+            <a:off x="566928" y="1444752"/>
+            <a:ext cx="3840480" cy="557784"/>
           </a:xfrm>
           <a:prstGeom prst="rect">
             <a:avLst/>
@@ -9275,13 +9124,13 @@
           <a:p>
             <a:pPr algn="l" marL="342900" indent="-342900">
               <a:spcAft>
-                <a:spcPts val="200"/>
+                <a:spcPts val="300"/>
               </a:spcAft>
               <a:buSzPct val="100000"/>
               <a:buChar char="•"/>
             </a:pPr>
             <a:r>
-              <a:rPr lang="en-US" sz="1000" dirty="0">
+              <a:rPr lang="en-US" sz="950" dirty="0">
                 <a:solidFill>
                   <a:srgbClr val="E2E8F0"/>
                 </a:solidFill>
@@ -9291,18 +9140,18 @@
               </a:rPr>
               <a:t>GET /predictions/rank-all — global topic ranking</a:t>
             </a:r>
-            <a:endParaRPr lang="en-US" sz="1000" dirty="0"/>
+            <a:endParaRPr lang="en-US" sz="950" dirty="0"/>
           </a:p>
           <a:p>
             <a:pPr algn="l" marL="342900" indent="-342900">
               <a:spcAft>
-                <a:spcPts val="200"/>
+                <a:spcPts val="300"/>
               </a:spcAft>
               <a:buSzPct val="100000"/>
               <a:buChar char="•"/>
             </a:pPr>
             <a:r>
-              <a:rPr lang="en-US" sz="1000" dirty="0">
+              <a:rPr lang="en-US" sz="950" dirty="0">
                 <a:solidFill>
                   <a:srgbClr val="E2E8F0"/>
                 </a:solidFill>
@@ -9310,20 +9159,20 @@
                 <a:ea typeface="Calibri" pitchFamily="34" charset="-122"/>
                 <a:cs typeface="Calibri" pitchFamily="34" charset="-120"/>
               </a:rPr>
-              <a:t>POST /insights/chapter — SLM chapter analysis</a:t>
-            </a:r>
-            <a:endParaRPr lang="en-US" sz="1000" dirty="0"/>
+              <a:t>POST /copilot/ask — conversational NL interface</a:t>
+            </a:r>
+            <a:endParaRPr lang="en-US" sz="950" dirty="0"/>
           </a:p>
           <a:p>
             <a:pPr algn="l" marL="342900" indent="-342900">
               <a:spcAft>
-                <a:spcPts val="200"/>
+                <a:spcPts val="300"/>
               </a:spcAft>
               <a:buSzPct val="100000"/>
               <a:buChar char="•"/>
             </a:pPr>
             <a:r>
-              <a:rPr lang="en-US" sz="1000" dirty="0">
+              <a:rPr lang="en-US" sz="950" dirty="0">
                 <a:solidFill>
                   <a:srgbClr val="E2E8F0"/>
                 </a:solidFill>
@@ -9331,30 +9180,9 @@
                 <a:ea typeface="Calibri" pitchFamily="34" charset="-122"/>
                 <a:cs typeface="Calibri" pitchFamily="34" charset="-120"/>
               </a:rPr>
-              <a:t>POST /copilot/ask — conversational NL interface</a:t>
-            </a:r>
-            <a:endParaRPr lang="en-US" sz="1000" dirty="0"/>
-          </a:p>
-          <a:p>
-            <a:pPr algn="l" marL="342900" indent="-342900">
-              <a:spcAft>
-                <a:spcPts val="200"/>
-              </a:spcAft>
-              <a:buSzPct val="100000"/>
-              <a:buChar char="•"/>
-            </a:pPr>
-            <a:r>
-              <a:rPr lang="en-US" sz="1000" dirty="0">
-                <a:solidFill>
-                  <a:srgbClr val="E2E8F0"/>
-                </a:solidFill>
-                <a:latin typeface="Calibri" pitchFamily="34" charset="0"/>
-                <a:ea typeface="Calibri" pitchFamily="34" charset="-122"/>
-                <a:cs typeface="Calibri" pitchFamily="34" charset="-120"/>
-              </a:rPr>
               <a:t>POST /reports/revision-plan — full study plan</a:t>
             </a:r>
-            <a:endParaRPr lang="en-US" sz="1000" dirty="0"/>
+            <a:endParaRPr lang="en-US" sz="950" dirty="0"/>
           </a:p>
         </p:txBody>
       </p:sp>
@@ -9366,8 +9194,8 @@
         </p:nvSpPr>
         <p:spPr>
           <a:xfrm>
-            <a:off x="365760" y="2176272"/>
-            <a:ext cx="4160520" cy="1234440"/>
+            <a:off x="365760" y="2148840"/>
+            <a:ext cx="4160520" cy="1216152"/>
           </a:xfrm>
           <a:prstGeom prst="rect">
             <a:avLst/>
@@ -9398,8 +9226,8 @@
         </p:nvSpPr>
         <p:spPr>
           <a:xfrm>
-            <a:off x="365760" y="2176272"/>
-            <a:ext cx="54864" cy="1234440"/>
+            <a:off x="365760" y="2148840"/>
+            <a:ext cx="54864" cy="1216152"/>
           </a:xfrm>
           <a:prstGeom prst="rect">
             <a:avLst/>
@@ -9423,8 +9251,8 @@
         </p:nvSpPr>
         <p:spPr>
           <a:xfrm>
-            <a:off x="548640" y="2267712"/>
-            <a:ext cx="3840480" cy="347472"/>
+            <a:off x="548640" y="2240280"/>
+            <a:ext cx="3858768" cy="329184"/>
           </a:xfrm>
           <a:prstGeom prst="rect">
             <a:avLst/>
@@ -9462,8 +9290,8 @@
         </p:nvSpPr>
         <p:spPr>
           <a:xfrm>
-            <a:off x="548640" y="2587752"/>
-            <a:ext cx="3840480" cy="228600"/>
+            <a:off x="548640" y="2542032"/>
+            <a:ext cx="3858768" cy="219456"/>
           </a:xfrm>
           <a:prstGeom prst="rect">
             <a:avLst/>
@@ -9501,8 +9329,8 @@
         </p:nvSpPr>
         <p:spPr>
           <a:xfrm>
-            <a:off x="566928" y="2834640"/>
-            <a:ext cx="3840480" cy="521208"/>
+            <a:off x="566928" y="2770632"/>
+            <a:ext cx="3840480" cy="557784"/>
           </a:xfrm>
           <a:prstGeom prst="rect">
             <a:avLst/>
@@ -9516,13 +9344,13 @@
           <a:p>
             <a:pPr algn="l" marL="342900" indent="-342900">
               <a:spcAft>
-                <a:spcPts val="200"/>
+                <a:spcPts val="300"/>
               </a:spcAft>
               <a:buSzPct val="100000"/>
               <a:buChar char="•"/>
             </a:pPr>
             <a:r>
-              <a:rPr lang="en-US" sz="1000" dirty="0">
+              <a:rPr lang="en-US" sz="950" dirty="0">
                 <a:solidFill>
                   <a:srgbClr val="E2E8F0"/>
                 </a:solidFill>
@@ -9532,18 +9360,18 @@
               </a:rPr>
               <a:t>Ollama (Mistral 7B, Phi-3 — runs locally)</a:t>
             </a:r>
-            <a:endParaRPr lang="en-US" sz="1000" dirty="0"/>
+            <a:endParaRPr lang="en-US" sz="950" dirty="0"/>
           </a:p>
           <a:p>
             <a:pPr algn="l" marL="342900" indent="-342900">
               <a:spcAft>
-                <a:spcPts val="200"/>
+                <a:spcPts val="300"/>
               </a:spcAft>
               <a:buSzPct val="100000"/>
               <a:buChar char="•"/>
             </a:pPr>
             <a:r>
-              <a:rPr lang="en-US" sz="1000" dirty="0">
+              <a:rPr lang="en-US" sz="950" dirty="0">
                 <a:solidFill>
                   <a:srgbClr val="E2E8F0"/>
                 </a:solidFill>
@@ -9553,18 +9381,18 @@
               </a:rPr>
               <a:t>HuggingFace (MPS/CUDA device support)</a:t>
             </a:r>
-            <a:endParaRPr lang="en-US" sz="1000" dirty="0"/>
+            <a:endParaRPr lang="en-US" sz="950" dirty="0"/>
           </a:p>
           <a:p>
             <a:pPr algn="l" marL="342900" indent="-342900">
               <a:spcAft>
-                <a:spcPts val="200"/>
+                <a:spcPts val="300"/>
               </a:spcAft>
               <a:buSzPct val="100000"/>
               <a:buChar char="•"/>
             </a:pPr>
             <a:r>
-              <a:rPr lang="en-US" sz="1000" dirty="0">
+              <a:rPr lang="en-US" sz="950" dirty="0">
                 <a:solidFill>
                   <a:srgbClr val="E2E8F0"/>
                 </a:solidFill>
@@ -9572,30 +9400,9 @@
                 <a:ea typeface="Calibri" pitchFamily="34" charset="-122"/>
                 <a:cs typeface="Calibri" pitchFamily="34" charset="-120"/>
               </a:rPr>
-              <a:t>OpenAI compatible endpoint (cloud fallback)</a:t>
-            </a:r>
-            <a:endParaRPr lang="en-US" sz="1000" dirty="0"/>
-          </a:p>
-          <a:p>
-            <a:pPr algn="l" marL="342900" indent="-342900">
-              <a:spcAft>
-                <a:spcPts val="200"/>
-              </a:spcAft>
-              <a:buSzPct val="100000"/>
-              <a:buChar char="•"/>
-            </a:pPr>
-            <a:r>
-              <a:rPr lang="en-US" sz="1000" dirty="0">
-                <a:solidFill>
-                  <a:srgbClr val="E2E8F0"/>
-                </a:solidFill>
-                <a:latin typeface="Calibri" pitchFamily="34" charset="0"/>
-                <a:ea typeface="Calibri" pitchFamily="34" charset="-122"/>
-                <a:cs typeface="Calibri" pitchFamily="34" charset="-120"/>
-              </a:rPr>
-              <a:t>ChromaDB vector store for PYQ evidence</a:t>
-            </a:r>
-            <a:endParaRPr lang="en-US" sz="1000" dirty="0"/>
+              <a:t>ChromaDB vector store for PYQ evidence retrieval</a:t>
+            </a:r>
+            <a:endParaRPr lang="en-US" sz="950" dirty="0"/>
           </a:p>
         </p:txBody>
       </p:sp>
@@ -9607,8 +9414,8 @@
         </p:nvSpPr>
         <p:spPr>
           <a:xfrm>
-            <a:off x="365760" y="3511296"/>
-            <a:ext cx="4160520" cy="1234440"/>
+            <a:off x="365760" y="3474720"/>
+            <a:ext cx="4160520" cy="1216152"/>
           </a:xfrm>
           <a:prstGeom prst="rect">
             <a:avLst/>
@@ -9639,8 +9446,8 @@
         </p:nvSpPr>
         <p:spPr>
           <a:xfrm>
-            <a:off x="365760" y="3511296"/>
-            <a:ext cx="54864" cy="1234440"/>
+            <a:off x="365760" y="3474720"/>
+            <a:ext cx="54864" cy="1216152"/>
           </a:xfrm>
           <a:prstGeom prst="rect">
             <a:avLst/>
@@ -9664,8 +9471,8 @@
         </p:nvSpPr>
         <p:spPr>
           <a:xfrm>
-            <a:off x="548640" y="3602736"/>
-            <a:ext cx="3840480" cy="347472"/>
+            <a:off x="548640" y="3566160"/>
+            <a:ext cx="3858768" cy="329184"/>
           </a:xfrm>
           <a:prstGeom prst="rect">
             <a:avLst/>
@@ -9703,8 +9510,8 @@
         </p:nvSpPr>
         <p:spPr>
           <a:xfrm>
-            <a:off x="548640" y="3922776"/>
-            <a:ext cx="3840480" cy="228600"/>
+            <a:off x="548640" y="3867912"/>
+            <a:ext cx="3858768" cy="219456"/>
           </a:xfrm>
           <a:prstGeom prst="rect">
             <a:avLst/>
@@ -9742,8 +9549,8 @@
         </p:nvSpPr>
         <p:spPr>
           <a:xfrm>
-            <a:off x="566928" y="4169664"/>
-            <a:ext cx="3840480" cy="521208"/>
+            <a:off x="566928" y="4096512"/>
+            <a:ext cx="3840480" cy="557784"/>
           </a:xfrm>
           <a:prstGeom prst="rect">
             <a:avLst/>
@@ -9757,13 +9564,13 @@
           <a:p>
             <a:pPr algn="l" marL="342900" indent="-342900">
               <a:spcAft>
-                <a:spcPts val="200"/>
+                <a:spcPts val="300"/>
               </a:spcAft>
               <a:buSzPct val="100000"/>
               <a:buChar char="•"/>
             </a:pPr>
             <a:r>
-              <a:rPr lang="en-US" sz="1000" dirty="0">
+              <a:rPr lang="en-US" sz="950" dirty="0">
                 <a:solidFill>
                   <a:srgbClr val="E2E8F0"/>
                 </a:solidFill>
@@ -9773,18 +9580,18 @@
               </a:rPr>
               <a:t>SQLite — 8,000+ structured questions</a:t>
             </a:r>
-            <a:endParaRPr lang="en-US" sz="1000" dirty="0"/>
+            <a:endParaRPr lang="en-US" sz="950" dirty="0"/>
           </a:p>
           <a:p>
             <a:pPr algn="l" marL="342900" indent="-342900">
               <a:spcAft>
-                <a:spcPts val="200"/>
+                <a:spcPts val="300"/>
               </a:spcAft>
               <a:buSzPct val="100000"/>
               <a:buChar char="•"/>
             </a:pPr>
             <a:r>
-              <a:rPr lang="en-US" sz="1000" dirty="0">
+              <a:rPr lang="en-US" sz="950" dirty="0">
                 <a:solidFill>
                   <a:srgbClr val="E2E8F0"/>
                 </a:solidFill>
@@ -9792,20 +9599,20 @@
                 <a:ea typeface="Calibri" pitchFamily="34" charset="-122"/>
                 <a:cs typeface="Calibri" pitchFamily="34" charset="-120"/>
               </a:rPr>
-              <a:t>PyTorch .pt embedding files per exam/level</a:t>
-            </a:r>
-            <a:endParaRPr lang="en-US" sz="1000" dirty="0"/>
+              <a:t>PyTorch .pt embedding files per exam</a:t>
+            </a:r>
+            <a:endParaRPr lang="en-US" sz="950" dirty="0"/>
           </a:p>
           <a:p>
             <a:pPr algn="l" marL="342900" indent="-342900">
               <a:spcAft>
-                <a:spcPts val="200"/>
+                <a:spcPts val="300"/>
               </a:spcAft>
               <a:buSzPct val="100000"/>
               <a:buChar char="•"/>
             </a:pPr>
             <a:r>
-              <a:rPr lang="en-US" sz="1000" dirty="0">
+              <a:rPr lang="en-US" sz="950" dirty="0">
                 <a:solidFill>
                   <a:srgbClr val="E2E8F0"/>
                 </a:solidFill>
@@ -9813,30 +9620,9 @@
                 <a:ea typeface="Calibri" pitchFamily="34" charset="-122"/>
                 <a:cs typeface="Calibri" pitchFamily="34" charset="-120"/>
               </a:rPr>
-              <a:t>NEET · JEE Main · JEE Advanced models trained</a:t>
-            </a:r>
-            <a:endParaRPr lang="en-US" sz="1000" dirty="0"/>
-          </a:p>
-          <a:p>
-            <a:pPr algn="l" marL="342900" indent="-342900">
-              <a:spcAft>
-                <a:spcPts val="200"/>
-              </a:spcAft>
-              <a:buSzPct val="100000"/>
-              <a:buChar char="•"/>
-            </a:pPr>
-            <a:r>
-              <a:rPr lang="en-US" sz="1000" dirty="0">
-                <a:solidFill>
-                  <a:srgbClr val="E2E8F0"/>
-                </a:solidFill>
-                <a:latin typeface="Calibri" pitchFamily="34" charset="0"/>
-                <a:ea typeface="Calibri" pitchFamily="34" charset="-122"/>
-                <a:cs typeface="Calibri" pitchFamily="34" charset="-120"/>
-              </a:rPr>
               <a:t>Metadata-filtered RAG retrieval pipeline</a:t>
             </a:r>
-            <a:endParaRPr lang="en-US" sz="1000" dirty="0"/>
+            <a:endParaRPr lang="en-US" sz="950" dirty="0"/>
           </a:p>
         </p:txBody>
       </p:sp>
@@ -9848,8 +9634,8 @@
         </p:nvSpPr>
         <p:spPr>
           <a:xfrm>
-            <a:off x="4709160" y="841248"/>
-            <a:ext cx="4114800" cy="1234440"/>
+            <a:off x="4709160" y="822960"/>
+            <a:ext cx="4114800" cy="1216152"/>
           </a:xfrm>
           <a:prstGeom prst="rect">
             <a:avLst/>
@@ -9880,8 +9666,8 @@
         </p:nvSpPr>
         <p:spPr>
           <a:xfrm>
-            <a:off x="4709160" y="841248"/>
-            <a:ext cx="54864" cy="1234440"/>
+            <a:off x="4709160" y="822960"/>
+            <a:ext cx="54864" cy="1216152"/>
           </a:xfrm>
           <a:prstGeom prst="rect">
             <a:avLst/>
@@ -9905,8 +9691,8 @@
         </p:nvSpPr>
         <p:spPr>
           <a:xfrm>
-            <a:off x="4846320" y="932688"/>
-            <a:ext cx="3840480" cy="320040"/>
+            <a:off x="4846320" y="914400"/>
+            <a:ext cx="3858768" cy="301752"/>
           </a:xfrm>
           <a:prstGeom prst="rect">
             <a:avLst/>
@@ -9944,8 +9730,8 @@
         </p:nvSpPr>
         <p:spPr>
           <a:xfrm>
-            <a:off x="4846320" y="1280160"/>
-            <a:ext cx="3840480" cy="731520"/>
+            <a:off x="4846320" y="1243584"/>
+            <a:ext cx="3858768" cy="740664"/>
           </a:xfrm>
           <a:prstGeom prst="rect">
             <a:avLst/>
@@ -9969,7 +9755,7 @@
                 <a:ea typeface="Calibri" pitchFamily="34" charset="-122"/>
                 <a:cs typeface="Calibri" pitchFamily="34" charset="-120"/>
               </a:rPr>
-              <a:t>All SLM outputs grounded in retrieved PYQ evidence. Confidence scores gated by source quality. Automatic fallback to pure prediction signal when RAG retrieval quality is low.</a:t>
+              <a:t>All SLM outputs grounded in retrieved PYQ evidence. Confidence scores gated by source quality. Automatic fallback to pure prediction when RAG quality is low.</a:t>
             </a:r>
             <a:endParaRPr lang="en-US" sz="1050" dirty="0"/>
           </a:p>
@@ -9983,8 +9769,8 @@
         </p:nvSpPr>
         <p:spPr>
           <a:xfrm>
-            <a:off x="4709160" y="2176272"/>
-            <a:ext cx="4114800" cy="1234440"/>
+            <a:off x="4709160" y="2148840"/>
+            <a:ext cx="4114800" cy="1216152"/>
           </a:xfrm>
           <a:prstGeom prst="rect">
             <a:avLst/>
@@ -10015,8 +9801,8 @@
         </p:nvSpPr>
         <p:spPr>
           <a:xfrm>
-            <a:off x="4709160" y="2176272"/>
-            <a:ext cx="54864" cy="1234440"/>
+            <a:off x="4709160" y="2148840"/>
+            <a:ext cx="54864" cy="1216152"/>
           </a:xfrm>
           <a:prstGeom prst="rect">
             <a:avLst/>
@@ -10040,8 +9826,8 @@
         </p:nvSpPr>
         <p:spPr>
           <a:xfrm>
-            <a:off x="4846320" y="2267712"/>
-            <a:ext cx="3840480" cy="320040"/>
+            <a:off x="4846320" y="2240280"/>
+            <a:ext cx="3858768" cy="301752"/>
           </a:xfrm>
           <a:prstGeom prst="rect">
             <a:avLst/>
@@ -10079,8 +9865,8 @@
         </p:nvSpPr>
         <p:spPr>
           <a:xfrm>
-            <a:off x="4846320" y="2615184"/>
-            <a:ext cx="3840480" cy="731520"/>
+            <a:off x="4846320" y="2569464"/>
+            <a:ext cx="3858768" cy="740664"/>
           </a:xfrm>
           <a:prstGeom prst="rect">
             <a:avLst/>
@@ -10121,7 +9907,7 @@
                 <a:ea typeface="Calibri" pitchFamily="34" charset="-122"/>
                 <a:cs typeface="Calibri" pitchFamily="34" charset="-120"/>
               </a:rPr>
-              <a:t>Ranking quality (Kendall τ) ≥ 0.70  ·  Insight usefulness ≥ 80%</a:t>
+              <a:t>Ranking quality (Kendall τ) ≥ 0.70  ·  P95 latency ≤ 3,000ms</a:t>
             </a:r>
             <a:endParaRPr lang="en-US" sz="1050" dirty="0"/>
           </a:p>
@@ -10138,7 +9924,7 @@
                 <a:ea typeface="Calibri" pitchFamily="34" charset="-122"/>
                 <a:cs typeface="Calibri" pitchFamily="34" charset="-120"/>
               </a:rPr>
-              <a:t>P95 latency ≤ 3,000ms (Ollama 7B)  ·  Fallback rate ≤ 10%</a:t>
+              <a:t>Fallback rate ≤ 10%  ·  Insight usefulness ≥ 80%</a:t>
             </a:r>
             <a:endParaRPr lang="en-US" sz="1050" dirty="0"/>
           </a:p>
@@ -10152,8 +9938,8 @@
         </p:nvSpPr>
         <p:spPr>
           <a:xfrm>
-            <a:off x="4709160" y="3511296"/>
-            <a:ext cx="4114800" cy="1234440"/>
+            <a:off x="4709160" y="3474720"/>
+            <a:ext cx="4114800" cy="1216152"/>
           </a:xfrm>
           <a:prstGeom prst="rect">
             <a:avLst/>
@@ -10184,8 +9970,8 @@
         </p:nvSpPr>
         <p:spPr>
           <a:xfrm>
-            <a:off x="4709160" y="3511296"/>
-            <a:ext cx="54864" cy="1234440"/>
+            <a:off x="4709160" y="3474720"/>
+            <a:ext cx="54864" cy="1216152"/>
           </a:xfrm>
           <a:prstGeom prst="rect">
             <a:avLst/>
@@ -10209,8 +9995,8 @@
         </p:nvSpPr>
         <p:spPr>
           <a:xfrm>
-            <a:off x="4846320" y="3602736"/>
-            <a:ext cx="3840480" cy="320040"/>
+            <a:off x="4846320" y="3566160"/>
+            <a:ext cx="3858768" cy="301752"/>
           </a:xfrm>
           <a:prstGeom prst="rect">
             <a:avLst/>
@@ -10248,8 +10034,8 @@
         </p:nvSpPr>
         <p:spPr>
           <a:xfrm>
-            <a:off x="4846320" y="3950208"/>
-            <a:ext cx="3840480" cy="731520"/>
+            <a:off x="4846320" y="3895344"/>
+            <a:ext cx="3858768" cy="740664"/>
           </a:xfrm>
           <a:prstGeom prst="rect">
             <a:avLst/>
@@ -10273,7 +10059,7 @@
                 <a:ea typeface="Calibri" pitchFamily="34" charset="-122"/>
                 <a:cs typeface="Calibri" pitchFamily="34" charset="-120"/>
               </a:rPr>
-              <a:t>Single abstraction layer switches between Ollama, HuggingFace (MPS/CUDA), and OpenAI — zero code changes required. Swap via .env config. Mock provider available for CI.</a:t>
+              <a:t>Single abstraction layer switches between Ollama, HuggingFace (MPS/CUDA), and OpenAI. Zero code changes — swap via .env. Mock provider for CI.</a:t>
             </a:r>
             <a:endParaRPr lang="en-US" sz="1050" dirty="0"/>
           </a:p>
@@ -10375,17 +10161,17 @@
               <a:buNone/>
             </a:pPr>
             <a:r>
-              <a:rPr lang="en-US" sz="1150" i="1" dirty="0">
-                <a:solidFill>
-                  <a:srgbClr val="94A3B8"/>
-                </a:solidFill>
-                <a:latin typeface="Calibri" pitchFamily="34" charset="0"/>
-                <a:ea typeface="Calibri" pitchFamily="34" charset="-122"/>
-                <a:cs typeface="Calibri" pitchFamily="34" charset="-120"/>
-              </a:rPr>
-              <a:t>A per-student window into performance, prediction alignment, and AI-guided revision — all client-side, zero backend cost.</a:t>
-            </a:r>
-            <a:endParaRPr lang="en-US" sz="1150" dirty="0"/>
+              <a:rPr lang="en-US" sz="1200" i="1" dirty="0">
+                <a:solidFill>
+                  <a:srgbClr val="6E82A0"/>
+                </a:solidFill>
+                <a:latin typeface="Calibri" pitchFamily="34" charset="0"/>
+                <a:ea typeface="Calibri" pitchFamily="34" charset="-122"/>
+                <a:cs typeface="Calibri" pitchFamily="34" charset="-120"/>
+              </a:rPr>
+              <a:t>A per-student window into performance, prediction alignment, and AI-guided revision — client-side, zero backend cost.</a:t>
+            </a:r>
+            <a:endParaRPr lang="en-US" sz="1200" dirty="0"/>
           </a:p>
         </p:txBody>
       </p:sp>
@@ -10518,7 +10304,7 @@
                 <a:ea typeface="Calibri" pitchFamily="34" charset="-122"/>
                 <a:cs typeface="Calibri" pitchFamily="34" charset="-120"/>
               </a:rPr>
-              <a:t>Latest score, rank, improvement %, consistency score — at a glance with trajectory context.</a:t>
+              <a:t>Latest score, rank, improvement %, consistency score — all at a glance with trajectory context.</a:t>
             </a:r>
             <a:endParaRPr lang="en-US" sz="1100" dirty="0"/>
           </a:p>
@@ -10653,7 +10439,7 @@
                 <a:ea typeface="Calibri" pitchFamily="34" charset="-122"/>
                 <a:cs typeface="Calibri" pitchFamily="34" charset="-120"/>
               </a:rPr>
-              <a:t>Line chart across 10 mock exams. Trend-per-exam trendline. Multi-subject overlay on one canvas.</a:t>
+              <a:t>Line chart across 10 mock exams. Per-exam trend line. Multi-subject accuracy overlay on one canvas.</a:t>
             </a:r>
             <a:endParaRPr lang="en-US" sz="1100" dirty="0"/>
           </a:p>
@@ -10788,7 +10574,7 @@
                 <a:ea typeface="Calibri" pitchFamily="34" charset="-122"/>
                 <a:cs typeface="Calibri" pitchFamily="34" charset="-120"/>
               </a:rPr>
-              <a:t>All 59 chapters grouped by subject (Botany/Zoology/Chem/Physics/Maths), sorted weakest-first with M/S/D/W/C badges.</a:t>
+              <a:t>59 chapters grouped by subject. Sorted weakest-first with level badges M / S / D / W / C for each chapter.</a:t>
             </a:r>
             <a:endParaRPr lang="en-US" sz="1100" dirty="0"/>
           </a:p>
@@ -10802,7 +10588,7 @@
         </p:nvSpPr>
         <p:spPr>
           <a:xfrm>
-            <a:off x="384048" y="3108960"/>
+            <a:off x="384048" y="3090672"/>
             <a:ext cx="2651760" cy="1828800"/>
           </a:xfrm>
           <a:prstGeom prst="rect">
@@ -10834,7 +10620,7 @@
         </p:nvSpPr>
         <p:spPr>
           <a:xfrm>
-            <a:off x="384048" y="3108960"/>
+            <a:off x="384048" y="3090672"/>
             <a:ext cx="2651760" cy="64008"/>
           </a:xfrm>
           <a:prstGeom prst="rect">
@@ -10859,7 +10645,7 @@
         </p:nvSpPr>
         <p:spPr>
           <a:xfrm>
-            <a:off x="493776" y="3218688"/>
+            <a:off x="493776" y="3200400"/>
             <a:ext cx="2450592" cy="402336"/>
           </a:xfrm>
           <a:prstGeom prst="rect">
@@ -10898,7 +10684,7 @@
         </p:nvSpPr>
         <p:spPr>
           <a:xfrm>
-            <a:off x="493776" y="3657600"/>
+            <a:off x="493776" y="3639312"/>
             <a:ext cx="2450592" cy="1188720"/>
           </a:xfrm>
           <a:prstGeom prst="rect">
@@ -10937,7 +10723,7 @@
         </p:nvSpPr>
         <p:spPr>
           <a:xfrm>
-            <a:off x="3191256" y="3108960"/>
+            <a:off x="3191256" y="3090672"/>
             <a:ext cx="2651760" cy="1828800"/>
           </a:xfrm>
           <a:prstGeom prst="rect">
@@ -10969,7 +10755,7 @@
         </p:nvSpPr>
         <p:spPr>
           <a:xfrm>
-            <a:off x="3191256" y="3108960"/>
+            <a:off x="3191256" y="3090672"/>
             <a:ext cx="2651760" cy="64008"/>
           </a:xfrm>
           <a:prstGeom prst="rect">
@@ -10994,7 +10780,7 @@
         </p:nvSpPr>
         <p:spPr>
           <a:xfrm>
-            <a:off x="3300984" y="3218688"/>
+            <a:off x="3300984" y="3200400"/>
             <a:ext cx="2450592" cy="402336"/>
           </a:xfrm>
           <a:prstGeom prst="rect">
@@ -11033,7 +10819,7 @@
         </p:nvSpPr>
         <p:spPr>
           <a:xfrm>
-            <a:off x="3300984" y="3657600"/>
+            <a:off x="3300984" y="3639312"/>
             <a:ext cx="2450592" cy="1188720"/>
           </a:xfrm>
           <a:prstGeom prst="rect">
@@ -11058,7 +10844,7 @@
                 <a:ea typeface="Calibri" pitchFamily="34" charset="-122"/>
                 <a:cs typeface="Calibri" pitchFamily="34" charset="-120"/>
               </a:rPr>
-              <a:t>Real-time top-18 ranked topic predictions from the Intelligence API. Weak-zone matches highlighted with ★ badge.</a:t>
+              <a:t>Real-time top-18 ranked topic predictions from the Intelligence API. Student weak-zone matches highlighted with ★.</a:t>
             </a:r>
             <a:endParaRPr lang="en-US" sz="1100" dirty="0"/>
           </a:p>
@@ -11072,7 +10858,7 @@
         </p:nvSpPr>
         <p:spPr>
           <a:xfrm>
-            <a:off x="5998464" y="3108960"/>
+            <a:off x="5998464" y="3090672"/>
             <a:ext cx="2651760" cy="1828800"/>
           </a:xfrm>
           <a:prstGeom prst="rect">
@@ -11104,7 +10890,7 @@
         </p:nvSpPr>
         <p:spPr>
           <a:xfrm>
-            <a:off x="5998464" y="3108960"/>
+            <a:off x="5998464" y="3090672"/>
             <a:ext cx="2651760" cy="64008"/>
           </a:xfrm>
           <a:prstGeom prst="rect">
@@ -11129,7 +10915,7 @@
         </p:nvSpPr>
         <p:spPr>
           <a:xfrm>
-            <a:off x="6108192" y="3218688"/>
+            <a:off x="6108192" y="3200400"/>
             <a:ext cx="2450592" cy="402336"/>
           </a:xfrm>
           <a:prstGeom prst="rect">
@@ -11168,7 +10954,7 @@
         </p:nvSpPr>
         <p:spPr>
           <a:xfrm>
-            <a:off x="6108192" y="3657600"/>
+            <a:off x="6108192" y="3639312"/>
             <a:ext cx="2450592" cy="1188720"/>
           </a:xfrm>
           <a:prstGeom prst="rect">
@@ -11193,7 +10979,7 @@
                 <a:ea typeface="Calibri" pitchFamily="34" charset="-122"/>
                 <a:cs typeface="Calibri" pitchFamily="34" charset="-120"/>
               </a:rPr>
-              <a:t>NL Q&amp;A grounded in the student's actual performance data. Multi-turn memory, pre-seeded question suggestions.</a:t>
+              <a:t>NL Q&amp;A grounded in the student's actual performance data. Multi-turn memory with pre-seeded question suggestions.</a:t>
             </a:r>
             <a:endParaRPr lang="en-US" sz="1100" dirty="0"/>
           </a:p>
@@ -11295,9 +11081,9 @@
               <a:buNone/>
             </a:pPr>
             <a:r>
-              <a:rPr lang="en-US" sz="1150" i="1" dirty="0">
-                <a:solidFill>
-                  <a:srgbClr val="94A3B8"/>
+              <a:rPr lang="en-US" sz="1200" i="1" dirty="0">
+                <a:solidFill>
+                  <a:srgbClr val="6E82A0"/>
                 </a:solidFill>
                 <a:latin typeface="Calibri" pitchFamily="34" charset="0"/>
                 <a:ea typeface="Calibri" pitchFamily="34" charset="-122"/>
@@ -11305,7 +11091,7 @@
               </a:rPr>
               <a:t>Interactive advisor for ALL chapters — not just top 5. Tells students what to study, how long, in what order, and why.</a:t>
             </a:r>
-            <a:endParaRPr lang="en-US" sz="1150" dirty="0"/>
+            <a:endParaRPr lang="en-US" sz="1200" dirty="0"/>
           </a:p>
         </p:txBody>
       </p:sp>
@@ -11318,7 +11104,7 @@
         <p:spPr>
           <a:xfrm>
             <a:off x="365760" y="1115568"/>
-            <a:ext cx="4041648" cy="612648"/>
+            <a:ext cx="3931920" cy="612648"/>
           </a:xfrm>
           <a:prstGeom prst="rect">
             <a:avLst/>
@@ -11374,8 +11160,8 @@
         </p:nvSpPr>
         <p:spPr>
           <a:xfrm>
-            <a:off x="484632" y="1115568"/>
-            <a:ext cx="3895344" cy="292608"/>
+            <a:off x="475488" y="1115568"/>
+            <a:ext cx="3794760" cy="292608"/>
           </a:xfrm>
           <a:prstGeom prst="rect">
             <a:avLst/>
@@ -11413,8 +11199,8 @@
         </p:nvSpPr>
         <p:spPr>
           <a:xfrm>
-            <a:off x="484632" y="1426464"/>
-            <a:ext cx="3895344" cy="256032"/>
+            <a:off x="475488" y="1426464"/>
+            <a:ext cx="3794760" cy="256032"/>
           </a:xfrm>
           <a:prstGeom prst="rect">
             <a:avLst/>
@@ -11452,8 +11238,8 @@
         </p:nvSpPr>
         <p:spPr>
           <a:xfrm>
-            <a:off x="640080" y="1810512"/>
-            <a:ext cx="3767328" cy="612648"/>
+            <a:off x="566928" y="1810512"/>
+            <a:ext cx="3730752" cy="612648"/>
           </a:xfrm>
           <a:prstGeom prst="rect">
             <a:avLst/>
@@ -11484,7 +11270,7 @@
         </p:nvSpPr>
         <p:spPr>
           <a:xfrm>
-            <a:off x="640080" y="1810512"/>
+            <a:off x="566928" y="1810512"/>
             <a:ext cx="54864" cy="612648"/>
           </a:xfrm>
           <a:prstGeom prst="rect">
@@ -11509,8 +11295,8 @@
         </p:nvSpPr>
         <p:spPr>
           <a:xfrm>
-            <a:off x="758952" y="1810512"/>
-            <a:ext cx="3621024" cy="292608"/>
+            <a:off x="676656" y="1810512"/>
+            <a:ext cx="3593592" cy="292608"/>
           </a:xfrm>
           <a:prstGeom prst="rect">
             <a:avLst/>
@@ -11548,8 +11334,8 @@
         </p:nvSpPr>
         <p:spPr>
           <a:xfrm>
-            <a:off x="758952" y="2121408"/>
-            <a:ext cx="3621024" cy="256032"/>
+            <a:off x="676656" y="2121408"/>
+            <a:ext cx="3593592" cy="256032"/>
           </a:xfrm>
           <a:prstGeom prst="rect">
             <a:avLst/>
@@ -11573,7 +11359,7 @@
                 <a:ea typeface="Calibri" pitchFamily="34" charset="-122"/>
                 <a:cs typeface="Calibri" pitchFamily="34" charset="-120"/>
               </a:rPr>
-              <a:t>Ranked #1, #2… · dual bars: accuracy + Prajna importance</a:t>
+              <a:t>Ranked #1, #2… · dual bars: accuracy + importance</a:t>
             </a:r>
             <a:endParaRPr lang="en-US" sz="950" dirty="0"/>
           </a:p>
@@ -11587,8 +11373,8 @@
         </p:nvSpPr>
         <p:spPr>
           <a:xfrm>
-            <a:off x="914400" y="2505456"/>
-            <a:ext cx="3493008" cy="612648"/>
+            <a:off x="768096" y="2505456"/>
+            <a:ext cx="3529584" cy="612648"/>
           </a:xfrm>
           <a:prstGeom prst="rect">
             <a:avLst/>
@@ -11619,7 +11405,7 @@
         </p:nvSpPr>
         <p:spPr>
           <a:xfrm>
-            <a:off x="914400" y="2505456"/>
+            <a:off x="768096" y="2505456"/>
             <a:ext cx="54864" cy="612648"/>
           </a:xfrm>
           <a:prstGeom prst="rect">
@@ -11644,8 +11430,8 @@
         </p:nvSpPr>
         <p:spPr>
           <a:xfrm>
-            <a:off x="1033272" y="2505456"/>
-            <a:ext cx="3346704" cy="292608"/>
+            <a:off x="877824" y="2505456"/>
+            <a:ext cx="3392424" cy="292608"/>
           </a:xfrm>
           <a:prstGeom prst="rect">
             <a:avLst/>
@@ -11683,8 +11469,8 @@
         </p:nvSpPr>
         <p:spPr>
           <a:xfrm>
-            <a:off x="1033272" y="2816352"/>
-            <a:ext cx="3346704" cy="256032"/>
+            <a:off x="877824" y="2816352"/>
+            <a:ext cx="3392424" cy="256032"/>
           </a:xfrm>
           <a:prstGeom prst="rect">
             <a:avLst/>
@@ -11722,8 +11508,8 @@
         </p:nvSpPr>
         <p:spPr>
           <a:xfrm>
-            <a:off x="1188720" y="3200400"/>
-            <a:ext cx="3218688" cy="612648"/>
+            <a:off x="969264" y="3200400"/>
+            <a:ext cx="3328416" cy="612648"/>
           </a:xfrm>
           <a:prstGeom prst="rect">
             <a:avLst/>
@@ -11754,7 +11540,7 @@
         </p:nvSpPr>
         <p:spPr>
           <a:xfrm>
-            <a:off x="1188720" y="3200400"/>
+            <a:off x="969264" y="3200400"/>
             <a:ext cx="54864" cy="612648"/>
           </a:xfrm>
           <a:prstGeom prst="rect">
@@ -11779,8 +11565,8 @@
         </p:nvSpPr>
         <p:spPr>
           <a:xfrm>
-            <a:off x="1307592" y="3200400"/>
-            <a:ext cx="3072384" cy="292608"/>
+            <a:off x="1078992" y="3200400"/>
+            <a:ext cx="3191256" cy="292608"/>
           </a:xfrm>
           <a:prstGeom prst="rect">
             <a:avLst/>
@@ -11818,8 +11604,8 @@
         </p:nvSpPr>
         <p:spPr>
           <a:xfrm>
-            <a:off x="1307592" y="3511296"/>
-            <a:ext cx="3072384" cy="256032"/>
+            <a:off x="1078992" y="3511296"/>
+            <a:ext cx="3191256" cy="256032"/>
           </a:xfrm>
           <a:prstGeom prst="rect">
             <a:avLst/>
@@ -11843,7 +11629,7 @@
                 <a:ea typeface="Calibri" pitchFamily="34" charset="-122"/>
                 <a:cs typeface="Calibri" pitchFamily="34" charset="-120"/>
               </a:rPr>
-              <a:t>Lazy-fetched from API · cached in Map · top 3 micro-topics</a:t>
+              <a:t>Lazy API fetch per chapter · cached in Map · top 3 topics</a:t>
             </a:r>
             <a:endParaRPr lang="en-US" sz="950" dirty="0"/>
           </a:p>
@@ -11857,8 +11643,8 @@
         </p:nvSpPr>
         <p:spPr>
           <a:xfrm>
-            <a:off x="1463040" y="3895344"/>
-            <a:ext cx="2944368" cy="612648"/>
+            <a:off x="1170432" y="3895344"/>
+            <a:ext cx="3127248" cy="612648"/>
           </a:xfrm>
           <a:prstGeom prst="rect">
             <a:avLst/>
@@ -11889,7 +11675,7 @@
         </p:nvSpPr>
         <p:spPr>
           <a:xfrm>
-            <a:off x="1463040" y="3895344"/>
+            <a:off x="1170432" y="3895344"/>
             <a:ext cx="54864" cy="612648"/>
           </a:xfrm>
           <a:prstGeom prst="rect">
@@ -11914,8 +11700,8 @@
         </p:nvSpPr>
         <p:spPr>
           <a:xfrm>
-            <a:off x="1581912" y="3895344"/>
-            <a:ext cx="2798064" cy="292608"/>
+            <a:off x="1280160" y="3895344"/>
+            <a:ext cx="2990088" cy="292608"/>
           </a:xfrm>
           <a:prstGeom prst="rect">
             <a:avLst/>
@@ -11953,8 +11739,8 @@
         </p:nvSpPr>
         <p:spPr>
           <a:xfrm>
-            <a:off x="1581912" y="4206240"/>
-            <a:ext cx="2798064" cy="256032"/>
+            <a:off x="1280160" y="4206240"/>
+            <a:ext cx="2990088" cy="256032"/>
           </a:xfrm>
           <a:prstGeom prst="rect">
             <a:avLst/>
@@ -11978,7 +11764,7 @@
                 <a:ea typeface="Calibri" pitchFamily="34" charset="-122"/>
                 <a:cs typeface="Calibri" pitchFamily="34" charset="-120"/>
               </a:rPr>
-              <a:t>5 levels × 3 trend directions = 13 unique text templates</a:t>
+              <a:t>5 levels × 3 trend directions = 13 unique templates</a:t>
             </a:r>
             <a:endParaRPr lang="en-US" sz="950" dirty="0"/>
           </a:p>
@@ -11992,8 +11778,8 @@
         </p:nvSpPr>
         <p:spPr>
           <a:xfrm>
-            <a:off x="4663440" y="1115568"/>
-            <a:ext cx="4160520" cy="658368"/>
+            <a:off x="4526280" y="1115568"/>
+            <a:ext cx="4297680" cy="640080"/>
           </a:xfrm>
           <a:prstGeom prst="rect">
             <a:avLst/>
@@ -12017,8 +11803,8 @@
         </p:nvSpPr>
         <p:spPr>
           <a:xfrm>
-            <a:off x="4663440" y="1115568"/>
-            <a:ext cx="54864" cy="658368"/>
+            <a:off x="4526280" y="1115568"/>
+            <a:ext cx="54864" cy="640080"/>
           </a:xfrm>
           <a:prstGeom prst="rect">
             <a:avLst/>
@@ -12042,8 +11828,8 @@
         </p:nvSpPr>
         <p:spPr>
           <a:xfrm>
-            <a:off x="4773168" y="1170432"/>
-            <a:ext cx="3931920" cy="237744"/>
+            <a:off x="4645152" y="1170432"/>
+            <a:ext cx="4096512" cy="237744"/>
           </a:xfrm>
           <a:prstGeom prst="rect">
             <a:avLst/>
@@ -12081,8 +11867,8 @@
         </p:nvSpPr>
         <p:spPr>
           <a:xfrm>
-            <a:off x="4773168" y="1426464"/>
-            <a:ext cx="3931920" cy="310896"/>
+            <a:off x="4645152" y="1426464"/>
+            <a:ext cx="4096512" cy="274320"/>
           </a:xfrm>
           <a:prstGeom prst="rect">
             <a:avLst/>
@@ -12120,8 +11906,8 @@
         </p:nvSpPr>
         <p:spPr>
           <a:xfrm>
-            <a:off x="4663440" y="1865376"/>
-            <a:ext cx="4160520" cy="658368"/>
+            <a:off x="4526280" y="1847088"/>
+            <a:ext cx="4297680" cy="640080"/>
           </a:xfrm>
           <a:prstGeom prst="rect">
             <a:avLst/>
@@ -12145,8 +11931,8 @@
         </p:nvSpPr>
         <p:spPr>
           <a:xfrm>
-            <a:off x="4663440" y="1865376"/>
-            <a:ext cx="54864" cy="658368"/>
+            <a:off x="4526280" y="1847088"/>
+            <a:ext cx="54864" cy="640080"/>
           </a:xfrm>
           <a:prstGeom prst="rect">
             <a:avLst/>
@@ -12170,8 +11956,8 @@
         </p:nvSpPr>
         <p:spPr>
           <a:xfrm>
-            <a:off x="4773168" y="1920240"/>
-            <a:ext cx="3931920" cy="237744"/>
+            <a:off x="4645152" y="1901952"/>
+            <a:ext cx="4096512" cy="237744"/>
           </a:xfrm>
           <a:prstGeom prst="rect">
             <a:avLst/>
@@ -12209,8 +11995,8 @@
         </p:nvSpPr>
         <p:spPr>
           <a:xfrm>
-            <a:off x="4773168" y="2176272"/>
-            <a:ext cx="3931920" cy="310896"/>
+            <a:off x="4645152" y="2157984"/>
+            <a:ext cx="4096512" cy="274320"/>
           </a:xfrm>
           <a:prstGeom prst="rect">
             <a:avLst/>
@@ -12248,8 +12034,8 @@
         </p:nvSpPr>
         <p:spPr>
           <a:xfrm>
-            <a:off x="4663440" y="2615184"/>
-            <a:ext cx="4160520" cy="658368"/>
+            <a:off x="4526280" y="2578608"/>
+            <a:ext cx="4297680" cy="640080"/>
           </a:xfrm>
           <a:prstGeom prst="rect">
             <a:avLst/>
@@ -12273,8 +12059,8 @@
         </p:nvSpPr>
         <p:spPr>
           <a:xfrm>
-            <a:off x="4663440" y="2615184"/>
-            <a:ext cx="54864" cy="658368"/>
+            <a:off x="4526280" y="2578608"/>
+            <a:ext cx="54864" cy="640080"/>
           </a:xfrm>
           <a:prstGeom prst="rect">
             <a:avLst/>
@@ -12298,8 +12084,8 @@
         </p:nvSpPr>
         <p:spPr>
           <a:xfrm>
-            <a:off x="4773168" y="2670048"/>
-            <a:ext cx="3931920" cy="237744"/>
+            <a:off x="4645152" y="2633472"/>
+            <a:ext cx="4096512" cy="237744"/>
           </a:xfrm>
           <a:prstGeom prst="rect">
             <a:avLst/>
@@ -12337,8 +12123,8 @@
         </p:nvSpPr>
         <p:spPr>
           <a:xfrm>
-            <a:off x="4773168" y="2926080"/>
-            <a:ext cx="3931920" cy="310896"/>
+            <a:off x="4645152" y="2889504"/>
+            <a:ext cx="4096512" cy="274320"/>
           </a:xfrm>
           <a:prstGeom prst="rect">
             <a:avLst/>
@@ -12362,7 +12148,7 @@
                 <a:ea typeface="Calibri" pitchFamily="34" charset="-122"/>
                 <a:cs typeface="Calibri" pitchFamily="34" charset="-120"/>
               </a:rPr>
-              <a:t>Urgent: avg &gt; 35  ·  Moderate: 20–35  ·  On Track: &lt; 20</a:t>
+              <a:t>Urgent &gt; 35  ·  Moderate 20–35  ·  On Track &lt; 20</a:t>
             </a:r>
             <a:endParaRPr lang="en-US" sz="1000" dirty="0"/>
           </a:p>
@@ -12376,8 +12162,8 @@
         </p:nvSpPr>
         <p:spPr>
           <a:xfrm>
-            <a:off x="4663440" y="3364992"/>
-            <a:ext cx="4160520" cy="658368"/>
+            <a:off x="4526280" y="3310128"/>
+            <a:ext cx="4297680" cy="640080"/>
           </a:xfrm>
           <a:prstGeom prst="rect">
             <a:avLst/>
@@ -12401,8 +12187,8 @@
         </p:nvSpPr>
         <p:spPr>
           <a:xfrm>
-            <a:off x="4663440" y="3364992"/>
-            <a:ext cx="54864" cy="658368"/>
+            <a:off x="4526280" y="3310128"/>
+            <a:ext cx="54864" cy="640080"/>
           </a:xfrm>
           <a:prstGeom prst="rect">
             <a:avLst/>
@@ -12426,8 +12212,8 @@
         </p:nvSpPr>
         <p:spPr>
           <a:xfrm>
-            <a:off x="4773168" y="3419856"/>
-            <a:ext cx="3931920" cy="237744"/>
+            <a:off x="4645152" y="3364992"/>
+            <a:ext cx="4096512" cy="237744"/>
           </a:xfrm>
           <a:prstGeom prst="rect">
             <a:avLst/>
@@ -12465,8 +12251,8 @@
         </p:nvSpPr>
         <p:spPr>
           <a:xfrm>
-            <a:off x="4773168" y="3675888"/>
-            <a:ext cx="3931920" cy="310896"/>
+            <a:off x="4645152" y="3621024"/>
+            <a:ext cx="4096512" cy="274320"/>
           </a:xfrm>
           <a:prstGeom prst="rect">
             <a:avLst/>
@@ -12490,7 +12276,7 @@
                 <a:ea typeface="Calibri" pitchFamily="34" charset="-122"/>
                 <a:cs typeface="Calibri" pitchFamily="34" charset="-120"/>
               </a:rPr>
-              <a:t>Micro-topics fetched only on chapter expand. Map cache prevents duplicate API calls per session.</a:t>
+              <a:t>Micro-topics fetched only on chapter expand. Map prevents duplicate API calls.</a:t>
             </a:r>
             <a:endParaRPr lang="en-US" sz="1000" dirty="0"/>
           </a:p>
@@ -12504,8 +12290,8 @@
         </p:nvSpPr>
         <p:spPr>
           <a:xfrm>
-            <a:off x="4663440" y="4114800"/>
-            <a:ext cx="4160520" cy="658368"/>
+            <a:off x="4526280" y="4041648"/>
+            <a:ext cx="4297680" cy="640080"/>
           </a:xfrm>
           <a:prstGeom prst="rect">
             <a:avLst/>
@@ -12529,8 +12315,8 @@
         </p:nvSpPr>
         <p:spPr>
           <a:xfrm>
-            <a:off x="4663440" y="4114800"/>
-            <a:ext cx="54864" cy="658368"/>
+            <a:off x="4526280" y="4041648"/>
+            <a:ext cx="54864" cy="640080"/>
           </a:xfrm>
           <a:prstGeom prst="rect">
             <a:avLst/>
@@ -12554,8 +12340,8 @@
         </p:nvSpPr>
         <p:spPr>
           <a:xfrm>
-            <a:off x="4773168" y="4169664"/>
-            <a:ext cx="3931920" cy="237744"/>
+            <a:off x="4645152" y="4096512"/>
+            <a:ext cx="4096512" cy="237744"/>
           </a:xfrm>
           <a:prstGeom prst="rect">
             <a:avLst/>
@@ -12593,8 +12379,8 @@
         </p:nvSpPr>
         <p:spPr>
           <a:xfrm>
-            <a:off x="4773168" y="4425696"/>
-            <a:ext cx="3931920" cy="310896"/>
+            <a:off x="4645152" y="4352544"/>
+            <a:ext cx="4096512" cy="274320"/>
           </a:xfrm>
           <a:prstGeom prst="rect">
             <a:avLst/>
@@ -12618,7 +12404,7 @@
                 <a:ea typeface="Calibri" pitchFamily="34" charset="-122"/>
                 <a:cs typeface="Calibri" pitchFamily="34" charset="-120"/>
               </a:rPr>
-              <a:t>gap = pctLevel() boundary − accuracy. Thresholds: C→25, W→45, D→65, S→80, M→100.</a:t>
+              <a:t>gap = pctLevel() boundary − accuracy (C→25, W→45, D→65, S→80)</a:t>
             </a:r>
             <a:endParaRPr lang="en-US" sz="1000" dirty="0"/>
           </a:p>
@@ -12703,7 +12489,7 @@
         </p:nvSpPr>
         <p:spPr>
           <a:xfrm>
-            <a:off x="804672" y="1847088"/>
+            <a:off x="804672" y="1581912"/>
             <a:ext cx="7589520" cy="0"/>
           </a:xfrm>
           <a:prstGeom prst="line">
@@ -12726,8 +12512,8 @@
         </p:nvSpPr>
         <p:spPr>
           <a:xfrm>
-            <a:off x="786384" y="1417320"/>
-            <a:ext cx="868680" cy="868680"/>
+            <a:off x="786384" y="1161288"/>
+            <a:ext cx="850392" cy="850392"/>
           </a:xfrm>
           <a:prstGeom prst="ellipse">
             <a:avLst/>
@@ -12751,8 +12537,8 @@
         </p:nvSpPr>
         <p:spPr>
           <a:xfrm>
-            <a:off x="786384" y="1417320"/>
-            <a:ext cx="868680" cy="868680"/>
+            <a:off x="786384" y="1161288"/>
+            <a:ext cx="850392" cy="850392"/>
           </a:xfrm>
           <a:prstGeom prst="rect">
             <a:avLst/>
@@ -12790,8 +12576,8 @@
         </p:nvSpPr>
         <p:spPr>
           <a:xfrm>
-            <a:off x="347472" y="2423160"/>
-            <a:ext cx="2011680" cy="2514600"/>
+            <a:off x="347472" y="2121408"/>
+            <a:ext cx="2011680" cy="2651760"/>
           </a:xfrm>
           <a:prstGeom prst="rect">
             <a:avLst/>
@@ -12822,7 +12608,7 @@
         </p:nvSpPr>
         <p:spPr>
           <a:xfrm>
-            <a:off x="347472" y="2423160"/>
+            <a:off x="347472" y="2121408"/>
             <a:ext cx="2011680" cy="64008"/>
           </a:xfrm>
           <a:prstGeom prst="rect">
@@ -12847,7 +12633,7 @@
         </p:nvSpPr>
         <p:spPr>
           <a:xfrm>
-            <a:off x="457200" y="2514600"/>
+            <a:off x="457200" y="2212848"/>
             <a:ext cx="1828800" cy="384048"/>
           </a:xfrm>
           <a:prstGeom prst="rect">
@@ -12886,8 +12672,8 @@
         </p:nvSpPr>
         <p:spPr>
           <a:xfrm>
-            <a:off x="457200" y="2907792"/>
-            <a:ext cx="1828800" cy="256032"/>
+            <a:off x="457200" y="2606040"/>
+            <a:ext cx="1828800" cy="237744"/>
           </a:xfrm>
           <a:prstGeom prst="rect">
             <a:avLst/>
@@ -12925,8 +12711,8 @@
         </p:nvSpPr>
         <p:spPr>
           <a:xfrm>
-            <a:off x="457200" y="3200400"/>
-            <a:ext cx="1828800" cy="1627632"/>
+            <a:off x="457200" y="2889504"/>
+            <a:ext cx="1828800" cy="1764792"/>
           </a:xfrm>
           <a:prstGeom prst="rect">
             <a:avLst/>
@@ -12940,7 +12726,7 @@
           <a:p>
             <a:pPr algn="l" marL="342900" indent="-342900">
               <a:spcAft>
-                <a:spcPts val="400"/>
+                <a:spcPts val="300"/>
               </a:spcAft>
               <a:buSzPct val="100000"/>
               <a:buChar char="•"/>
@@ -12961,7 +12747,7 @@
           <a:p>
             <a:pPr algn="l" marL="342900" indent="-342900">
               <a:spcAft>
-                <a:spcPts val="400"/>
+                <a:spcPts val="300"/>
               </a:spcAft>
               <a:buSzPct val="100000"/>
               <a:buChar char="•"/>
@@ -12982,7 +12768,7 @@
           <a:p>
             <a:pPr algn="l" marL="342900" indent="-342900">
               <a:spcAft>
-                <a:spcPts val="400"/>
+                <a:spcPts val="300"/>
               </a:spcAft>
               <a:buSzPct val="100000"/>
               <a:buChar char="•"/>
@@ -13003,7 +12789,7 @@
           <a:p>
             <a:pPr algn="l" marL="342900" indent="-342900">
               <a:spcAft>
-                <a:spcPts val="400"/>
+                <a:spcPts val="300"/>
               </a:spcAft>
               <a:buSzPct val="100000"/>
               <a:buChar char="•"/>
@@ -13017,7 +12803,7 @@
                 <a:ea typeface="Calibri" pitchFamily="34" charset="-122"/>
                 <a:cs typeface="Calibri" pitchFamily="34" charset="-120"/>
               </a:rPr>
-              <a:t>Topic cluster detection</a:t>
+              <a:t>Topic cluster detection engine</a:t>
             </a:r>
             <a:endParaRPr lang="en-US" sz="1000" dirty="0"/>
           </a:p>
@@ -13031,8 +12817,8 @@
         </p:nvSpPr>
         <p:spPr>
           <a:xfrm>
-            <a:off x="2935224" y="1417320"/>
-            <a:ext cx="868680" cy="868680"/>
+            <a:off x="2935224" y="1161288"/>
+            <a:ext cx="850392" cy="850392"/>
           </a:xfrm>
           <a:prstGeom prst="ellipse">
             <a:avLst/>
@@ -13056,8 +12842,8 @@
         </p:nvSpPr>
         <p:spPr>
           <a:xfrm>
-            <a:off x="2935224" y="1417320"/>
-            <a:ext cx="868680" cy="868680"/>
+            <a:off x="2935224" y="1161288"/>
+            <a:ext cx="850392" cy="850392"/>
           </a:xfrm>
           <a:prstGeom prst="rect">
             <a:avLst/>
@@ -13095,8 +12881,8 @@
         </p:nvSpPr>
         <p:spPr>
           <a:xfrm>
-            <a:off x="2496312" y="2423160"/>
-            <a:ext cx="2011680" cy="2514600"/>
+            <a:off x="2496312" y="2121408"/>
+            <a:ext cx="2011680" cy="2651760"/>
           </a:xfrm>
           <a:prstGeom prst="rect">
             <a:avLst/>
@@ -13127,7 +12913,7 @@
         </p:nvSpPr>
         <p:spPr>
           <a:xfrm>
-            <a:off x="2496312" y="2423160"/>
+            <a:off x="2496312" y="2121408"/>
             <a:ext cx="2011680" cy="64008"/>
           </a:xfrm>
           <a:prstGeom prst="rect">
@@ -13152,7 +12938,7 @@
         </p:nvSpPr>
         <p:spPr>
           <a:xfrm>
-            <a:off x="2606040" y="2514600"/>
+            <a:off x="2606040" y="2212848"/>
             <a:ext cx="1828800" cy="384048"/>
           </a:xfrm>
           <a:prstGeom prst="rect">
@@ -13191,8 +12977,8 @@
         </p:nvSpPr>
         <p:spPr>
           <a:xfrm>
-            <a:off x="2606040" y="2907792"/>
-            <a:ext cx="1828800" cy="256032"/>
+            <a:off x="2606040" y="2606040"/>
+            <a:ext cx="1828800" cy="237744"/>
           </a:xfrm>
           <a:prstGeom prst="rect">
             <a:avLst/>
@@ -13230,8 +13016,8 @@
         </p:nvSpPr>
         <p:spPr>
           <a:xfrm>
-            <a:off x="2606040" y="3200400"/>
-            <a:ext cx="1828800" cy="1627632"/>
+            <a:off x="2606040" y="2889504"/>
+            <a:ext cx="1828800" cy="1764792"/>
           </a:xfrm>
           <a:prstGeom prst="rect">
             <a:avLst/>
@@ -13245,7 +13031,7 @@
           <a:p>
             <a:pPr algn="l" marL="342900" indent="-342900">
               <a:spcAft>
-                <a:spcPts val="400"/>
+                <a:spcPts val="300"/>
               </a:spcAft>
               <a:buSzPct val="100000"/>
               <a:buChar char="•"/>
@@ -13259,14 +13045,14 @@
                 <a:ea typeface="Calibri" pitchFamily="34" charset="-122"/>
                 <a:cs typeface="Calibri" pitchFamily="34" charset="-120"/>
               </a:rPr>
-              <a:t>Open-weight SLM (Ollama / HF / OpenAI)</a:t>
+              <a:t>Open-weight SLM (Ollama / HF)</a:t>
             </a:r>
             <a:endParaRPr lang="en-US" sz="1000" dirty="0"/>
           </a:p>
           <a:p>
             <a:pPr algn="l" marL="342900" indent="-342900">
               <a:spcAft>
-                <a:spcPts val="400"/>
+                <a:spcPts val="300"/>
               </a:spcAft>
               <a:buSzPct val="100000"/>
               <a:buChar char="•"/>
@@ -13287,7 +13073,7 @@
           <a:p>
             <a:pPr algn="l" marL="342900" indent="-342900">
               <a:spcAft>
-                <a:spcPts val="400"/>
+                <a:spcPts val="300"/>
               </a:spcAft>
               <a:buSzPct val="100000"/>
               <a:buChar char="•"/>
@@ -13308,7 +13094,7 @@
           <a:p>
             <a:pPr algn="l" marL="342900" indent="-342900">
               <a:spcAft>
-                <a:spcPts val="400"/>
+                <a:spcPts val="300"/>
               </a:spcAft>
               <a:buSzPct val="100000"/>
               <a:buChar char="•"/>
@@ -13322,7 +13108,7 @@
                 <a:ea typeface="Calibri" pitchFamily="34" charset="-122"/>
                 <a:cs typeface="Calibri" pitchFamily="34" charset="-120"/>
               </a:rPr>
-              <a:t>Revision plan + trend analysis</a:t>
+              <a:t>Revision plan + trend endpoints</a:t>
             </a:r>
             <a:endParaRPr lang="en-US" sz="1000" dirty="0"/>
           </a:p>
@@ -13336,8 +13122,8 @@
         </p:nvSpPr>
         <p:spPr>
           <a:xfrm>
-            <a:off x="5084064" y="1417320"/>
-            <a:ext cx="868680" cy="868680"/>
+            <a:off x="5084064" y="1161288"/>
+            <a:ext cx="850392" cy="850392"/>
           </a:xfrm>
           <a:prstGeom prst="ellipse">
             <a:avLst/>
@@ -13361,8 +13147,8 @@
         </p:nvSpPr>
         <p:spPr>
           <a:xfrm>
-            <a:off x="5084064" y="1417320"/>
-            <a:ext cx="868680" cy="868680"/>
+            <a:off x="5084064" y="1161288"/>
+            <a:ext cx="850392" cy="850392"/>
           </a:xfrm>
           <a:prstGeom prst="rect">
             <a:avLst/>
@@ -13400,8 +13186,8 @@
         </p:nvSpPr>
         <p:spPr>
           <a:xfrm>
-            <a:off x="4645152" y="2423160"/>
-            <a:ext cx="2011680" cy="2514600"/>
+            <a:off x="4645152" y="2121408"/>
+            <a:ext cx="2011680" cy="2651760"/>
           </a:xfrm>
           <a:prstGeom prst="rect">
             <a:avLst/>
@@ -13432,7 +13218,7 @@
         </p:nvSpPr>
         <p:spPr>
           <a:xfrm>
-            <a:off x="4645152" y="2423160"/>
+            <a:off x="4645152" y="2121408"/>
             <a:ext cx="2011680" cy="64008"/>
           </a:xfrm>
           <a:prstGeom prst="rect">
@@ -13457,7 +13243,7 @@
         </p:nvSpPr>
         <p:spPr>
           <a:xfrm>
-            <a:off x="4754880" y="2514600"/>
+            <a:off x="4754880" y="2212848"/>
             <a:ext cx="1828800" cy="384048"/>
           </a:xfrm>
           <a:prstGeom prst="rect">
@@ -13496,8 +13282,8 @@
         </p:nvSpPr>
         <p:spPr>
           <a:xfrm>
-            <a:off x="4754880" y="2907792"/>
-            <a:ext cx="1828800" cy="256032"/>
+            <a:off x="4754880" y="2606040"/>
+            <a:ext cx="1828800" cy="237744"/>
           </a:xfrm>
           <a:prstGeom prst="rect">
             <a:avLst/>
@@ -13535,8 +13321,8 @@
         </p:nvSpPr>
         <p:spPr>
           <a:xfrm>
-            <a:off x="4754880" y="3200400"/>
-            <a:ext cx="1828800" cy="1627632"/>
+            <a:off x="4754880" y="2889504"/>
+            <a:ext cx="1828800" cy="1764792"/>
           </a:xfrm>
           <a:prstGeom prst="rect">
             <a:avLst/>
@@ -13550,7 +13336,7 @@
           <a:p>
             <a:pPr algn="l" marL="342900" indent="-342900">
               <a:spcAft>
-                <a:spcPts val="400"/>
+                <a:spcPts val="300"/>
               </a:spcAft>
               <a:buSzPct val="100000"/>
               <a:buChar char="•"/>
@@ -13571,7 +13357,7 @@
           <a:p>
             <a:pPr algn="l" marL="342900" indent="-342900">
               <a:spcAft>
-                <a:spcPts val="400"/>
+                <a:spcPts val="300"/>
               </a:spcAft>
               <a:buSzPct val="100000"/>
               <a:buChar char="•"/>
@@ -13592,7 +13378,7 @@
           <a:p>
             <a:pPr algn="l" marL="342900" indent="-342900">
               <a:spcAft>
-                <a:spcPts val="400"/>
+                <a:spcPts val="300"/>
               </a:spcAft>
               <a:buSzPct val="100000"/>
               <a:buChar char="•"/>
@@ -13606,14 +13392,14 @@
                 <a:ea typeface="Calibri" pitchFamily="34" charset="-122"/>
                 <a:cs typeface="Calibri" pitchFamily="34" charset="-120"/>
               </a:rPr>
-              <a:t>Subject-wise interactive study guide</a:t>
+              <a:t>Subject-wise interactive guide</a:t>
             </a:r>
             <a:endParaRPr lang="en-US" sz="1000" dirty="0"/>
           </a:p>
           <a:p>
             <a:pPr algn="l" marL="342900" indent="-342900">
               <a:spcAft>
-                <a:spcPts val="400"/>
+                <a:spcPts val="300"/>
               </a:spcAft>
               <a:buSzPct val="100000"/>
               <a:buChar char="•"/>
@@ -13641,8 +13427,8 @@
         </p:nvSpPr>
         <p:spPr>
           <a:xfrm>
-            <a:off x="7232904" y="1417320"/>
-            <a:ext cx="868680" cy="868680"/>
+            <a:off x="7232904" y="1161288"/>
+            <a:ext cx="850392" cy="850392"/>
           </a:xfrm>
           <a:prstGeom prst="ellipse">
             <a:avLst/>
@@ -13666,8 +13452,8 @@
         </p:nvSpPr>
         <p:spPr>
           <a:xfrm>
-            <a:off x="7232904" y="1417320"/>
-            <a:ext cx="868680" cy="868680"/>
+            <a:off x="7232904" y="1161288"/>
+            <a:ext cx="850392" cy="850392"/>
           </a:xfrm>
           <a:prstGeom prst="rect">
             <a:avLst/>
@@ -13705,8 +13491,8 @@
         </p:nvSpPr>
         <p:spPr>
           <a:xfrm>
-            <a:off x="6793992" y="2423160"/>
-            <a:ext cx="2011680" cy="2514600"/>
+            <a:off x="6793992" y="2121408"/>
+            <a:ext cx="2011680" cy="2651760"/>
           </a:xfrm>
           <a:prstGeom prst="rect">
             <a:avLst/>
@@ -13737,7 +13523,7 @@
         </p:nvSpPr>
         <p:spPr>
           <a:xfrm>
-            <a:off x="6793992" y="2423160"/>
+            <a:off x="6793992" y="2121408"/>
             <a:ext cx="2011680" cy="64008"/>
           </a:xfrm>
           <a:prstGeom prst="rect">
@@ -13762,7 +13548,7 @@
         </p:nvSpPr>
         <p:spPr>
           <a:xfrm>
-            <a:off x="6903720" y="2514600"/>
+            <a:off x="6903720" y="2212848"/>
             <a:ext cx="1828800" cy="384048"/>
           </a:xfrm>
           <a:prstGeom prst="rect">
@@ -13801,8 +13587,8 @@
         </p:nvSpPr>
         <p:spPr>
           <a:xfrm>
-            <a:off x="6903720" y="2907792"/>
-            <a:ext cx="1828800" cy="256032"/>
+            <a:off x="6903720" y="2606040"/>
+            <a:ext cx="1828800" cy="237744"/>
           </a:xfrm>
           <a:prstGeom prst="rect">
             <a:avLst/>
@@ -13840,8 +13626,8 @@
         </p:nvSpPr>
         <p:spPr>
           <a:xfrm>
-            <a:off x="6903720" y="3200400"/>
-            <a:ext cx="1828800" cy="1627632"/>
+            <a:off x="6903720" y="2889504"/>
+            <a:ext cx="1828800" cy="1764792"/>
           </a:xfrm>
           <a:prstGeom prst="rect">
             <a:avLst/>
@@ -13855,7 +13641,7 @@
           <a:p>
             <a:pPr algn="l" marL="342900" indent="-342900">
               <a:spcAft>
-                <a:spcPts val="400"/>
+                <a:spcPts val="300"/>
               </a:spcAft>
               <a:buSzPct val="100000"/>
               <a:buChar char="•"/>
@@ -13869,14 +13655,14 @@
                 <a:ea typeface="Calibri" pitchFamily="34" charset="-122"/>
                 <a:cs typeface="Calibri" pitchFamily="34" charset="-120"/>
               </a:rPr>
-              <a:t>Grounding accuracy benchmarks ≥ 85%</a:t>
+              <a:t>Grounding accuracy ≥ 85%</a:t>
             </a:r>
             <a:endParaRPr lang="en-US" sz="1000" dirty="0"/>
           </a:p>
           <a:p>
             <a:pPr algn="l" marL="342900" indent="-342900">
               <a:spcAft>
-                <a:spcPts val="400"/>
+                <a:spcPts val="300"/>
               </a:spcAft>
               <a:buSzPct val="100000"/>
               <a:buChar char="•"/>
@@ -13897,7 +13683,7 @@
           <a:p>
             <a:pPr algn="l" marL="342900" indent="-342900">
               <a:spcAft>
-                <a:spcPts val="400"/>
+                <a:spcPts val="300"/>
               </a:spcAft>
               <a:buSzPct val="100000"/>
               <a:buChar char="•"/>
@@ -13911,14 +13697,14 @@
                 <a:ea typeface="Calibri" pitchFamily="34" charset="-122"/>
                 <a:cs typeface="Calibri" pitchFamily="34" charset="-120"/>
               </a:rPr>
-              <a:t>Feedback collection (thumbs up/down)</a:t>
+              <a:t>Feedback (thumbs up/down)</a:t>
             </a:r>
             <a:endParaRPr lang="en-US" sz="1000" dirty="0"/>
           </a:p>
           <a:p>
             <a:pPr algn="l" marL="342900" indent="-342900">
               <a:spcAft>
-                <a:spcPts val="400"/>
+                <a:spcPts val="300"/>
               </a:spcAft>
               <a:buSzPct val="100000"/>
               <a:buChar char="•"/>
@@ -13932,7 +13718,7 @@
                 <a:ea typeface="Calibri" pitchFamily="34" charset="-122"/>
                 <a:cs typeface="Calibri" pitchFamily="34" charset="-120"/>
               </a:rPr>
-              <a:t>Auto-regression tests in CI</a:t>
+              <a:t>Auto-regression in CI pipeline</a:t>
             </a:r>
             <a:endParaRPr lang="en-US" sz="1000" dirty="0"/>
           </a:p>
